--- a/templates/DATAIMPORT.pptx
+++ b/templates/DATAIMPORT.pptx
@@ -216,7 +216,7 @@
           <a:p>
             <a:fld id="{7A80141D-9A38-5047-BDE7-EB6430C00520}" type="datetimeFigureOut">
               <a:rPr lang="en-US" smtClean="0"/>
-              <a:t>10/6/2020</a:t>
+              <a:t>1/6/2021</a:t>
             </a:fld>
             <a:endParaRPr lang="en-US" dirty="0"/>
           </a:p>
@@ -1968,6 +1968,9 @@
               <a:defRPr sz="1100"/>
             </a:lvl4pPr>
             <a:lvl5pPr marL="0" indent="0">
+              <a:spcAft>
+                <a:spcPts val="600"/>
+              </a:spcAft>
               <a:buNone/>
               <a:defRPr sz="1100" i="1">
                 <a:solidFill>
@@ -1975,6 +1978,18 @@
                 </a:solidFill>
               </a:defRPr>
             </a:lvl5pPr>
+            <a:lvl6pPr marL="0" indent="0">
+              <a:defRPr lang="en-US" sz="900" kern="1200" dirty="0">
+                <a:solidFill>
+                  <a:schemeClr val="bg2">
+                    <a:lumMod val="50000"/>
+                  </a:schemeClr>
+                </a:solidFill>
+                <a:latin typeface="+mn-lt"/>
+                <a:ea typeface="+mn-ea"/>
+                <a:cs typeface="+mn-cs"/>
+              </a:defRPr>
+            </a:lvl6pPr>
           </a:lstStyle>
           <a:p>
             <a:pPr lvl="0"/>
@@ -2009,6 +2024,22 @@
             <a:r>
               <a:rPr lang="en-US" dirty="0"/>
               <a:t>Fifth level</a:t>
+            </a:r>
+          </a:p>
+          <a:p>
+            <a:pPr marL="0" lvl="5" indent="0" algn="l" defTabSz="906199" rtl="0" eaLnBrk="1" latinLnBrk="0" hangingPunct="1">
+              <a:spcBef>
+                <a:spcPts val="0"/>
+              </a:spcBef>
+              <a:spcAft>
+                <a:spcPts val="600"/>
+              </a:spcAft>
+              <a:buFont typeface="Arial" panose="020B0604020202020204" pitchFamily="34" charset="0"/>
+              <a:buNone/>
+            </a:pPr>
+            <a:r>
+              <a:rPr lang="en-US" dirty="0"/>
+              <a:t>Sixth level</a:t>
             </a:r>
           </a:p>
         </p:txBody>
@@ -2569,6 +2600,9 @@
               <a:defRPr sz="1100"/>
             </a:lvl4pPr>
             <a:lvl5pPr marL="0" indent="0">
+              <a:spcAft>
+                <a:spcPts val="600"/>
+              </a:spcAft>
               <a:buNone/>
               <a:defRPr sz="1100" i="1">
                 <a:solidFill>
@@ -2576,6 +2610,18 @@
                 </a:solidFill>
               </a:defRPr>
             </a:lvl5pPr>
+            <a:lvl6pPr marL="0" indent="0">
+              <a:defRPr lang="en-US" sz="900" kern="1200" dirty="0">
+                <a:solidFill>
+                  <a:schemeClr val="bg2">
+                    <a:lumMod val="50000"/>
+                  </a:schemeClr>
+                </a:solidFill>
+                <a:latin typeface="+mn-lt"/>
+                <a:ea typeface="+mn-ea"/>
+                <a:cs typeface="+mn-cs"/>
+              </a:defRPr>
+            </a:lvl6pPr>
           </a:lstStyle>
           <a:p>
             <a:pPr lvl="0"/>
@@ -2610,6 +2656,22 @@
             <a:r>
               <a:rPr lang="en-US" dirty="0"/>
               <a:t>Fifth level</a:t>
+            </a:r>
+          </a:p>
+          <a:p>
+            <a:pPr marL="0" lvl="5" indent="0" algn="l" defTabSz="906199" rtl="0" eaLnBrk="1" latinLnBrk="0" hangingPunct="1">
+              <a:spcBef>
+                <a:spcPts val="0"/>
+              </a:spcBef>
+              <a:spcAft>
+                <a:spcPts val="600"/>
+              </a:spcAft>
+              <a:buFont typeface="Arial" panose="020B0604020202020204" pitchFamily="34" charset="0"/>
+              <a:buNone/>
+            </a:pPr>
+            <a:r>
+              <a:rPr lang="en-US" dirty="0"/>
+              <a:t>Sixth level</a:t>
             </a:r>
           </a:p>
         </p:txBody>
@@ -2632,6 +2694,545 @@
 
 <file path=ppt/slideLayouts/slideLayout13.xml><?xml version="1.0" encoding="utf-8"?>
 <p:sldLayout xmlns:a="http://schemas.openxmlformats.org/drawingml/2006/main" xmlns:r="http://schemas.openxmlformats.org/officeDocument/2006/relationships" xmlns:p="http://schemas.openxmlformats.org/presentationml/2006/main" preserve="1" userDrawn="1">
+  <p:cSld name="TT_Chart_w_Emphasis-Section">
+    <p:spTree>
+      <p:nvGrpSpPr>
+        <p:cNvPr id="1" name=""/>
+        <p:cNvGrpSpPr/>
+        <p:nvPr/>
+      </p:nvGrpSpPr>
+      <p:grpSpPr>
+        <a:xfrm>
+          <a:off x="0" y="0"/>
+          <a:ext cx="0" cy="0"/>
+          <a:chOff x="0" y="0"/>
+          <a:chExt cx="0" cy="0"/>
+        </a:xfrm>
+      </p:grpSpPr>
+      <p:sp>
+        <p:nvSpPr>
+          <p:cNvPr id="8" name="Rectangle 7">
+            <a:extLst>
+              <a:ext uri="{FF2B5EF4-FFF2-40B4-BE49-F238E27FC236}">
+                <a16:creationId xmlns:a16="http://schemas.microsoft.com/office/drawing/2014/main" id="{60658612-79D8-48D2-AA38-8F82D71FB7C9}"/>
+              </a:ext>
+            </a:extLst>
+          </p:cNvPr>
+          <p:cNvSpPr/>
+          <p:nvPr userDrawn="1"/>
+        </p:nvSpPr>
+        <p:spPr>
+          <a:xfrm>
+            <a:off x="9266223" y="0"/>
+            <a:ext cx="2925777" cy="6858000"/>
+          </a:xfrm>
+          <a:prstGeom prst="rect">
+            <a:avLst/>
+          </a:prstGeom>
+          <a:solidFill>
+            <a:srgbClr val="FFFFFF"/>
+          </a:solidFill>
+          <a:ln>
+            <a:noFill/>
+          </a:ln>
+        </p:spPr>
+        <p:style>
+          <a:lnRef idx="2">
+            <a:schemeClr val="accent1">
+              <a:shade val="50000"/>
+            </a:schemeClr>
+          </a:lnRef>
+          <a:fillRef idx="1">
+            <a:schemeClr val="accent1"/>
+          </a:fillRef>
+          <a:effectRef idx="0">
+            <a:schemeClr val="accent1"/>
+          </a:effectRef>
+          <a:fontRef idx="minor">
+            <a:schemeClr val="lt1"/>
+          </a:fontRef>
+        </p:style>
+        <p:txBody>
+          <a:bodyPr rtlCol="0" anchor="ctr"/>
+          <a:lstStyle/>
+          <a:p>
+            <a:pPr algn="ctr"/>
+            <a:endParaRPr lang="en-US" dirty="0"/>
+          </a:p>
+        </p:txBody>
+      </p:sp>
+      <p:sp>
+        <p:nvSpPr>
+          <p:cNvPr id="7" name="Chart 1"/>
+          <p:cNvSpPr>
+            <a:spLocks noGrp="1"/>
+          </p:cNvSpPr>
+          <p:nvPr>
+            <p:ph type="chart" sz="quarter" idx="14"/>
+          </p:nvPr>
+        </p:nvSpPr>
+        <p:spPr>
+          <a:xfrm>
+            <a:off x="3391654" y="943244"/>
+            <a:ext cx="5408692" cy="4887188"/>
+          </a:xfrm>
+          <a:prstGeom prst="rect">
+            <a:avLst/>
+          </a:prstGeom>
+        </p:spPr>
+        <p:txBody>
+          <a:bodyPr/>
+          <a:lstStyle/>
+          <a:p>
+            <a:endParaRPr lang="en-US" dirty="0"/>
+          </a:p>
+        </p:txBody>
+      </p:sp>
+      <p:sp>
+        <p:nvSpPr>
+          <p:cNvPr id="6" name="PPH-SlideNo"/>
+          <p:cNvSpPr>
+            <a:spLocks noGrp="1"/>
+          </p:cNvSpPr>
+          <p:nvPr>
+            <p:ph type="sldNum" sz="quarter" idx="4"/>
+          </p:nvPr>
+        </p:nvSpPr>
+        <p:spPr>
+          <a:xfrm>
+            <a:off x="10608148" y="6550981"/>
+            <a:ext cx="1117599" cy="230823"/>
+          </a:xfrm>
+          <a:prstGeom prst="rect">
+            <a:avLst/>
+          </a:prstGeom>
+        </p:spPr>
+        <p:txBody>
+          <a:bodyPr vert="horz" wrap="none" lIns="0" tIns="0" rIns="0" bIns="0" rtlCol="0" anchor="b"/>
+          <a:lstStyle>
+            <a:lvl1pPr algn="r">
+              <a:spcBef>
+                <a:spcPts val="0"/>
+              </a:spcBef>
+              <a:defRPr sz="800" b="1">
+                <a:solidFill>
+                  <a:schemeClr val="bg2">
+                    <a:lumMod val="50000"/>
+                  </a:schemeClr>
+                </a:solidFill>
+                <a:latin typeface="+mn-lt"/>
+              </a:defRPr>
+            </a:lvl1pPr>
+          </a:lstStyle>
+          <a:p>
+            <a:pPr defTabSz="856716"/>
+            <a:fld id="{7B6B1C32-E567-445C-9FD5-2A0B0A08DD29}" type="slidenum">
+              <a:rPr lang="en-US" smtClean="0"/>
+              <a:pPr defTabSz="856716"/>
+              <a:t>‹#›</a:t>
+            </a:fld>
+            <a:endParaRPr lang="en-US" dirty="0"/>
+          </a:p>
+        </p:txBody>
+      </p:sp>
+      <p:sp>
+        <p:nvSpPr>
+          <p:cNvPr id="10" name="Section Tag">
+            <a:extLst>
+              <a:ext uri="{FF2B5EF4-FFF2-40B4-BE49-F238E27FC236}">
+                <a16:creationId xmlns:a16="http://schemas.microsoft.com/office/drawing/2014/main" id="{862632C5-CE1F-4714-B8E6-9C62993BDD97}"/>
+              </a:ext>
+            </a:extLst>
+          </p:cNvPr>
+          <p:cNvSpPr>
+            <a:spLocks noGrp="1"/>
+          </p:cNvSpPr>
+          <p:nvPr>
+            <p:ph type="body" sz="quarter" idx="16" hasCustomPrompt="1"/>
+          </p:nvPr>
+        </p:nvSpPr>
+        <p:spPr>
+          <a:xfrm>
+            <a:off x="457200" y="425325"/>
+            <a:ext cx="8343146" cy="298952"/>
+          </a:xfrm>
+          <a:prstGeom prst="rect">
+            <a:avLst/>
+          </a:prstGeom>
+        </p:spPr>
+        <p:txBody>
+          <a:bodyPr/>
+          <a:lstStyle>
+            <a:lvl1pPr>
+              <a:defRPr lang="en-US" sz="1400" b="1" kern="1200" cap="all" spc="150" baseline="0" dirty="0">
+                <a:solidFill>
+                  <a:schemeClr val="bg2">
+                    <a:lumMod val="50000"/>
+                  </a:schemeClr>
+                </a:solidFill>
+                <a:latin typeface="+mn-lt"/>
+                <a:ea typeface="Georgia" charset="0"/>
+                <a:cs typeface="Georgia" charset="0"/>
+              </a:defRPr>
+            </a:lvl1pPr>
+            <a:lvl2pPr marL="0" indent="0">
+              <a:buNone/>
+              <a:defRPr/>
+            </a:lvl2pPr>
+          </a:lstStyle>
+          <a:p>
+            <a:pPr marL="0" lvl="0" indent="0" algn="l" defTabSz="906199" rtl="0" eaLnBrk="1" latinLnBrk="0" hangingPunct="1">
+              <a:spcBef>
+                <a:spcPts val="0"/>
+              </a:spcBef>
+              <a:spcAft>
+                <a:spcPts val="800"/>
+              </a:spcAft>
+              <a:buClrTx/>
+              <a:buFont typeface="Calibri" panose="020F0502020204030204" pitchFamily="34" charset="0"/>
+              <a:buNone/>
+            </a:pPr>
+            <a:r>
+              <a:rPr lang="en-US" dirty="0"/>
+              <a:t>SECTION TAG</a:t>
+            </a:r>
+          </a:p>
+        </p:txBody>
+      </p:sp>
+      <p:sp>
+        <p:nvSpPr>
+          <p:cNvPr id="11" name="Footer Placeholder 3">
+            <a:extLst>
+              <a:ext uri="{FF2B5EF4-FFF2-40B4-BE49-F238E27FC236}">
+                <a16:creationId xmlns:a16="http://schemas.microsoft.com/office/drawing/2014/main" id="{69C45DB4-4260-4526-A638-DD1465DD620C}"/>
+              </a:ext>
+            </a:extLst>
+          </p:cNvPr>
+          <p:cNvSpPr>
+            <a:spLocks noGrp="1"/>
+          </p:cNvSpPr>
+          <p:nvPr>
+            <p:ph type="ftr" sz="quarter" idx="3"/>
+          </p:nvPr>
+        </p:nvSpPr>
+        <p:spPr>
+          <a:xfrm>
+            <a:off x="457199" y="6023777"/>
+            <a:ext cx="8343145" cy="365125"/>
+          </a:xfrm>
+          <a:prstGeom prst="rect">
+            <a:avLst/>
+          </a:prstGeom>
+        </p:spPr>
+        <p:txBody>
+          <a:bodyPr vert="horz" lIns="0" tIns="0" rIns="0" bIns="0" rtlCol="0" anchor="b"/>
+          <a:lstStyle>
+            <a:lvl1pPr algn="l">
+              <a:spcBef>
+                <a:spcPts val="0"/>
+              </a:spcBef>
+              <a:defRPr sz="800">
+                <a:solidFill>
+                  <a:schemeClr val="tx1"/>
+                </a:solidFill>
+              </a:defRPr>
+            </a:lvl1pPr>
+          </a:lstStyle>
+          <a:p>
+            <a:r>
+              <a:rPr lang="en-US"/>
+              <a:t>Base:</a:t>
+            </a:r>
+            <a:br>
+              <a:rPr lang="en-US"/>
+            </a:br>
+            <a:r>
+              <a:rPr lang="en-US"/>
+              <a:t>Q:</a:t>
+            </a:r>
+            <a:br>
+              <a:rPr lang="en-US"/>
+            </a:br>
+            <a:r>
+              <a:rPr lang="en-US"/>
+              <a:t>Note:</a:t>
+            </a:r>
+            <a:endParaRPr lang="en-US" dirty="0"/>
+          </a:p>
+        </p:txBody>
+      </p:sp>
+      <p:sp>
+        <p:nvSpPr>
+          <p:cNvPr id="13" name="BodyCopy 1">
+            <a:extLst>
+              <a:ext uri="{FF2B5EF4-FFF2-40B4-BE49-F238E27FC236}">
+                <a16:creationId xmlns:a16="http://schemas.microsoft.com/office/drawing/2014/main" id="{11C54BBE-FE01-4231-AB8B-3E22A0595DD4}"/>
+              </a:ext>
+            </a:extLst>
+          </p:cNvPr>
+          <p:cNvSpPr>
+            <a:spLocks noGrp="1"/>
+          </p:cNvSpPr>
+          <p:nvPr>
+            <p:ph type="body" sz="quarter" idx="22"/>
+          </p:nvPr>
+        </p:nvSpPr>
+        <p:spPr>
+          <a:xfrm>
+            <a:off x="457201" y="951101"/>
+            <a:ext cx="2466364" cy="4879331"/>
+          </a:xfrm>
+          <a:prstGeom prst="rect">
+            <a:avLst/>
+          </a:prstGeom>
+        </p:spPr>
+        <p:txBody>
+          <a:bodyPr anchor="ctr"/>
+          <a:lstStyle>
+            <a:lvl1pPr>
+              <a:defRPr sz="1800"/>
+            </a:lvl1pPr>
+            <a:lvl2pPr marL="0" indent="0">
+              <a:buNone/>
+              <a:defRPr sz="1100" b="0"/>
+            </a:lvl2pPr>
+            <a:lvl3pPr marL="173038" indent="-173038">
+              <a:buClr>
+                <a:schemeClr val="bg2">
+                  <a:lumMod val="50000"/>
+                </a:schemeClr>
+              </a:buClr>
+              <a:buFont typeface="Arial" panose="020B0604020202020204" pitchFamily="34" charset="0"/>
+              <a:buChar char="●"/>
+              <a:defRPr sz="1100" b="0"/>
+            </a:lvl3pPr>
+            <a:lvl4pPr marL="344488" indent="-171450">
+              <a:defRPr sz="1100"/>
+            </a:lvl4pPr>
+            <a:lvl5pPr marL="0" indent="0">
+              <a:spcAft>
+                <a:spcPts val="600"/>
+              </a:spcAft>
+              <a:buNone/>
+              <a:defRPr sz="1100" i="1">
+                <a:solidFill>
+                  <a:schemeClr val="accent1"/>
+                </a:solidFill>
+              </a:defRPr>
+            </a:lvl5pPr>
+            <a:lvl6pPr marL="0" indent="0">
+              <a:defRPr lang="en-US" sz="900" kern="1200" dirty="0">
+                <a:solidFill>
+                  <a:schemeClr val="bg2">
+                    <a:lumMod val="50000"/>
+                  </a:schemeClr>
+                </a:solidFill>
+                <a:latin typeface="+mn-lt"/>
+                <a:ea typeface="+mn-ea"/>
+                <a:cs typeface="+mn-cs"/>
+              </a:defRPr>
+            </a:lvl6pPr>
+          </a:lstStyle>
+          <a:p>
+            <a:pPr lvl="0"/>
+            <a:r>
+              <a:rPr lang="en-US" dirty="0"/>
+              <a:t>Click to edit Master text styles</a:t>
+            </a:r>
+          </a:p>
+          <a:p>
+            <a:pPr lvl="1"/>
+            <a:r>
+              <a:rPr lang="en-US" dirty="0"/>
+              <a:t>Second level</a:t>
+            </a:r>
+          </a:p>
+          <a:p>
+            <a:pPr lvl="2"/>
+            <a:r>
+              <a:rPr lang="en-US" dirty="0"/>
+              <a:t>Third level</a:t>
+            </a:r>
+          </a:p>
+          <a:p>
+            <a:pPr lvl="3"/>
+            <a:r>
+              <a:rPr lang="en-US" dirty="0"/>
+              <a:t>Fourth level</a:t>
+            </a:r>
+          </a:p>
+          <a:p>
+            <a:pPr lvl="4"/>
+            <a:r>
+              <a:rPr lang="en-US" dirty="0"/>
+              <a:t>Fifth level</a:t>
+            </a:r>
+          </a:p>
+          <a:p>
+            <a:pPr marL="0" lvl="5" indent="0" algn="l" defTabSz="906199" rtl="0" eaLnBrk="1" latinLnBrk="0" hangingPunct="1">
+              <a:spcBef>
+                <a:spcPts val="0"/>
+              </a:spcBef>
+              <a:spcAft>
+                <a:spcPts val="600"/>
+              </a:spcAft>
+              <a:buFont typeface="Arial" panose="020B0604020202020204" pitchFamily="34" charset="0"/>
+              <a:buNone/>
+            </a:pPr>
+            <a:r>
+              <a:rPr lang="en-US" dirty="0"/>
+              <a:t>Sixth level</a:t>
+            </a:r>
+          </a:p>
+        </p:txBody>
+      </p:sp>
+      <p:sp>
+        <p:nvSpPr>
+          <p:cNvPr id="12" name="Contents">
+            <a:extLst>
+              <a:ext uri="{FF2B5EF4-FFF2-40B4-BE49-F238E27FC236}">
+                <a16:creationId xmlns:a16="http://schemas.microsoft.com/office/drawing/2014/main" id="{71615DF6-BC0D-4E4D-ACBA-3938EAD1DF42}"/>
+              </a:ext>
+            </a:extLst>
+          </p:cNvPr>
+          <p:cNvSpPr>
+            <a:spLocks noGrp="1"/>
+          </p:cNvSpPr>
+          <p:nvPr>
+            <p:ph type="body" sz="quarter" idx="19" hasCustomPrompt="1"/>
+          </p:nvPr>
+        </p:nvSpPr>
+        <p:spPr>
+          <a:xfrm>
+            <a:off x="9490075" y="425324"/>
+            <a:ext cx="2476500" cy="5975475"/>
+          </a:xfrm>
+          <a:prstGeom prst="rect">
+            <a:avLst/>
+          </a:prstGeom>
+        </p:spPr>
+        <p:txBody>
+          <a:bodyPr/>
+          <a:lstStyle>
+            <a:lvl1pPr>
+              <a:defRPr lang="en-US" sz="1000" kern="1200" cap="all" spc="150" baseline="0" dirty="0" smtClean="0">
+                <a:solidFill>
+                  <a:schemeClr val="bg2">
+                    <a:lumMod val="50000"/>
+                  </a:schemeClr>
+                </a:solidFill>
+                <a:latin typeface="+mn-lt"/>
+                <a:ea typeface="Georgia" charset="0"/>
+                <a:cs typeface="Georgia" charset="0"/>
+              </a:defRPr>
+            </a:lvl1pPr>
+            <a:lvl2pPr marL="0" indent="0">
+              <a:spcBef>
+                <a:spcPts val="1200"/>
+              </a:spcBef>
+              <a:spcAft>
+                <a:spcPts val="600"/>
+              </a:spcAft>
+              <a:buNone/>
+              <a:defRPr sz="1100" b="1"/>
+            </a:lvl2pPr>
+            <a:lvl3pPr marL="0" indent="0">
+              <a:spcAft>
+                <a:spcPts val="600"/>
+              </a:spcAft>
+              <a:buNone/>
+              <a:defRPr sz="1100"/>
+            </a:lvl3pPr>
+            <a:lvl4pPr marL="0" indent="0">
+              <a:spcAft>
+                <a:spcPts val="600"/>
+              </a:spcAft>
+              <a:buNone/>
+              <a:defRPr sz="800">
+                <a:solidFill>
+                  <a:schemeClr val="bg2">
+                    <a:lumMod val="50000"/>
+                  </a:schemeClr>
+                </a:solidFill>
+              </a:defRPr>
+            </a:lvl4pPr>
+            <a:lvl5pPr marL="0" indent="0">
+              <a:spcAft>
+                <a:spcPts val="600"/>
+              </a:spcAft>
+              <a:buNone/>
+              <a:defRPr sz="1100" i="1">
+                <a:solidFill>
+                  <a:schemeClr val="accent1"/>
+                </a:solidFill>
+              </a:defRPr>
+            </a:lvl5pPr>
+          </a:lstStyle>
+          <a:p>
+            <a:pPr marL="0" lvl="0" indent="0" algn="l" defTabSz="906199" rtl="0" eaLnBrk="1" latinLnBrk="0" hangingPunct="1">
+              <a:spcBef>
+                <a:spcPts val="1200"/>
+              </a:spcBef>
+              <a:spcAft>
+                <a:spcPts val="600"/>
+              </a:spcAft>
+              <a:buClrTx/>
+              <a:buFont typeface="Calibri" panose="020F0502020204030204" pitchFamily="34" charset="0"/>
+              <a:buNone/>
+            </a:pPr>
+            <a:r>
+              <a:rPr lang="en-US" dirty="0"/>
+              <a:t>CLICK TO EDIT MASTER TEXT STYLES</a:t>
+            </a:r>
+          </a:p>
+          <a:p>
+            <a:pPr lvl="1"/>
+            <a:r>
+              <a:rPr lang="en-US" dirty="0"/>
+              <a:t>Second level</a:t>
+            </a:r>
+          </a:p>
+          <a:p>
+            <a:pPr lvl="2"/>
+            <a:r>
+              <a:rPr lang="en-US" dirty="0"/>
+              <a:t>Third level</a:t>
+            </a:r>
+          </a:p>
+          <a:p>
+            <a:pPr lvl="3"/>
+            <a:r>
+              <a:rPr lang="en-US" dirty="0"/>
+              <a:t>Fourth level</a:t>
+            </a:r>
+          </a:p>
+          <a:p>
+            <a:pPr lvl="4"/>
+            <a:r>
+              <a:rPr lang="en-US" dirty="0"/>
+              <a:t>Fifth level</a:t>
+            </a:r>
+          </a:p>
+        </p:txBody>
+      </p:sp>
+    </p:spTree>
+    <p:custDataLst>
+      <p:tags r:id="rId1"/>
+    </p:custDataLst>
+    <p:extLst>
+      <p:ext uri="{BB962C8B-B14F-4D97-AF65-F5344CB8AC3E}">
+        <p14:creationId xmlns:p14="http://schemas.microsoft.com/office/powerpoint/2010/main" val="2810385280"/>
+      </p:ext>
+    </p:extLst>
+  </p:cSld>
+  <p:clrMapOvr>
+    <a:masterClrMapping/>
+  </p:clrMapOvr>
+</p:sldLayout>
+</file>
+
+<file path=ppt/slideLayouts/slideLayout14.xml><?xml version="1.0" encoding="utf-8"?>
+<p:sldLayout xmlns:a="http://schemas.openxmlformats.org/drawingml/2006/main" xmlns:r="http://schemas.openxmlformats.org/officeDocument/2006/relationships" xmlns:p="http://schemas.openxmlformats.org/presentationml/2006/main" preserve="1" userDrawn="1">
   <p:cSld name="TT_2_Chart_&amp;_Text">
     <p:spTree>
       <p:nvGrpSpPr>
@@ -2935,6 +3536,9 @@
               <a:defRPr sz="1100"/>
             </a:lvl4pPr>
             <a:lvl5pPr marL="0" indent="0">
+              <a:spcAft>
+                <a:spcPts val="600"/>
+              </a:spcAft>
               <a:buNone/>
               <a:defRPr sz="1100" i="1">
                 <a:solidFill>
@@ -2942,6 +3546,18 @@
                 </a:solidFill>
               </a:defRPr>
             </a:lvl5pPr>
+            <a:lvl6pPr marL="0" indent="0">
+              <a:defRPr lang="en-US" sz="900" kern="1200" dirty="0">
+                <a:solidFill>
+                  <a:schemeClr val="bg2">
+                    <a:lumMod val="50000"/>
+                  </a:schemeClr>
+                </a:solidFill>
+                <a:latin typeface="+mn-lt"/>
+                <a:ea typeface="+mn-ea"/>
+                <a:cs typeface="+mn-cs"/>
+              </a:defRPr>
+            </a:lvl6pPr>
           </a:lstStyle>
           <a:p>
             <a:pPr lvl="0"/>
@@ -2976,6 +3592,22 @@
             <a:r>
               <a:rPr lang="en-US" dirty="0"/>
               <a:t>Fifth level</a:t>
+            </a:r>
+          </a:p>
+          <a:p>
+            <a:pPr marL="0" lvl="5" indent="0" algn="l" defTabSz="906199" rtl="0" eaLnBrk="1" latinLnBrk="0" hangingPunct="1">
+              <a:spcBef>
+                <a:spcPts val="0"/>
+              </a:spcBef>
+              <a:spcAft>
+                <a:spcPts val="600"/>
+              </a:spcAft>
+              <a:buFont typeface="Arial" panose="020B0604020202020204" pitchFamily="34" charset="0"/>
+              <a:buNone/>
+            </a:pPr>
+            <a:r>
+              <a:rPr lang="en-US" dirty="0"/>
+              <a:t>Sixth level</a:t>
             </a:r>
           </a:p>
         </p:txBody>
@@ -2996,7 +3628,7 @@
 </p:sldLayout>
 </file>
 
-<file path=ppt/slideLayouts/slideLayout14.xml><?xml version="1.0" encoding="utf-8"?>
+<file path=ppt/slideLayouts/slideLayout15.xml><?xml version="1.0" encoding="utf-8"?>
 <p:sldLayout xmlns:a="http://schemas.openxmlformats.org/drawingml/2006/main" xmlns:r="http://schemas.openxmlformats.org/officeDocument/2006/relationships" xmlns:p="http://schemas.openxmlformats.org/presentationml/2006/main" preserve="1" userDrawn="1">
   <p:cSld name="TT_2_H_Chart&amp;_Text">
     <p:spTree>
@@ -3301,6 +3933,9 @@
               <a:defRPr sz="1100"/>
             </a:lvl4pPr>
             <a:lvl5pPr marL="0" indent="0">
+              <a:spcAft>
+                <a:spcPts val="600"/>
+              </a:spcAft>
               <a:buNone/>
               <a:defRPr sz="1100" i="1">
                 <a:solidFill>
@@ -3308,6 +3943,18 @@
                 </a:solidFill>
               </a:defRPr>
             </a:lvl5pPr>
+            <a:lvl6pPr marL="0" indent="0">
+              <a:defRPr lang="en-US" sz="900" kern="1200" dirty="0">
+                <a:solidFill>
+                  <a:schemeClr val="bg2">
+                    <a:lumMod val="50000"/>
+                  </a:schemeClr>
+                </a:solidFill>
+                <a:latin typeface="+mn-lt"/>
+                <a:ea typeface="+mn-ea"/>
+                <a:cs typeface="+mn-cs"/>
+              </a:defRPr>
+            </a:lvl6pPr>
           </a:lstStyle>
           <a:p>
             <a:pPr lvl="0"/>
@@ -3342,6 +3989,22 @@
             <a:r>
               <a:rPr lang="en-US" dirty="0"/>
               <a:t>Fifth level</a:t>
+            </a:r>
+          </a:p>
+          <a:p>
+            <a:pPr marL="0" lvl="5" indent="0" algn="l" defTabSz="906199" rtl="0" eaLnBrk="1" latinLnBrk="0" hangingPunct="1">
+              <a:spcBef>
+                <a:spcPts val="0"/>
+              </a:spcBef>
+              <a:spcAft>
+                <a:spcPts val="600"/>
+              </a:spcAft>
+              <a:buFont typeface="Arial" panose="020B0604020202020204" pitchFamily="34" charset="0"/>
+              <a:buNone/>
+            </a:pPr>
+            <a:r>
+              <a:rPr lang="en-US" dirty="0"/>
+              <a:t>Sixth level</a:t>
             </a:r>
           </a:p>
         </p:txBody>
@@ -3362,7 +4025,7 @@
 </p:sldLayout>
 </file>
 
-<file path=ppt/slideLayouts/slideLayout15.xml><?xml version="1.0" encoding="utf-8"?>
+<file path=ppt/slideLayouts/slideLayout16.xml><?xml version="1.0" encoding="utf-8"?>
 <p:sldLayout xmlns:a="http://schemas.openxmlformats.org/drawingml/2006/main" xmlns:r="http://schemas.openxmlformats.org/officeDocument/2006/relationships" xmlns:p="http://schemas.openxmlformats.org/presentationml/2006/main" preserve="1" userDrawn="1">
   <p:cSld name="TT_Primary_Table_&amp;_Text">
     <p:spTree>
@@ -3634,6 +4297,9 @@
               <a:defRPr sz="1100"/>
             </a:lvl4pPr>
             <a:lvl5pPr marL="0" indent="0">
+              <a:spcAft>
+                <a:spcPts val="600"/>
+              </a:spcAft>
               <a:buNone/>
               <a:defRPr sz="1100" i="1">
                 <a:solidFill>
@@ -3641,6 +4307,18 @@
                 </a:solidFill>
               </a:defRPr>
             </a:lvl5pPr>
+            <a:lvl6pPr marL="0" indent="0">
+              <a:defRPr lang="en-US" sz="900" kern="1200" dirty="0">
+                <a:solidFill>
+                  <a:schemeClr val="bg2">
+                    <a:lumMod val="50000"/>
+                  </a:schemeClr>
+                </a:solidFill>
+                <a:latin typeface="+mn-lt"/>
+                <a:ea typeface="+mn-ea"/>
+                <a:cs typeface="+mn-cs"/>
+              </a:defRPr>
+            </a:lvl6pPr>
           </a:lstStyle>
           <a:p>
             <a:pPr lvl="0"/>
@@ -3675,6 +4353,22 @@
             <a:r>
               <a:rPr lang="en-US" dirty="0"/>
               <a:t>Fifth level</a:t>
+            </a:r>
+          </a:p>
+          <a:p>
+            <a:pPr marL="0" lvl="5" indent="0" algn="l" defTabSz="906199" rtl="0" eaLnBrk="1" latinLnBrk="0" hangingPunct="1">
+              <a:spcBef>
+                <a:spcPts val="0"/>
+              </a:spcBef>
+              <a:spcAft>
+                <a:spcPts val="600"/>
+              </a:spcAft>
+              <a:buFont typeface="Arial" panose="020B0604020202020204" pitchFamily="34" charset="0"/>
+              <a:buNone/>
+            </a:pPr>
+            <a:r>
+              <a:rPr lang="en-US" dirty="0"/>
+              <a:t>Sixth level</a:t>
             </a:r>
           </a:p>
         </p:txBody>
@@ -3695,7 +4389,7 @@
 </p:sldLayout>
 </file>
 
-<file path=ppt/slideLayouts/slideLayout16.xml><?xml version="1.0" encoding="utf-8"?>
+<file path=ppt/slideLayouts/slideLayout17.xml><?xml version="1.0" encoding="utf-8"?>
 <p:sldLayout xmlns:a="http://schemas.openxmlformats.org/drawingml/2006/main" xmlns:r="http://schemas.openxmlformats.org/officeDocument/2006/relationships" xmlns:p="http://schemas.openxmlformats.org/presentationml/2006/main" preserve="1" userDrawn="1">
   <p:cSld name="TT_Primary_Table">
     <p:spTree>
@@ -3942,7 +4636,7 @@
 </p:sldLayout>
 </file>
 
-<file path=ppt/slideLayouts/slideLayout17.xml><?xml version="1.0" encoding="utf-8"?>
+<file path=ppt/slideLayouts/slideLayout18.xml><?xml version="1.0" encoding="utf-8"?>
 <p:sldLayout xmlns:a="http://schemas.openxmlformats.org/drawingml/2006/main" xmlns:r="http://schemas.openxmlformats.org/officeDocument/2006/relationships" xmlns:p="http://schemas.openxmlformats.org/presentationml/2006/main" preserve="1" userDrawn="1">
   <p:cSld name="TT_Two_Table_Equal">
     <p:spTree>
@@ -4230,7 +4924,7 @@
 </p:sldLayout>
 </file>
 
-<file path=ppt/slideLayouts/slideLayout18.xml><?xml version="1.0" encoding="utf-8"?>
+<file path=ppt/slideLayouts/slideLayout19.xml><?xml version="1.0" encoding="utf-8"?>
 <p:sldLayout xmlns:a="http://schemas.openxmlformats.org/drawingml/2006/main" xmlns:r="http://schemas.openxmlformats.org/officeDocument/2006/relationships" xmlns:p="http://schemas.openxmlformats.org/presentationml/2006/main" preserve="1" userDrawn="1">
   <p:cSld name="TT_Two_Chart_Equal">
     <p:spTree>
@@ -4265,7 +4959,7 @@
         </p:nvSpPr>
         <p:spPr>
           <a:xfrm>
-            <a:off x="6323162" y="943244"/>
+            <a:off x="457200" y="943244"/>
             <a:ext cx="5410200" cy="4887188"/>
           </a:xfrm>
           <a:prstGeom prst="rect">
@@ -4292,7 +4986,7 @@
         </p:nvSpPr>
         <p:spPr>
           <a:xfrm>
-            <a:off x="457200" y="943244"/>
+            <a:off x="6315547" y="943244"/>
             <a:ext cx="5410200" cy="4887188"/>
           </a:xfrm>
           <a:prstGeom prst="rect">
@@ -4495,405 +5189,6 @@
     <p:extLst>
       <p:ext uri="{BB962C8B-B14F-4D97-AF65-F5344CB8AC3E}">
         <p14:creationId xmlns:p14="http://schemas.microsoft.com/office/powerpoint/2010/main" val="3977370898"/>
-      </p:ext>
-    </p:extLst>
-  </p:cSld>
-  <p:clrMapOvr>
-    <a:masterClrMapping/>
-  </p:clrMapOvr>
-</p:sldLayout>
-</file>
-
-<file path=ppt/slideLayouts/slideLayout19.xml><?xml version="1.0" encoding="utf-8"?>
-<p:sldLayout xmlns:a="http://schemas.openxmlformats.org/drawingml/2006/main" xmlns:r="http://schemas.openxmlformats.org/officeDocument/2006/relationships" xmlns:p="http://schemas.openxmlformats.org/presentationml/2006/main" preserve="1" userDrawn="1">
-  <p:cSld name="TT_3_Chart_&amp;_Text">
-    <p:spTree>
-      <p:nvGrpSpPr>
-        <p:cNvPr id="1" name=""/>
-        <p:cNvGrpSpPr/>
-        <p:nvPr/>
-      </p:nvGrpSpPr>
-      <p:grpSpPr>
-        <a:xfrm>
-          <a:off x="0" y="0"/>
-          <a:ext cx="0" cy="0"/>
-          <a:chOff x="0" y="0"/>
-          <a:chExt cx="0" cy="0"/>
-        </a:xfrm>
-      </p:grpSpPr>
-      <p:sp>
-        <p:nvSpPr>
-          <p:cNvPr id="6" name="PPH-SlideNo"/>
-          <p:cNvSpPr>
-            <a:spLocks noGrp="1"/>
-          </p:cNvSpPr>
-          <p:nvPr>
-            <p:ph type="sldNum" sz="quarter" idx="4"/>
-          </p:nvPr>
-        </p:nvSpPr>
-        <p:spPr>
-          <a:xfrm>
-            <a:off x="10608148" y="6550981"/>
-            <a:ext cx="1117599" cy="230823"/>
-          </a:xfrm>
-          <a:prstGeom prst="rect">
-            <a:avLst/>
-          </a:prstGeom>
-        </p:spPr>
-        <p:txBody>
-          <a:bodyPr vert="horz" wrap="none" lIns="0" tIns="0" rIns="0" bIns="0" rtlCol="0" anchor="b"/>
-          <a:lstStyle>
-            <a:lvl1pPr algn="r">
-              <a:spcBef>
-                <a:spcPts val="0"/>
-              </a:spcBef>
-              <a:defRPr sz="800" b="1">
-                <a:solidFill>
-                  <a:schemeClr val="bg2">
-                    <a:lumMod val="50000"/>
-                  </a:schemeClr>
-                </a:solidFill>
-                <a:latin typeface="+mn-lt"/>
-              </a:defRPr>
-            </a:lvl1pPr>
-          </a:lstStyle>
-          <a:p>
-            <a:pPr defTabSz="856716"/>
-            <a:fld id="{7B6B1C32-E567-445C-9FD5-2A0B0A08DD29}" type="slidenum">
-              <a:rPr lang="en-US" smtClean="0"/>
-              <a:pPr defTabSz="856716"/>
-              <a:t>‹#›</a:t>
-            </a:fld>
-            <a:endParaRPr lang="en-US" dirty="0"/>
-          </a:p>
-        </p:txBody>
-      </p:sp>
-      <p:sp>
-        <p:nvSpPr>
-          <p:cNvPr id="10" name="Section Tag">
-            <a:extLst>
-              <a:ext uri="{FF2B5EF4-FFF2-40B4-BE49-F238E27FC236}">
-                <a16:creationId xmlns:a16="http://schemas.microsoft.com/office/drawing/2014/main" id="{862632C5-CE1F-4714-B8E6-9C62993BDD97}"/>
-              </a:ext>
-            </a:extLst>
-          </p:cNvPr>
-          <p:cNvSpPr>
-            <a:spLocks noGrp="1"/>
-          </p:cNvSpPr>
-          <p:nvPr>
-            <p:ph type="body" sz="quarter" idx="16" hasCustomPrompt="1"/>
-          </p:nvPr>
-        </p:nvSpPr>
-        <p:spPr>
-          <a:xfrm>
-            <a:off x="457200" y="425325"/>
-            <a:ext cx="8343146" cy="298952"/>
-          </a:xfrm>
-          <a:prstGeom prst="rect">
-            <a:avLst/>
-          </a:prstGeom>
-        </p:spPr>
-        <p:txBody>
-          <a:bodyPr/>
-          <a:lstStyle>
-            <a:lvl1pPr>
-              <a:defRPr lang="en-US" sz="1400" b="1" kern="1200" cap="all" spc="150" baseline="0" dirty="0">
-                <a:solidFill>
-                  <a:schemeClr val="bg2">
-                    <a:lumMod val="50000"/>
-                  </a:schemeClr>
-                </a:solidFill>
-                <a:latin typeface="+mn-lt"/>
-                <a:ea typeface="Georgia" charset="0"/>
-                <a:cs typeface="Georgia" charset="0"/>
-              </a:defRPr>
-            </a:lvl1pPr>
-            <a:lvl2pPr marL="0" indent="0">
-              <a:buNone/>
-              <a:defRPr/>
-            </a:lvl2pPr>
-          </a:lstStyle>
-          <a:p>
-            <a:pPr marL="0" lvl="0" indent="0" algn="l" defTabSz="906199" rtl="0" eaLnBrk="1" latinLnBrk="0" hangingPunct="1">
-              <a:spcBef>
-                <a:spcPts val="0"/>
-              </a:spcBef>
-              <a:spcAft>
-                <a:spcPts val="800"/>
-              </a:spcAft>
-              <a:buClrTx/>
-              <a:buFont typeface="Calibri" panose="020F0502020204030204" pitchFamily="34" charset="0"/>
-              <a:buNone/>
-            </a:pPr>
-            <a:r>
-              <a:rPr lang="en-US" dirty="0"/>
-              <a:t>SECTION TAG</a:t>
-            </a:r>
-          </a:p>
-        </p:txBody>
-      </p:sp>
-      <p:sp>
-        <p:nvSpPr>
-          <p:cNvPr id="9" name="Chart 1">
-            <a:extLst>
-              <a:ext uri="{FF2B5EF4-FFF2-40B4-BE49-F238E27FC236}">
-                <a16:creationId xmlns:a16="http://schemas.microsoft.com/office/drawing/2014/main" id="{F4A6D268-AFCF-4422-BA46-0325498708B6}"/>
-              </a:ext>
-            </a:extLst>
-          </p:cNvPr>
-          <p:cNvSpPr>
-            <a:spLocks noGrp="1"/>
-          </p:cNvSpPr>
-          <p:nvPr>
-            <p:ph type="chart" sz="quarter" idx="17"/>
-          </p:nvPr>
-        </p:nvSpPr>
-        <p:spPr>
-          <a:xfrm>
-            <a:off x="3390900" y="943244"/>
-            <a:ext cx="2483654" cy="5457556"/>
-          </a:xfrm>
-          <a:prstGeom prst="rect">
-            <a:avLst/>
-          </a:prstGeom>
-        </p:spPr>
-        <p:txBody>
-          <a:bodyPr/>
-          <a:lstStyle/>
-          <a:p>
-            <a:endParaRPr lang="en-US" dirty="0"/>
-          </a:p>
-        </p:txBody>
-      </p:sp>
-      <p:sp>
-        <p:nvSpPr>
-          <p:cNvPr id="12" name="Chart 2">
-            <a:extLst>
-              <a:ext uri="{FF2B5EF4-FFF2-40B4-BE49-F238E27FC236}">
-                <a16:creationId xmlns:a16="http://schemas.microsoft.com/office/drawing/2014/main" id="{360FEB04-7853-4575-85C5-0B6E6F0C8384}"/>
-              </a:ext>
-            </a:extLst>
-          </p:cNvPr>
-          <p:cNvSpPr>
-            <a:spLocks noGrp="1"/>
-          </p:cNvSpPr>
-          <p:nvPr>
-            <p:ph type="chart" sz="quarter" idx="19"/>
-          </p:nvPr>
-        </p:nvSpPr>
-        <p:spPr>
-          <a:xfrm>
-            <a:off x="6323881" y="943244"/>
-            <a:ext cx="2483654" cy="5457556"/>
-          </a:xfrm>
-          <a:prstGeom prst="rect">
-            <a:avLst/>
-          </a:prstGeom>
-        </p:spPr>
-        <p:txBody>
-          <a:bodyPr/>
-          <a:lstStyle/>
-          <a:p>
-            <a:endParaRPr lang="en-US" dirty="0"/>
-          </a:p>
-        </p:txBody>
-      </p:sp>
-      <p:sp>
-        <p:nvSpPr>
-          <p:cNvPr id="14" name="Chart 3">
-            <a:extLst>
-              <a:ext uri="{FF2B5EF4-FFF2-40B4-BE49-F238E27FC236}">
-                <a16:creationId xmlns:a16="http://schemas.microsoft.com/office/drawing/2014/main" id="{735A41CB-1466-4F07-B8D6-D05A440C05D6}"/>
-              </a:ext>
-            </a:extLst>
-          </p:cNvPr>
-          <p:cNvSpPr>
-            <a:spLocks noGrp="1"/>
-          </p:cNvSpPr>
-          <p:nvPr>
-            <p:ph type="chart" sz="quarter" idx="21"/>
-          </p:nvPr>
-        </p:nvSpPr>
-        <p:spPr>
-          <a:xfrm>
-            <a:off x="9256862" y="943244"/>
-            <a:ext cx="2483654" cy="5457556"/>
-          </a:xfrm>
-          <a:prstGeom prst="rect">
-            <a:avLst/>
-          </a:prstGeom>
-        </p:spPr>
-        <p:txBody>
-          <a:bodyPr/>
-          <a:lstStyle/>
-          <a:p>
-            <a:endParaRPr lang="en-US" dirty="0"/>
-          </a:p>
-        </p:txBody>
-      </p:sp>
-      <p:sp>
-        <p:nvSpPr>
-          <p:cNvPr id="11" name="Footer Placeholder 3">
-            <a:extLst>
-              <a:ext uri="{FF2B5EF4-FFF2-40B4-BE49-F238E27FC236}">
-                <a16:creationId xmlns:a16="http://schemas.microsoft.com/office/drawing/2014/main" id="{DAE038C8-495A-46D3-AE0C-462D123EB0CC}"/>
-              </a:ext>
-            </a:extLst>
-          </p:cNvPr>
-          <p:cNvSpPr>
-            <a:spLocks noGrp="1"/>
-          </p:cNvSpPr>
-          <p:nvPr>
-            <p:ph type="ftr" sz="quarter" idx="3"/>
-          </p:nvPr>
-        </p:nvSpPr>
-        <p:spPr>
-          <a:xfrm>
-            <a:off x="457200" y="6023777"/>
-            <a:ext cx="2466364" cy="365125"/>
-          </a:xfrm>
-          <a:prstGeom prst="rect">
-            <a:avLst/>
-          </a:prstGeom>
-        </p:spPr>
-        <p:txBody>
-          <a:bodyPr vert="horz" lIns="0" tIns="0" rIns="0" bIns="0" rtlCol="0" anchor="b"/>
-          <a:lstStyle>
-            <a:lvl1pPr algn="l">
-              <a:spcBef>
-                <a:spcPts val="0"/>
-              </a:spcBef>
-              <a:defRPr sz="800">
-                <a:solidFill>
-                  <a:schemeClr val="tx1"/>
-                </a:solidFill>
-              </a:defRPr>
-            </a:lvl1pPr>
-          </a:lstStyle>
-          <a:p>
-            <a:r>
-              <a:rPr lang="en-US"/>
-              <a:t>Base:</a:t>
-            </a:r>
-            <a:br>
-              <a:rPr lang="en-US"/>
-            </a:br>
-            <a:r>
-              <a:rPr lang="en-US"/>
-              <a:t>Q:</a:t>
-            </a:r>
-            <a:br>
-              <a:rPr lang="en-US"/>
-            </a:br>
-            <a:r>
-              <a:rPr lang="en-US"/>
-              <a:t>Note:</a:t>
-            </a:r>
-            <a:endParaRPr lang="en-US" dirty="0"/>
-          </a:p>
-        </p:txBody>
-      </p:sp>
-      <p:sp>
-        <p:nvSpPr>
-          <p:cNvPr id="13" name="BodyCopy 1">
-            <a:extLst>
-              <a:ext uri="{FF2B5EF4-FFF2-40B4-BE49-F238E27FC236}">
-                <a16:creationId xmlns:a16="http://schemas.microsoft.com/office/drawing/2014/main" id="{41F68F7E-B94B-4E6E-A200-FD95903709B6}"/>
-              </a:ext>
-            </a:extLst>
-          </p:cNvPr>
-          <p:cNvSpPr>
-            <a:spLocks noGrp="1"/>
-          </p:cNvSpPr>
-          <p:nvPr>
-            <p:ph type="body" sz="quarter" idx="22"/>
-          </p:nvPr>
-        </p:nvSpPr>
-        <p:spPr>
-          <a:xfrm>
-            <a:off x="457201" y="951101"/>
-            <a:ext cx="2466364" cy="4879331"/>
-          </a:xfrm>
-          <a:prstGeom prst="rect">
-            <a:avLst/>
-          </a:prstGeom>
-        </p:spPr>
-        <p:txBody>
-          <a:bodyPr anchor="ctr"/>
-          <a:lstStyle>
-            <a:lvl1pPr>
-              <a:defRPr sz="1800"/>
-            </a:lvl1pPr>
-            <a:lvl2pPr marL="0" indent="0">
-              <a:buNone/>
-              <a:defRPr sz="1100"/>
-            </a:lvl2pPr>
-            <a:lvl3pPr marL="173038" indent="-173038">
-              <a:buClr>
-                <a:schemeClr val="bg2">
-                  <a:lumMod val="50000"/>
-                </a:schemeClr>
-              </a:buClr>
-              <a:buFont typeface="Arial" panose="020B0604020202020204" pitchFamily="34" charset="0"/>
-              <a:buChar char="●"/>
-              <a:defRPr sz="1100" b="0"/>
-            </a:lvl3pPr>
-            <a:lvl4pPr marL="344488" indent="-171450">
-              <a:defRPr sz="1100"/>
-            </a:lvl4pPr>
-            <a:lvl5pPr marL="0" indent="0">
-              <a:buNone/>
-              <a:defRPr sz="1100" i="1">
-                <a:solidFill>
-                  <a:schemeClr val="accent1"/>
-                </a:solidFill>
-              </a:defRPr>
-            </a:lvl5pPr>
-          </a:lstStyle>
-          <a:p>
-            <a:pPr lvl="0"/>
-            <a:r>
-              <a:rPr lang="en-US" dirty="0"/>
-              <a:t>Click to edit Master text styles</a:t>
-            </a:r>
-          </a:p>
-          <a:p>
-            <a:pPr lvl="1"/>
-            <a:r>
-              <a:rPr lang="en-US" dirty="0"/>
-              <a:t>Second level</a:t>
-            </a:r>
-          </a:p>
-          <a:p>
-            <a:pPr lvl="2"/>
-            <a:r>
-              <a:rPr lang="en-US" dirty="0"/>
-              <a:t>Third level</a:t>
-            </a:r>
-          </a:p>
-          <a:p>
-            <a:pPr lvl="3"/>
-            <a:r>
-              <a:rPr lang="en-US" dirty="0"/>
-              <a:t>Fourth level</a:t>
-            </a:r>
-          </a:p>
-          <a:p>
-            <a:pPr lvl="4"/>
-            <a:r>
-              <a:rPr lang="en-US" dirty="0"/>
-              <a:t>Fifth level</a:t>
-            </a:r>
-          </a:p>
-        </p:txBody>
-      </p:sp>
-    </p:spTree>
-    <p:custDataLst>
-      <p:tags r:id="rId1"/>
-    </p:custDataLst>
-    <p:extLst>
-      <p:ext uri="{BB962C8B-B14F-4D97-AF65-F5344CB8AC3E}">
-        <p14:creationId xmlns:p14="http://schemas.microsoft.com/office/powerpoint/2010/main" val="1321208923"/>
       </p:ext>
     </p:extLst>
   </p:cSld>
@@ -5423,7 +5718,7 @@
                 <a:latin typeface="+mn-lt"/>
                 <a:cs typeface="Arial" panose="020B0604020202020204" pitchFamily="34" charset="0"/>
               </a:rPr>
-              <a:t>© 2020 Technomic, Inc. </a:t>
+              <a:t>© 2021 Technomic, Inc. </a:t>
             </a:r>
           </a:p>
         </p:txBody>
@@ -5516,6 +5811,9 @@
                 </a:solidFill>
               </a:defRPr>
             </a:lvl5pPr>
+            <a:lvl6pPr marL="0" indent="0">
+              <a:defRPr/>
+            </a:lvl6pPr>
           </a:lstStyle>
           <a:p>
             <a:pPr lvl="0"/>
@@ -5550,6 +5848,13 @@
             <a:r>
               <a:rPr lang="en-US" dirty="0"/>
               <a:t>Fifth level</a:t>
+            </a:r>
+          </a:p>
+          <a:p>
+            <a:pPr lvl="5"/>
+            <a:r>
+              <a:rPr lang="en-US" dirty="0"/>
+              <a:t>Sixth level</a:t>
             </a:r>
           </a:p>
         </p:txBody>
@@ -5642,6 +5947,9 @@
                 </a:solidFill>
               </a:defRPr>
             </a:lvl5pPr>
+            <a:lvl6pPr marL="0" indent="0">
+              <a:defRPr/>
+            </a:lvl6pPr>
           </a:lstStyle>
           <a:p>
             <a:pPr lvl="0"/>
@@ -5676,6 +5984,13 @@
             <a:r>
               <a:rPr lang="en-US" dirty="0"/>
               <a:t>Fifth level</a:t>
+            </a:r>
+          </a:p>
+          <a:p>
+            <a:pPr lvl="5"/>
+            <a:r>
+              <a:rPr lang="en-US" dirty="0"/>
+              <a:t>Sixth level</a:t>
             </a:r>
           </a:p>
         </p:txBody>
@@ -5768,6 +6083,9 @@
                 </a:solidFill>
               </a:defRPr>
             </a:lvl5pPr>
+            <a:lvl6pPr marL="0" indent="0">
+              <a:defRPr/>
+            </a:lvl6pPr>
           </a:lstStyle>
           <a:p>
             <a:pPr lvl="0"/>
@@ -5802,6 +6120,13 @@
             <a:r>
               <a:rPr lang="en-US" dirty="0"/>
               <a:t>Fifth level</a:t>
+            </a:r>
+          </a:p>
+          <a:p>
+            <a:pPr lvl="5"/>
+            <a:r>
+              <a:rPr lang="en-US" dirty="0"/>
+              <a:t>Sixth level</a:t>
             </a:r>
           </a:p>
         </p:txBody>
@@ -5873,6 +6198,436 @@
 </file>
 
 <file path=ppt/slideLayouts/slideLayout20.xml><?xml version="1.0" encoding="utf-8"?>
+<p:sldLayout xmlns:a="http://schemas.openxmlformats.org/drawingml/2006/main" xmlns:r="http://schemas.openxmlformats.org/officeDocument/2006/relationships" xmlns:p="http://schemas.openxmlformats.org/presentationml/2006/main" preserve="1" userDrawn="1">
+  <p:cSld name="TT_3_Chart_&amp;_Text">
+    <p:spTree>
+      <p:nvGrpSpPr>
+        <p:cNvPr id="1" name=""/>
+        <p:cNvGrpSpPr/>
+        <p:nvPr/>
+      </p:nvGrpSpPr>
+      <p:grpSpPr>
+        <a:xfrm>
+          <a:off x="0" y="0"/>
+          <a:ext cx="0" cy="0"/>
+          <a:chOff x="0" y="0"/>
+          <a:chExt cx="0" cy="0"/>
+        </a:xfrm>
+      </p:grpSpPr>
+      <p:sp>
+        <p:nvSpPr>
+          <p:cNvPr id="6" name="PPH-SlideNo"/>
+          <p:cNvSpPr>
+            <a:spLocks noGrp="1"/>
+          </p:cNvSpPr>
+          <p:nvPr>
+            <p:ph type="sldNum" sz="quarter" idx="4"/>
+          </p:nvPr>
+        </p:nvSpPr>
+        <p:spPr>
+          <a:xfrm>
+            <a:off x="10608148" y="6550981"/>
+            <a:ext cx="1117599" cy="230823"/>
+          </a:xfrm>
+          <a:prstGeom prst="rect">
+            <a:avLst/>
+          </a:prstGeom>
+        </p:spPr>
+        <p:txBody>
+          <a:bodyPr vert="horz" wrap="none" lIns="0" tIns="0" rIns="0" bIns="0" rtlCol="0" anchor="b"/>
+          <a:lstStyle>
+            <a:lvl1pPr algn="r">
+              <a:spcBef>
+                <a:spcPts val="0"/>
+              </a:spcBef>
+              <a:defRPr sz="800" b="1">
+                <a:solidFill>
+                  <a:schemeClr val="bg2">
+                    <a:lumMod val="50000"/>
+                  </a:schemeClr>
+                </a:solidFill>
+                <a:latin typeface="+mn-lt"/>
+              </a:defRPr>
+            </a:lvl1pPr>
+          </a:lstStyle>
+          <a:p>
+            <a:pPr defTabSz="856716"/>
+            <a:fld id="{7B6B1C32-E567-445C-9FD5-2A0B0A08DD29}" type="slidenum">
+              <a:rPr lang="en-US" smtClean="0"/>
+              <a:pPr defTabSz="856716"/>
+              <a:t>‹#›</a:t>
+            </a:fld>
+            <a:endParaRPr lang="en-US" dirty="0"/>
+          </a:p>
+        </p:txBody>
+      </p:sp>
+      <p:sp>
+        <p:nvSpPr>
+          <p:cNvPr id="10" name="Section Tag">
+            <a:extLst>
+              <a:ext uri="{FF2B5EF4-FFF2-40B4-BE49-F238E27FC236}">
+                <a16:creationId xmlns:a16="http://schemas.microsoft.com/office/drawing/2014/main" id="{862632C5-CE1F-4714-B8E6-9C62993BDD97}"/>
+              </a:ext>
+            </a:extLst>
+          </p:cNvPr>
+          <p:cNvSpPr>
+            <a:spLocks noGrp="1"/>
+          </p:cNvSpPr>
+          <p:nvPr>
+            <p:ph type="body" sz="quarter" idx="16" hasCustomPrompt="1"/>
+          </p:nvPr>
+        </p:nvSpPr>
+        <p:spPr>
+          <a:xfrm>
+            <a:off x="457200" y="425325"/>
+            <a:ext cx="8343146" cy="298952"/>
+          </a:xfrm>
+          <a:prstGeom prst="rect">
+            <a:avLst/>
+          </a:prstGeom>
+        </p:spPr>
+        <p:txBody>
+          <a:bodyPr/>
+          <a:lstStyle>
+            <a:lvl1pPr>
+              <a:defRPr lang="en-US" sz="1400" b="1" kern="1200" cap="all" spc="150" baseline="0" dirty="0">
+                <a:solidFill>
+                  <a:schemeClr val="bg2">
+                    <a:lumMod val="50000"/>
+                  </a:schemeClr>
+                </a:solidFill>
+                <a:latin typeface="+mn-lt"/>
+                <a:ea typeface="Georgia" charset="0"/>
+                <a:cs typeface="Georgia" charset="0"/>
+              </a:defRPr>
+            </a:lvl1pPr>
+            <a:lvl2pPr marL="0" indent="0">
+              <a:buNone/>
+              <a:defRPr/>
+            </a:lvl2pPr>
+          </a:lstStyle>
+          <a:p>
+            <a:pPr marL="0" lvl="0" indent="0" algn="l" defTabSz="906199" rtl="0" eaLnBrk="1" latinLnBrk="0" hangingPunct="1">
+              <a:spcBef>
+                <a:spcPts val="0"/>
+              </a:spcBef>
+              <a:spcAft>
+                <a:spcPts val="800"/>
+              </a:spcAft>
+              <a:buClrTx/>
+              <a:buFont typeface="Calibri" panose="020F0502020204030204" pitchFamily="34" charset="0"/>
+              <a:buNone/>
+            </a:pPr>
+            <a:r>
+              <a:rPr lang="en-US" dirty="0"/>
+              <a:t>SECTION TAG</a:t>
+            </a:r>
+          </a:p>
+        </p:txBody>
+      </p:sp>
+      <p:sp>
+        <p:nvSpPr>
+          <p:cNvPr id="9" name="Chart 1">
+            <a:extLst>
+              <a:ext uri="{FF2B5EF4-FFF2-40B4-BE49-F238E27FC236}">
+                <a16:creationId xmlns:a16="http://schemas.microsoft.com/office/drawing/2014/main" id="{F4A6D268-AFCF-4422-BA46-0325498708B6}"/>
+              </a:ext>
+            </a:extLst>
+          </p:cNvPr>
+          <p:cNvSpPr>
+            <a:spLocks noGrp="1"/>
+          </p:cNvSpPr>
+          <p:nvPr>
+            <p:ph type="chart" sz="quarter" idx="17"/>
+          </p:nvPr>
+        </p:nvSpPr>
+        <p:spPr>
+          <a:xfrm>
+            <a:off x="3390900" y="943244"/>
+            <a:ext cx="2483654" cy="5457556"/>
+          </a:xfrm>
+          <a:prstGeom prst="rect">
+            <a:avLst/>
+          </a:prstGeom>
+        </p:spPr>
+        <p:txBody>
+          <a:bodyPr/>
+          <a:lstStyle/>
+          <a:p>
+            <a:endParaRPr lang="en-US" dirty="0"/>
+          </a:p>
+        </p:txBody>
+      </p:sp>
+      <p:sp>
+        <p:nvSpPr>
+          <p:cNvPr id="12" name="Chart 2">
+            <a:extLst>
+              <a:ext uri="{FF2B5EF4-FFF2-40B4-BE49-F238E27FC236}">
+                <a16:creationId xmlns:a16="http://schemas.microsoft.com/office/drawing/2014/main" id="{360FEB04-7853-4575-85C5-0B6E6F0C8384}"/>
+              </a:ext>
+            </a:extLst>
+          </p:cNvPr>
+          <p:cNvSpPr>
+            <a:spLocks noGrp="1"/>
+          </p:cNvSpPr>
+          <p:nvPr>
+            <p:ph type="chart" sz="quarter" idx="19"/>
+          </p:nvPr>
+        </p:nvSpPr>
+        <p:spPr>
+          <a:xfrm>
+            <a:off x="6323881" y="943244"/>
+            <a:ext cx="2483654" cy="5457556"/>
+          </a:xfrm>
+          <a:prstGeom prst="rect">
+            <a:avLst/>
+          </a:prstGeom>
+        </p:spPr>
+        <p:txBody>
+          <a:bodyPr/>
+          <a:lstStyle/>
+          <a:p>
+            <a:endParaRPr lang="en-US" dirty="0"/>
+          </a:p>
+        </p:txBody>
+      </p:sp>
+      <p:sp>
+        <p:nvSpPr>
+          <p:cNvPr id="14" name="Chart 3">
+            <a:extLst>
+              <a:ext uri="{FF2B5EF4-FFF2-40B4-BE49-F238E27FC236}">
+                <a16:creationId xmlns:a16="http://schemas.microsoft.com/office/drawing/2014/main" id="{735A41CB-1466-4F07-B8D6-D05A440C05D6}"/>
+              </a:ext>
+            </a:extLst>
+          </p:cNvPr>
+          <p:cNvSpPr>
+            <a:spLocks noGrp="1"/>
+          </p:cNvSpPr>
+          <p:nvPr>
+            <p:ph type="chart" sz="quarter" idx="21"/>
+          </p:nvPr>
+        </p:nvSpPr>
+        <p:spPr>
+          <a:xfrm>
+            <a:off x="9256862" y="943244"/>
+            <a:ext cx="2483654" cy="5457556"/>
+          </a:xfrm>
+          <a:prstGeom prst="rect">
+            <a:avLst/>
+          </a:prstGeom>
+        </p:spPr>
+        <p:txBody>
+          <a:bodyPr/>
+          <a:lstStyle/>
+          <a:p>
+            <a:endParaRPr lang="en-US" dirty="0"/>
+          </a:p>
+        </p:txBody>
+      </p:sp>
+      <p:sp>
+        <p:nvSpPr>
+          <p:cNvPr id="11" name="Footer Placeholder 3">
+            <a:extLst>
+              <a:ext uri="{FF2B5EF4-FFF2-40B4-BE49-F238E27FC236}">
+                <a16:creationId xmlns:a16="http://schemas.microsoft.com/office/drawing/2014/main" id="{DAE038C8-495A-46D3-AE0C-462D123EB0CC}"/>
+              </a:ext>
+            </a:extLst>
+          </p:cNvPr>
+          <p:cNvSpPr>
+            <a:spLocks noGrp="1"/>
+          </p:cNvSpPr>
+          <p:nvPr>
+            <p:ph type="ftr" sz="quarter" idx="3"/>
+          </p:nvPr>
+        </p:nvSpPr>
+        <p:spPr>
+          <a:xfrm>
+            <a:off x="457200" y="6023777"/>
+            <a:ext cx="2466364" cy="365125"/>
+          </a:xfrm>
+          <a:prstGeom prst="rect">
+            <a:avLst/>
+          </a:prstGeom>
+        </p:spPr>
+        <p:txBody>
+          <a:bodyPr vert="horz" lIns="0" tIns="0" rIns="0" bIns="0" rtlCol="0" anchor="b"/>
+          <a:lstStyle>
+            <a:lvl1pPr algn="l">
+              <a:spcBef>
+                <a:spcPts val="0"/>
+              </a:spcBef>
+              <a:defRPr sz="800">
+                <a:solidFill>
+                  <a:schemeClr val="tx1"/>
+                </a:solidFill>
+              </a:defRPr>
+            </a:lvl1pPr>
+          </a:lstStyle>
+          <a:p>
+            <a:r>
+              <a:rPr lang="en-US"/>
+              <a:t>Base:</a:t>
+            </a:r>
+            <a:br>
+              <a:rPr lang="en-US"/>
+            </a:br>
+            <a:r>
+              <a:rPr lang="en-US"/>
+              <a:t>Q:</a:t>
+            </a:r>
+            <a:br>
+              <a:rPr lang="en-US"/>
+            </a:br>
+            <a:r>
+              <a:rPr lang="en-US"/>
+              <a:t>Note:</a:t>
+            </a:r>
+            <a:endParaRPr lang="en-US" dirty="0"/>
+          </a:p>
+        </p:txBody>
+      </p:sp>
+      <p:sp>
+        <p:nvSpPr>
+          <p:cNvPr id="13" name="BodyCopy 1">
+            <a:extLst>
+              <a:ext uri="{FF2B5EF4-FFF2-40B4-BE49-F238E27FC236}">
+                <a16:creationId xmlns:a16="http://schemas.microsoft.com/office/drawing/2014/main" id="{41F68F7E-B94B-4E6E-A200-FD95903709B6}"/>
+              </a:ext>
+            </a:extLst>
+          </p:cNvPr>
+          <p:cNvSpPr>
+            <a:spLocks noGrp="1"/>
+          </p:cNvSpPr>
+          <p:nvPr>
+            <p:ph type="body" sz="quarter" idx="22"/>
+          </p:nvPr>
+        </p:nvSpPr>
+        <p:spPr>
+          <a:xfrm>
+            <a:off x="457201" y="951101"/>
+            <a:ext cx="2466364" cy="4879331"/>
+          </a:xfrm>
+          <a:prstGeom prst="rect">
+            <a:avLst/>
+          </a:prstGeom>
+        </p:spPr>
+        <p:txBody>
+          <a:bodyPr anchor="ctr"/>
+          <a:lstStyle>
+            <a:lvl1pPr>
+              <a:defRPr sz="1800"/>
+            </a:lvl1pPr>
+            <a:lvl2pPr marL="0" indent="0">
+              <a:buNone/>
+              <a:defRPr sz="1100"/>
+            </a:lvl2pPr>
+            <a:lvl3pPr marL="173038" indent="-173038">
+              <a:buClr>
+                <a:schemeClr val="bg2">
+                  <a:lumMod val="50000"/>
+                </a:schemeClr>
+              </a:buClr>
+              <a:buFont typeface="Arial" panose="020B0604020202020204" pitchFamily="34" charset="0"/>
+              <a:buChar char="●"/>
+              <a:defRPr sz="1100" b="0"/>
+            </a:lvl3pPr>
+            <a:lvl4pPr marL="344488" indent="-171450">
+              <a:defRPr sz="1100"/>
+            </a:lvl4pPr>
+            <a:lvl5pPr marL="0" indent="0">
+              <a:spcAft>
+                <a:spcPts val="600"/>
+              </a:spcAft>
+              <a:buNone/>
+              <a:defRPr sz="1100" i="1">
+                <a:solidFill>
+                  <a:schemeClr val="accent1"/>
+                </a:solidFill>
+              </a:defRPr>
+            </a:lvl5pPr>
+            <a:lvl6pPr marL="0" indent="0">
+              <a:defRPr lang="en-US" sz="900" kern="1200" dirty="0">
+                <a:solidFill>
+                  <a:schemeClr val="bg2">
+                    <a:lumMod val="50000"/>
+                  </a:schemeClr>
+                </a:solidFill>
+                <a:latin typeface="+mn-lt"/>
+                <a:ea typeface="+mn-ea"/>
+                <a:cs typeface="+mn-cs"/>
+              </a:defRPr>
+            </a:lvl6pPr>
+          </a:lstStyle>
+          <a:p>
+            <a:pPr lvl="0"/>
+            <a:r>
+              <a:rPr lang="en-US" dirty="0"/>
+              <a:t>Click to edit Master text styles</a:t>
+            </a:r>
+          </a:p>
+          <a:p>
+            <a:pPr lvl="1"/>
+            <a:r>
+              <a:rPr lang="en-US" dirty="0"/>
+              <a:t>Second level</a:t>
+            </a:r>
+          </a:p>
+          <a:p>
+            <a:pPr lvl="2"/>
+            <a:r>
+              <a:rPr lang="en-US" dirty="0"/>
+              <a:t>Third level</a:t>
+            </a:r>
+          </a:p>
+          <a:p>
+            <a:pPr lvl="3"/>
+            <a:r>
+              <a:rPr lang="en-US" dirty="0"/>
+              <a:t>Fourth level</a:t>
+            </a:r>
+          </a:p>
+          <a:p>
+            <a:pPr lvl="4"/>
+            <a:r>
+              <a:rPr lang="en-US" dirty="0"/>
+              <a:t>Fifth level</a:t>
+            </a:r>
+          </a:p>
+          <a:p>
+            <a:pPr marL="0" lvl="5" indent="0" algn="l" defTabSz="906199" rtl="0" eaLnBrk="1" latinLnBrk="0" hangingPunct="1">
+              <a:spcBef>
+                <a:spcPts val="0"/>
+              </a:spcBef>
+              <a:spcAft>
+                <a:spcPts val="600"/>
+              </a:spcAft>
+              <a:buFont typeface="Arial" panose="020B0604020202020204" pitchFamily="34" charset="0"/>
+              <a:buNone/>
+            </a:pPr>
+            <a:r>
+              <a:rPr lang="en-US" dirty="0"/>
+              <a:t>Sixth level</a:t>
+            </a:r>
+          </a:p>
+        </p:txBody>
+      </p:sp>
+    </p:spTree>
+    <p:custDataLst>
+      <p:tags r:id="rId1"/>
+    </p:custDataLst>
+    <p:extLst>
+      <p:ext uri="{BB962C8B-B14F-4D97-AF65-F5344CB8AC3E}">
+        <p14:creationId xmlns:p14="http://schemas.microsoft.com/office/powerpoint/2010/main" val="1321208923"/>
+      </p:ext>
+    </p:extLst>
+  </p:cSld>
+  <p:clrMapOvr>
+    <a:masterClrMapping/>
+  </p:clrMapOvr>
+</p:sldLayout>
+</file>
+
+<file path=ppt/slideLayouts/slideLayout21.xml><?xml version="1.0" encoding="utf-8"?>
 <p:sldLayout xmlns:a="http://schemas.openxmlformats.org/drawingml/2006/main" xmlns:r="http://schemas.openxmlformats.org/officeDocument/2006/relationships" xmlns:p="http://schemas.openxmlformats.org/presentationml/2006/main" preserve="1" userDrawn="1">
   <p:cSld name="TT_3_Chart_Parent_Children">
     <p:spTree>
@@ -6171,7 +6926,7 @@
 </p:sldLayout>
 </file>
 
-<file path=ppt/slideLayouts/slideLayout21.xml><?xml version="1.0" encoding="utf-8"?>
+<file path=ppt/slideLayouts/slideLayout22.xml><?xml version="1.0" encoding="utf-8"?>
 <p:sldLayout xmlns:a="http://schemas.openxmlformats.org/drawingml/2006/main" xmlns:r="http://schemas.openxmlformats.org/officeDocument/2006/relationships" xmlns:p="http://schemas.openxmlformats.org/presentationml/2006/main" preserve="1" userDrawn="1">
   <p:cSld name="TT_Keytheme">
     <p:spTree>
@@ -6397,6 +7152,27 @@
               <a:buNone/>
               <a:defRPr/>
             </a:lvl2pPr>
+            <a:lvl3pPr marL="0" indent="0">
+              <a:defRPr lang="en-US" sz="900" kern="1200" dirty="0">
+                <a:solidFill>
+                  <a:schemeClr val="bg2">
+                    <a:lumMod val="50000"/>
+                  </a:schemeClr>
+                </a:solidFill>
+                <a:latin typeface="+mn-lt"/>
+                <a:ea typeface="+mn-ea"/>
+                <a:cs typeface="+mn-cs"/>
+              </a:defRPr>
+            </a:lvl3pPr>
+            <a:lvl6pPr>
+              <a:defRPr sz="900">
+                <a:solidFill>
+                  <a:schemeClr val="bg2">
+                    <a:lumMod val="50000"/>
+                  </a:schemeClr>
+                </a:solidFill>
+              </a:defRPr>
+            </a:lvl6pPr>
           </a:lstStyle>
           <a:p>
             <a:pPr lvl="0"/>
@@ -6410,6 +7186,22 @@
             <a:r>
               <a:rPr lang="en-US" dirty="0"/>
               <a:t>Info</a:t>
+            </a:r>
+          </a:p>
+          <a:p>
+            <a:pPr marL="0" lvl="5" indent="0" algn="l" defTabSz="906199" rtl="0" eaLnBrk="1" latinLnBrk="0" hangingPunct="1">
+              <a:spcBef>
+                <a:spcPts val="0"/>
+              </a:spcBef>
+              <a:spcAft>
+                <a:spcPts val="600"/>
+              </a:spcAft>
+              <a:buFont typeface="Arial" panose="020B0604020202020204" pitchFamily="34" charset="0"/>
+              <a:buNone/>
+            </a:pPr>
+            <a:r>
+              <a:rPr lang="en-US" dirty="0"/>
+              <a:t>Detail</a:t>
             </a:r>
           </a:p>
         </p:txBody>
@@ -6550,6 +7342,18 @@
                 </a:solidFill>
               </a:defRPr>
             </a:lvl5pPr>
+            <a:lvl6pPr marL="0" indent="0">
+              <a:defRPr lang="en-US" sz="900" kern="1200" dirty="0">
+                <a:solidFill>
+                  <a:schemeClr val="bg2">
+                    <a:lumMod val="50000"/>
+                  </a:schemeClr>
+                </a:solidFill>
+                <a:latin typeface="+mn-lt"/>
+                <a:ea typeface="+mn-ea"/>
+                <a:cs typeface="+mn-cs"/>
+              </a:defRPr>
+            </a:lvl6pPr>
           </a:lstStyle>
           <a:p>
             <a:pPr lvl="0"/>
@@ -6584,6 +7388,22 @@
             <a:r>
               <a:rPr lang="en-US" dirty="0"/>
               <a:t>Fifth level</a:t>
+            </a:r>
+          </a:p>
+          <a:p>
+            <a:pPr marL="0" lvl="5" indent="0" algn="l" defTabSz="906199" rtl="0" eaLnBrk="1" latinLnBrk="0" hangingPunct="1">
+              <a:spcBef>
+                <a:spcPts val="0"/>
+              </a:spcBef>
+              <a:spcAft>
+                <a:spcPts val="600"/>
+              </a:spcAft>
+              <a:buFont typeface="Arial" panose="020B0604020202020204" pitchFamily="34" charset="0"/>
+              <a:buNone/>
+            </a:pPr>
+            <a:r>
+              <a:rPr lang="en-US" dirty="0"/>
+              <a:t>Sixth level</a:t>
             </a:r>
           </a:p>
         </p:txBody>
@@ -6665,7 +7485,7 @@
 </p:sldLayout>
 </file>
 
-<file path=ppt/slideLayouts/slideLayout22.xml><?xml version="1.0" encoding="utf-8"?>
+<file path=ppt/slideLayouts/slideLayout23.xml><?xml version="1.0" encoding="utf-8"?>
 <p:sldLayout xmlns:a="http://schemas.openxmlformats.org/drawingml/2006/main" xmlns:r="http://schemas.openxmlformats.org/officeDocument/2006/relationships" xmlns:p="http://schemas.openxmlformats.org/presentationml/2006/main" preserve="1" userDrawn="1">
   <p:cSld name="TT_Keytheme_Solo_Chart">
     <p:spTree>
@@ -6962,6 +7782,18 @@
                 </a:solidFill>
               </a:defRPr>
             </a:lvl5pPr>
+            <a:lvl6pPr marL="0" indent="0">
+              <a:defRPr lang="en-US" sz="900" kern="1200" dirty="0">
+                <a:solidFill>
+                  <a:schemeClr val="bg2">
+                    <a:lumMod val="50000"/>
+                  </a:schemeClr>
+                </a:solidFill>
+                <a:latin typeface="+mn-lt"/>
+                <a:ea typeface="+mn-ea"/>
+                <a:cs typeface="+mn-cs"/>
+              </a:defRPr>
+            </a:lvl6pPr>
           </a:lstStyle>
           <a:p>
             <a:pPr lvl="0"/>
@@ -6996,6 +7828,22 @@
             <a:r>
               <a:rPr lang="en-US" dirty="0"/>
               <a:t>Fifth level</a:t>
+            </a:r>
+          </a:p>
+          <a:p>
+            <a:pPr marL="0" lvl="5" indent="0" algn="l" defTabSz="906199" rtl="0" eaLnBrk="1" latinLnBrk="0" hangingPunct="1">
+              <a:spcBef>
+                <a:spcPts val="0"/>
+              </a:spcBef>
+              <a:spcAft>
+                <a:spcPts val="600"/>
+              </a:spcAft>
+              <a:buFont typeface="Arial" panose="020B0604020202020204" pitchFamily="34" charset="0"/>
+              <a:buNone/>
+            </a:pPr>
+            <a:r>
+              <a:rPr lang="en-US" dirty="0"/>
+              <a:t>Sixth level</a:t>
             </a:r>
           </a:p>
         </p:txBody>
@@ -7077,7 +7925,7 @@
 </p:sldLayout>
 </file>
 
-<file path=ppt/slideLayouts/slideLayout23.xml><?xml version="1.0" encoding="utf-8"?>
+<file path=ppt/slideLayouts/slideLayout24.xml><?xml version="1.0" encoding="utf-8"?>
 <p:sldLayout xmlns:a="http://schemas.openxmlformats.org/drawingml/2006/main" xmlns:r="http://schemas.openxmlformats.org/officeDocument/2006/relationships" xmlns:p="http://schemas.openxmlformats.org/presentationml/2006/main" preserve="1" userDrawn="1">
   <p:cSld name="TT_Chart_Dashboard">
     <p:spTree>
@@ -7467,6 +8315,18 @@
                 </a:solidFill>
               </a:defRPr>
             </a:lvl5pPr>
+            <a:lvl6pPr marL="0" indent="0">
+              <a:defRPr lang="en-US" sz="900" kern="1200" dirty="0">
+                <a:solidFill>
+                  <a:schemeClr val="bg2">
+                    <a:lumMod val="50000"/>
+                  </a:schemeClr>
+                </a:solidFill>
+                <a:latin typeface="+mn-lt"/>
+                <a:ea typeface="+mn-ea"/>
+                <a:cs typeface="+mn-cs"/>
+              </a:defRPr>
+            </a:lvl6pPr>
           </a:lstStyle>
           <a:p>
             <a:pPr lvl="0"/>
@@ -7501,6 +8361,22 @@
             <a:r>
               <a:rPr lang="en-US" dirty="0"/>
               <a:t>Fifth level</a:t>
+            </a:r>
+          </a:p>
+          <a:p>
+            <a:pPr marL="0" lvl="5" indent="0" algn="l" defTabSz="906199" rtl="0" eaLnBrk="1" latinLnBrk="0" hangingPunct="1">
+              <a:spcBef>
+                <a:spcPts val="0"/>
+              </a:spcBef>
+              <a:spcAft>
+                <a:spcPts val="600"/>
+              </a:spcAft>
+              <a:buFont typeface="Arial" panose="020B0604020202020204" pitchFamily="34" charset="0"/>
+              <a:buNone/>
+            </a:pPr>
+            <a:r>
+              <a:rPr lang="en-US" dirty="0"/>
+              <a:t>Sixth level</a:t>
             </a:r>
           </a:p>
         </p:txBody>
@@ -7579,6 +8455,18 @@
                 </a:solidFill>
               </a:defRPr>
             </a:lvl5pPr>
+            <a:lvl6pPr marL="0" indent="0">
+              <a:defRPr lang="en-US" sz="900" kern="1200" dirty="0">
+                <a:solidFill>
+                  <a:schemeClr val="bg2">
+                    <a:lumMod val="50000"/>
+                  </a:schemeClr>
+                </a:solidFill>
+                <a:latin typeface="+mn-lt"/>
+                <a:ea typeface="+mn-ea"/>
+                <a:cs typeface="+mn-cs"/>
+              </a:defRPr>
+            </a:lvl6pPr>
           </a:lstStyle>
           <a:p>
             <a:pPr lvl="0"/>
@@ -7613,6 +8501,22 @@
             <a:r>
               <a:rPr lang="en-US" dirty="0"/>
               <a:t>Fifth level</a:t>
+            </a:r>
+          </a:p>
+          <a:p>
+            <a:pPr marL="0" lvl="5" indent="0" algn="l" defTabSz="906199" rtl="0" eaLnBrk="1" latinLnBrk="0" hangingPunct="1">
+              <a:spcBef>
+                <a:spcPts val="0"/>
+              </a:spcBef>
+              <a:spcAft>
+                <a:spcPts val="600"/>
+              </a:spcAft>
+              <a:buFont typeface="Arial" panose="020B0604020202020204" pitchFamily="34" charset="0"/>
+              <a:buNone/>
+            </a:pPr>
+            <a:r>
+              <a:rPr lang="en-US" dirty="0"/>
+              <a:t>Sixth level</a:t>
             </a:r>
           </a:p>
         </p:txBody>
@@ -7691,6 +8595,18 @@
                 </a:solidFill>
               </a:defRPr>
             </a:lvl5pPr>
+            <a:lvl6pPr marL="0" indent="0">
+              <a:defRPr lang="en-US" sz="900" kern="1200" dirty="0">
+                <a:solidFill>
+                  <a:schemeClr val="bg2">
+                    <a:lumMod val="50000"/>
+                  </a:schemeClr>
+                </a:solidFill>
+                <a:latin typeface="+mn-lt"/>
+                <a:ea typeface="+mn-ea"/>
+                <a:cs typeface="+mn-cs"/>
+              </a:defRPr>
+            </a:lvl6pPr>
           </a:lstStyle>
           <a:p>
             <a:pPr lvl="0"/>
@@ -7725,6 +8641,22 @@
             <a:r>
               <a:rPr lang="en-US" dirty="0"/>
               <a:t>Fifth level</a:t>
+            </a:r>
+          </a:p>
+          <a:p>
+            <a:pPr marL="0" lvl="5" indent="0" algn="l" defTabSz="906199" rtl="0" eaLnBrk="1" latinLnBrk="0" hangingPunct="1">
+              <a:spcBef>
+                <a:spcPts val="0"/>
+              </a:spcBef>
+              <a:spcAft>
+                <a:spcPts val="600"/>
+              </a:spcAft>
+              <a:buFont typeface="Arial" panose="020B0604020202020204" pitchFamily="34" charset="0"/>
+              <a:buNone/>
+            </a:pPr>
+            <a:r>
+              <a:rPr lang="en-US" dirty="0"/>
+              <a:t>Sixth level</a:t>
             </a:r>
           </a:p>
         </p:txBody>
@@ -7803,6 +8735,18 @@
                 </a:solidFill>
               </a:defRPr>
             </a:lvl5pPr>
+            <a:lvl6pPr marL="0" indent="0">
+              <a:defRPr lang="en-US" sz="900" kern="1200" dirty="0">
+                <a:solidFill>
+                  <a:schemeClr val="bg2">
+                    <a:lumMod val="50000"/>
+                  </a:schemeClr>
+                </a:solidFill>
+                <a:latin typeface="+mn-lt"/>
+                <a:ea typeface="+mn-ea"/>
+                <a:cs typeface="+mn-cs"/>
+              </a:defRPr>
+            </a:lvl6pPr>
           </a:lstStyle>
           <a:p>
             <a:pPr lvl="0"/>
@@ -7837,6 +8781,22 @@
             <a:r>
               <a:rPr lang="en-US" dirty="0"/>
               <a:t>Fifth level</a:t>
+            </a:r>
+          </a:p>
+          <a:p>
+            <a:pPr marL="0" lvl="5" indent="0" algn="l" defTabSz="906199" rtl="0" eaLnBrk="1" latinLnBrk="0" hangingPunct="1">
+              <a:spcBef>
+                <a:spcPts val="0"/>
+              </a:spcBef>
+              <a:spcAft>
+                <a:spcPts val="600"/>
+              </a:spcAft>
+              <a:buFont typeface="Arial" panose="020B0604020202020204" pitchFamily="34" charset="0"/>
+              <a:buNone/>
+            </a:pPr>
+            <a:r>
+              <a:rPr lang="en-US" dirty="0"/>
+              <a:t>Sixth level</a:t>
             </a:r>
           </a:p>
         </p:txBody>
@@ -7857,7 +8817,7 @@
 </p:sldLayout>
 </file>
 
-<file path=ppt/slideLayouts/slideLayout24.xml><?xml version="1.0" encoding="utf-8"?>
+<file path=ppt/slideLayouts/slideLayout25.xml><?xml version="1.0" encoding="utf-8"?>
 <p:sldLayout xmlns:a="http://schemas.openxmlformats.org/drawingml/2006/main" xmlns:r="http://schemas.openxmlformats.org/officeDocument/2006/relationships" xmlns:p="http://schemas.openxmlformats.org/presentationml/2006/main" preserve="1" userDrawn="1">
   <p:cSld name="TT_4x1_Chart">
     <p:spTree>
@@ -8197,7 +9157,7 @@
 </p:sldLayout>
 </file>
 
-<file path=ppt/slideLayouts/slideLayout25.xml><?xml version="1.0" encoding="utf-8"?>
+<file path=ppt/slideLayouts/slideLayout26.xml><?xml version="1.0" encoding="utf-8"?>
 <p:sldLayout xmlns:a="http://schemas.openxmlformats.org/drawingml/2006/main" xmlns:r="http://schemas.openxmlformats.org/officeDocument/2006/relationships" xmlns:p="http://schemas.openxmlformats.org/presentationml/2006/main" preserve="1" userDrawn="1">
   <p:cSld name="TT_2x2_Chart">
     <p:spTree>
@@ -8537,7 +9497,7 @@
 </p:sldLayout>
 </file>
 
-<file path=ppt/slideLayouts/slideLayout26.xml><?xml version="1.0" encoding="utf-8"?>
+<file path=ppt/slideLayouts/slideLayout27.xml><?xml version="1.0" encoding="utf-8"?>
 <p:sldLayout xmlns:a="http://schemas.openxmlformats.org/drawingml/2006/main" xmlns:r="http://schemas.openxmlformats.org/officeDocument/2006/relationships" xmlns:p="http://schemas.openxmlformats.org/presentationml/2006/main" preserve="1" userDrawn="1">
   <p:cSld name="TT_3_Chart_Vertical_Dashboard">
     <p:spTree>
@@ -8796,6 +9756,16 @@
               <a:buNone/>
               <a:defRPr/>
             </a:lvl2pPr>
+            <a:lvl3pPr marL="0" indent="0">
+              <a:buNone/>
+              <a:defRPr sz="900">
+                <a:solidFill>
+                  <a:schemeClr val="bg2">
+                    <a:lumMod val="50000"/>
+                  </a:schemeClr>
+                </a:solidFill>
+              </a:defRPr>
+            </a:lvl3pPr>
           </a:lstStyle>
           <a:p>
             <a:pPr lvl="0"/>
@@ -8809,6 +9779,13 @@
             <a:r>
               <a:rPr lang="en-US" dirty="0"/>
               <a:t>Info</a:t>
+            </a:r>
+          </a:p>
+          <a:p>
+            <a:pPr lvl="2"/>
+            <a:r>
+              <a:rPr lang="en-US" dirty="0"/>
+              <a:t>Detail</a:t>
             </a:r>
           </a:p>
         </p:txBody>
@@ -8931,6 +9908,18 @@
                 </a:solidFill>
               </a:defRPr>
             </a:lvl5pPr>
+            <a:lvl6pPr marL="0" indent="0">
+              <a:defRPr lang="en-US" sz="900" kern="1200" dirty="0">
+                <a:solidFill>
+                  <a:schemeClr val="bg2">
+                    <a:lumMod val="50000"/>
+                  </a:schemeClr>
+                </a:solidFill>
+                <a:latin typeface="+mn-lt"/>
+                <a:ea typeface="+mn-ea"/>
+                <a:cs typeface="+mn-cs"/>
+              </a:defRPr>
+            </a:lvl6pPr>
           </a:lstStyle>
           <a:p>
             <a:pPr lvl="0"/>
@@ -8965,6 +9954,22 @@
             <a:r>
               <a:rPr lang="en-US" dirty="0"/>
               <a:t>Fifth level</a:t>
+            </a:r>
+          </a:p>
+          <a:p>
+            <a:pPr marL="0" lvl="5" indent="0" algn="l" defTabSz="906199" rtl="0" eaLnBrk="1" latinLnBrk="0" hangingPunct="1">
+              <a:spcBef>
+                <a:spcPts val="0"/>
+              </a:spcBef>
+              <a:spcAft>
+                <a:spcPts val="600"/>
+              </a:spcAft>
+              <a:buFont typeface="Arial" panose="020B0604020202020204" pitchFamily="34" charset="0"/>
+              <a:buNone/>
+            </a:pPr>
+            <a:r>
+              <a:rPr lang="en-US" dirty="0"/>
+              <a:t>Sixth level</a:t>
             </a:r>
           </a:p>
         </p:txBody>
@@ -8985,7 +9990,7 @@
 </p:sldLayout>
 </file>
 
-<file path=ppt/slideLayouts/slideLayout27.xml><?xml version="1.0" encoding="utf-8"?>
+<file path=ppt/slideLayouts/slideLayout28.xml><?xml version="1.0" encoding="utf-8"?>
 <p:sldLayout xmlns:a="http://schemas.openxmlformats.org/drawingml/2006/main" xmlns:r="http://schemas.openxmlformats.org/officeDocument/2006/relationships" xmlns:p="http://schemas.openxmlformats.org/presentationml/2006/main" preserve="1" userDrawn="1">
   <p:cSld name="TT_3_Chart_Dashboard_Flipped">
     <p:spTree>
@@ -9244,6 +10249,27 @@
               <a:buNone/>
               <a:defRPr/>
             </a:lvl2pPr>
+            <a:lvl3pPr marL="0" indent="0">
+              <a:defRPr lang="en-US" sz="900" kern="1200" dirty="0">
+                <a:solidFill>
+                  <a:schemeClr val="bg2">
+                    <a:lumMod val="50000"/>
+                  </a:schemeClr>
+                </a:solidFill>
+                <a:latin typeface="+mn-lt"/>
+                <a:ea typeface="+mn-ea"/>
+                <a:cs typeface="+mn-cs"/>
+              </a:defRPr>
+            </a:lvl3pPr>
+            <a:lvl6pPr>
+              <a:defRPr sz="900">
+                <a:solidFill>
+                  <a:schemeClr val="bg2">
+                    <a:lumMod val="50000"/>
+                  </a:schemeClr>
+                </a:solidFill>
+              </a:defRPr>
+            </a:lvl6pPr>
           </a:lstStyle>
           <a:p>
             <a:pPr lvl="0"/>
@@ -9257,6 +10283,22 @@
             <a:r>
               <a:rPr lang="en-US" dirty="0"/>
               <a:t>Info</a:t>
+            </a:r>
+          </a:p>
+          <a:p>
+            <a:pPr marL="0" lvl="5" indent="0" algn="l" defTabSz="906199" rtl="0" eaLnBrk="1" latinLnBrk="0" hangingPunct="1">
+              <a:spcBef>
+                <a:spcPts val="0"/>
+              </a:spcBef>
+              <a:spcAft>
+                <a:spcPts val="600"/>
+              </a:spcAft>
+              <a:buFont typeface="Arial" panose="020B0604020202020204" pitchFamily="34" charset="0"/>
+              <a:buNone/>
+            </a:pPr>
+            <a:r>
+              <a:rPr lang="en-US" dirty="0"/>
+              <a:t>Detail</a:t>
             </a:r>
           </a:p>
         </p:txBody>
@@ -9379,6 +10421,18 @@
                 </a:solidFill>
               </a:defRPr>
             </a:lvl5pPr>
+            <a:lvl6pPr marL="0" indent="0">
+              <a:defRPr lang="en-US" sz="900" kern="1200" dirty="0">
+                <a:solidFill>
+                  <a:schemeClr val="bg2">
+                    <a:lumMod val="50000"/>
+                  </a:schemeClr>
+                </a:solidFill>
+                <a:latin typeface="+mn-lt"/>
+                <a:ea typeface="+mn-ea"/>
+                <a:cs typeface="+mn-cs"/>
+              </a:defRPr>
+            </a:lvl6pPr>
           </a:lstStyle>
           <a:p>
             <a:pPr lvl="0"/>
@@ -9413,6 +10467,22 @@
             <a:r>
               <a:rPr lang="en-US" dirty="0"/>
               <a:t>Fifth level</a:t>
+            </a:r>
+          </a:p>
+          <a:p>
+            <a:pPr marL="0" lvl="5" indent="0" algn="l" defTabSz="906199" rtl="0" eaLnBrk="1" latinLnBrk="0" hangingPunct="1">
+              <a:spcBef>
+                <a:spcPts val="0"/>
+              </a:spcBef>
+              <a:spcAft>
+                <a:spcPts val="600"/>
+              </a:spcAft>
+              <a:buFont typeface="Arial" panose="020B0604020202020204" pitchFamily="34" charset="0"/>
+              <a:buNone/>
+            </a:pPr>
+            <a:r>
+              <a:rPr lang="en-US" dirty="0"/>
+              <a:t>Sixth level</a:t>
             </a:r>
           </a:p>
         </p:txBody>
@@ -9433,7 +10503,7 @@
 </p:sldLayout>
 </file>
 
-<file path=ppt/slideLayouts/slideLayout28.xml><?xml version="1.0" encoding="utf-8"?>
+<file path=ppt/slideLayouts/slideLayout29.xml><?xml version="1.0" encoding="utf-8"?>
 <p:sldLayout xmlns:a="http://schemas.openxmlformats.org/drawingml/2006/main" xmlns:r="http://schemas.openxmlformats.org/officeDocument/2006/relationships" xmlns:p="http://schemas.openxmlformats.org/presentationml/2006/main" preserve="1" userDrawn="1">
   <p:cSld name="TT_Chart_w_Stat_Overlay">
     <p:spTree>
@@ -9626,6 +10696,27 @@
               <a:buNone/>
               <a:defRPr/>
             </a:lvl2pPr>
+            <a:lvl3pPr marL="0" indent="0">
+              <a:defRPr lang="en-US" sz="900" kern="1200" dirty="0">
+                <a:solidFill>
+                  <a:schemeClr val="bg2">
+                    <a:lumMod val="50000"/>
+                  </a:schemeClr>
+                </a:solidFill>
+                <a:latin typeface="+mn-lt"/>
+                <a:ea typeface="+mn-ea"/>
+                <a:cs typeface="+mn-cs"/>
+              </a:defRPr>
+            </a:lvl3pPr>
+            <a:lvl6pPr>
+              <a:defRPr sz="900">
+                <a:solidFill>
+                  <a:schemeClr val="bg2">
+                    <a:lumMod val="50000"/>
+                  </a:schemeClr>
+                </a:solidFill>
+              </a:defRPr>
+            </a:lvl6pPr>
           </a:lstStyle>
           <a:p>
             <a:pPr lvl="0"/>
@@ -9639,6 +10730,22 @@
             <a:r>
               <a:rPr lang="en-US" dirty="0"/>
               <a:t>Info</a:t>
+            </a:r>
+          </a:p>
+          <a:p>
+            <a:pPr marL="0" lvl="5" indent="0" algn="l" defTabSz="906199" rtl="0" eaLnBrk="1" latinLnBrk="0" hangingPunct="1">
+              <a:spcBef>
+                <a:spcPts val="0"/>
+              </a:spcBef>
+              <a:spcAft>
+                <a:spcPts val="600"/>
+              </a:spcAft>
+              <a:buFont typeface="Arial" panose="020B0604020202020204" pitchFamily="34" charset="0"/>
+              <a:buNone/>
+            </a:pPr>
+            <a:r>
+              <a:rPr lang="en-US" dirty="0"/>
+              <a:t>Detail</a:t>
             </a:r>
           </a:p>
         </p:txBody>
@@ -9761,6 +10868,18 @@
                 </a:solidFill>
               </a:defRPr>
             </a:lvl5pPr>
+            <a:lvl6pPr marL="0" indent="0">
+              <a:defRPr lang="en-US" sz="900" kern="1200" dirty="0">
+                <a:solidFill>
+                  <a:schemeClr val="bg2">
+                    <a:lumMod val="50000"/>
+                  </a:schemeClr>
+                </a:solidFill>
+                <a:latin typeface="+mn-lt"/>
+                <a:ea typeface="+mn-ea"/>
+                <a:cs typeface="+mn-cs"/>
+              </a:defRPr>
+            </a:lvl6pPr>
           </a:lstStyle>
           <a:p>
             <a:pPr lvl="0"/>
@@ -9795,6 +10914,22 @@
             <a:r>
               <a:rPr lang="en-US" dirty="0"/>
               <a:t>Fifth level</a:t>
+            </a:r>
+          </a:p>
+          <a:p>
+            <a:pPr marL="0" lvl="5" indent="0" algn="l" defTabSz="906199" rtl="0" eaLnBrk="1" latinLnBrk="0" hangingPunct="1">
+              <a:spcBef>
+                <a:spcPts val="0"/>
+              </a:spcBef>
+              <a:spcAft>
+                <a:spcPts val="600"/>
+              </a:spcAft>
+              <a:buFont typeface="Arial" panose="020B0604020202020204" pitchFamily="34" charset="0"/>
+              <a:buNone/>
+            </a:pPr>
+            <a:r>
+              <a:rPr lang="en-US" dirty="0"/>
+              <a:t>Sixth level</a:t>
             </a:r>
           </a:p>
         </p:txBody>
@@ -9806,504 +10941,6 @@
     <p:extLst>
       <p:ext uri="{BB962C8B-B14F-4D97-AF65-F5344CB8AC3E}">
         <p14:creationId xmlns:p14="http://schemas.microsoft.com/office/powerpoint/2010/main" val="2868288065"/>
-      </p:ext>
-    </p:extLst>
-  </p:cSld>
-  <p:clrMapOvr>
-    <a:masterClrMapping/>
-  </p:clrMapOvr>
-</p:sldLayout>
-</file>
-
-<file path=ppt/slideLayouts/slideLayout29.xml><?xml version="1.0" encoding="utf-8"?>
-<p:sldLayout xmlns:a="http://schemas.openxmlformats.org/drawingml/2006/main" xmlns:r="http://schemas.openxmlformats.org/officeDocument/2006/relationships" xmlns:p="http://schemas.openxmlformats.org/presentationml/2006/main" preserve="1" userDrawn="1">
-  <p:cSld name="TT_6_Chart_&amp;_Text">
-    <p:spTree>
-      <p:nvGrpSpPr>
-        <p:cNvPr id="1" name=""/>
-        <p:cNvGrpSpPr/>
-        <p:nvPr/>
-      </p:nvGrpSpPr>
-      <p:grpSpPr>
-        <a:xfrm>
-          <a:off x="0" y="0"/>
-          <a:ext cx="0" cy="0"/>
-          <a:chOff x="0" y="0"/>
-          <a:chExt cx="0" cy="0"/>
-        </a:xfrm>
-      </p:grpSpPr>
-      <p:sp>
-        <p:nvSpPr>
-          <p:cNvPr id="11" name="Footer Placeholder 3">
-            <a:extLst>
-              <a:ext uri="{FF2B5EF4-FFF2-40B4-BE49-F238E27FC236}">
-                <a16:creationId xmlns:a16="http://schemas.microsoft.com/office/drawing/2014/main" id="{DAE038C8-495A-46D3-AE0C-462D123EB0CC}"/>
-              </a:ext>
-            </a:extLst>
-          </p:cNvPr>
-          <p:cNvSpPr>
-            <a:spLocks noGrp="1"/>
-          </p:cNvSpPr>
-          <p:nvPr>
-            <p:ph type="ftr" sz="quarter" idx="3"/>
-          </p:nvPr>
-        </p:nvSpPr>
-        <p:spPr>
-          <a:xfrm>
-            <a:off x="457200" y="6023777"/>
-            <a:ext cx="2476500" cy="365125"/>
-          </a:xfrm>
-          <a:prstGeom prst="rect">
-            <a:avLst/>
-          </a:prstGeom>
-        </p:spPr>
-        <p:txBody>
-          <a:bodyPr vert="horz" lIns="0" tIns="0" rIns="0" bIns="0" rtlCol="0" anchor="b"/>
-          <a:lstStyle>
-            <a:lvl1pPr algn="l">
-              <a:spcBef>
-                <a:spcPts val="0"/>
-              </a:spcBef>
-              <a:defRPr sz="800">
-                <a:solidFill>
-                  <a:schemeClr val="tx1"/>
-                </a:solidFill>
-              </a:defRPr>
-            </a:lvl1pPr>
-          </a:lstStyle>
-          <a:p>
-            <a:r>
-              <a:rPr lang="en-US"/>
-              <a:t>Base:</a:t>
-            </a:r>
-            <a:br>
-              <a:rPr lang="en-US"/>
-            </a:br>
-            <a:r>
-              <a:rPr lang="en-US"/>
-              <a:t>Q:</a:t>
-            </a:r>
-            <a:br>
-              <a:rPr lang="en-US"/>
-            </a:br>
-            <a:r>
-              <a:rPr lang="en-US"/>
-              <a:t>Note:</a:t>
-            </a:r>
-            <a:endParaRPr lang="en-US" dirty="0"/>
-          </a:p>
-        </p:txBody>
-      </p:sp>
-      <p:sp>
-        <p:nvSpPr>
-          <p:cNvPr id="6" name="PPH-SlideNo"/>
-          <p:cNvSpPr>
-            <a:spLocks noGrp="1"/>
-          </p:cNvSpPr>
-          <p:nvPr>
-            <p:ph type="sldNum" sz="quarter" idx="4"/>
-          </p:nvPr>
-        </p:nvSpPr>
-        <p:spPr>
-          <a:xfrm>
-            <a:off x="10608148" y="6550981"/>
-            <a:ext cx="1117599" cy="230823"/>
-          </a:xfrm>
-          <a:prstGeom prst="rect">
-            <a:avLst/>
-          </a:prstGeom>
-        </p:spPr>
-        <p:txBody>
-          <a:bodyPr vert="horz" wrap="none" lIns="0" tIns="0" rIns="0" bIns="0" rtlCol="0" anchor="b"/>
-          <a:lstStyle>
-            <a:lvl1pPr algn="r">
-              <a:spcBef>
-                <a:spcPts val="0"/>
-              </a:spcBef>
-              <a:defRPr sz="800" b="1">
-                <a:solidFill>
-                  <a:schemeClr val="bg2">
-                    <a:lumMod val="50000"/>
-                  </a:schemeClr>
-                </a:solidFill>
-                <a:latin typeface="+mn-lt"/>
-              </a:defRPr>
-            </a:lvl1pPr>
-          </a:lstStyle>
-          <a:p>
-            <a:pPr defTabSz="856716"/>
-            <a:fld id="{7B6B1C32-E567-445C-9FD5-2A0B0A08DD29}" type="slidenum">
-              <a:rPr lang="en-US" smtClean="0"/>
-              <a:pPr defTabSz="856716"/>
-              <a:t>‹#›</a:t>
-            </a:fld>
-            <a:endParaRPr lang="en-US" dirty="0"/>
-          </a:p>
-        </p:txBody>
-      </p:sp>
-      <p:sp>
-        <p:nvSpPr>
-          <p:cNvPr id="10" name="Section Tag">
-            <a:extLst>
-              <a:ext uri="{FF2B5EF4-FFF2-40B4-BE49-F238E27FC236}">
-                <a16:creationId xmlns:a16="http://schemas.microsoft.com/office/drawing/2014/main" id="{862632C5-CE1F-4714-B8E6-9C62993BDD97}"/>
-              </a:ext>
-            </a:extLst>
-          </p:cNvPr>
-          <p:cNvSpPr>
-            <a:spLocks noGrp="1"/>
-          </p:cNvSpPr>
-          <p:nvPr>
-            <p:ph type="body" sz="quarter" idx="16" hasCustomPrompt="1"/>
-          </p:nvPr>
-        </p:nvSpPr>
-        <p:spPr>
-          <a:xfrm>
-            <a:off x="457200" y="425325"/>
-            <a:ext cx="8343146" cy="298952"/>
-          </a:xfrm>
-          <a:prstGeom prst="rect">
-            <a:avLst/>
-          </a:prstGeom>
-        </p:spPr>
-        <p:txBody>
-          <a:bodyPr/>
-          <a:lstStyle>
-            <a:lvl1pPr>
-              <a:defRPr lang="en-US" sz="1400" b="1" kern="1200" cap="all" spc="150" baseline="0" dirty="0">
-                <a:solidFill>
-                  <a:schemeClr val="bg2">
-                    <a:lumMod val="50000"/>
-                  </a:schemeClr>
-                </a:solidFill>
-                <a:latin typeface="+mn-lt"/>
-                <a:ea typeface="Georgia" charset="0"/>
-                <a:cs typeface="Georgia" charset="0"/>
-              </a:defRPr>
-            </a:lvl1pPr>
-            <a:lvl2pPr marL="0" indent="0">
-              <a:buNone/>
-              <a:defRPr/>
-            </a:lvl2pPr>
-          </a:lstStyle>
-          <a:p>
-            <a:pPr marL="0" lvl="0" indent="0" algn="l" defTabSz="906199" rtl="0" eaLnBrk="1" latinLnBrk="0" hangingPunct="1">
-              <a:spcBef>
-                <a:spcPts val="0"/>
-              </a:spcBef>
-              <a:spcAft>
-                <a:spcPts val="800"/>
-              </a:spcAft>
-              <a:buClrTx/>
-              <a:buFont typeface="Calibri" panose="020F0502020204030204" pitchFamily="34" charset="0"/>
-              <a:buNone/>
-            </a:pPr>
-            <a:r>
-              <a:rPr lang="en-US" dirty="0"/>
-              <a:t>SECTION TAG</a:t>
-            </a:r>
-          </a:p>
-        </p:txBody>
-      </p:sp>
-      <p:sp>
-        <p:nvSpPr>
-          <p:cNvPr id="17" name="Chart 6">
-            <a:extLst>
-              <a:ext uri="{FF2B5EF4-FFF2-40B4-BE49-F238E27FC236}">
-                <a16:creationId xmlns:a16="http://schemas.microsoft.com/office/drawing/2014/main" id="{5C90DE2B-2F52-47A7-B950-947885ED2074}"/>
-              </a:ext>
-            </a:extLst>
-          </p:cNvPr>
-          <p:cNvSpPr>
-            <a:spLocks noGrp="1"/>
-          </p:cNvSpPr>
-          <p:nvPr>
-            <p:ph type="chart" sz="quarter" idx="25"/>
-          </p:nvPr>
-        </p:nvSpPr>
-        <p:spPr>
-          <a:xfrm>
-            <a:off x="3390900" y="951101"/>
-            <a:ext cx="2483654" cy="2549022"/>
-          </a:xfrm>
-          <a:prstGeom prst="rect">
-            <a:avLst/>
-          </a:prstGeom>
-        </p:spPr>
-        <p:txBody>
-          <a:bodyPr/>
-          <a:lstStyle/>
-          <a:p>
-            <a:endParaRPr lang="en-US" dirty="0"/>
-          </a:p>
-        </p:txBody>
-      </p:sp>
-      <p:sp>
-        <p:nvSpPr>
-          <p:cNvPr id="16" name="Chart 5">
-            <a:extLst>
-              <a:ext uri="{FF2B5EF4-FFF2-40B4-BE49-F238E27FC236}">
-                <a16:creationId xmlns:a16="http://schemas.microsoft.com/office/drawing/2014/main" id="{8DA1412E-5833-4015-AAA2-0C72380BBCFE}"/>
-              </a:ext>
-            </a:extLst>
-          </p:cNvPr>
-          <p:cNvSpPr>
-            <a:spLocks noGrp="1"/>
-          </p:cNvSpPr>
-          <p:nvPr>
-            <p:ph type="chart" sz="quarter" idx="24"/>
-          </p:nvPr>
-        </p:nvSpPr>
-        <p:spPr>
-          <a:xfrm>
-            <a:off x="6323881" y="951101"/>
-            <a:ext cx="2483654" cy="2549022"/>
-          </a:xfrm>
-          <a:prstGeom prst="rect">
-            <a:avLst/>
-          </a:prstGeom>
-        </p:spPr>
-        <p:txBody>
-          <a:bodyPr/>
-          <a:lstStyle/>
-          <a:p>
-            <a:endParaRPr lang="en-US" dirty="0"/>
-          </a:p>
-        </p:txBody>
-      </p:sp>
-      <p:sp>
-        <p:nvSpPr>
-          <p:cNvPr id="15" name="Chart 4">
-            <a:extLst>
-              <a:ext uri="{FF2B5EF4-FFF2-40B4-BE49-F238E27FC236}">
-                <a16:creationId xmlns:a16="http://schemas.microsoft.com/office/drawing/2014/main" id="{4564C230-395F-4C21-8193-F363F3D023EF}"/>
-              </a:ext>
-            </a:extLst>
-          </p:cNvPr>
-          <p:cNvSpPr>
-            <a:spLocks noGrp="1"/>
-          </p:cNvSpPr>
-          <p:nvPr>
-            <p:ph type="chart" sz="quarter" idx="23"/>
-          </p:nvPr>
-        </p:nvSpPr>
-        <p:spPr>
-          <a:xfrm>
-            <a:off x="9258300" y="951101"/>
-            <a:ext cx="2483654" cy="2549022"/>
-          </a:xfrm>
-          <a:prstGeom prst="rect">
-            <a:avLst/>
-          </a:prstGeom>
-        </p:spPr>
-        <p:txBody>
-          <a:bodyPr/>
-          <a:lstStyle/>
-          <a:p>
-            <a:endParaRPr lang="en-US" dirty="0"/>
-          </a:p>
-        </p:txBody>
-      </p:sp>
-      <p:sp>
-        <p:nvSpPr>
-          <p:cNvPr id="14" name="Chart 3">
-            <a:extLst>
-              <a:ext uri="{FF2B5EF4-FFF2-40B4-BE49-F238E27FC236}">
-                <a16:creationId xmlns:a16="http://schemas.microsoft.com/office/drawing/2014/main" id="{735A41CB-1466-4F07-B8D6-D05A440C05D6}"/>
-              </a:ext>
-            </a:extLst>
-          </p:cNvPr>
-          <p:cNvSpPr>
-            <a:spLocks noGrp="1"/>
-          </p:cNvSpPr>
-          <p:nvPr>
-            <p:ph type="chart" sz="quarter" idx="21"/>
-          </p:nvPr>
-        </p:nvSpPr>
-        <p:spPr>
-          <a:xfrm>
-            <a:off x="3390900" y="3761879"/>
-            <a:ext cx="2483654" cy="2627023"/>
-          </a:xfrm>
-          <a:prstGeom prst="rect">
-            <a:avLst/>
-          </a:prstGeom>
-        </p:spPr>
-        <p:txBody>
-          <a:bodyPr/>
-          <a:lstStyle/>
-          <a:p>
-            <a:endParaRPr lang="en-US" dirty="0"/>
-          </a:p>
-        </p:txBody>
-      </p:sp>
-      <p:sp>
-        <p:nvSpPr>
-          <p:cNvPr id="12" name="Chart 2">
-            <a:extLst>
-              <a:ext uri="{FF2B5EF4-FFF2-40B4-BE49-F238E27FC236}">
-                <a16:creationId xmlns:a16="http://schemas.microsoft.com/office/drawing/2014/main" id="{360FEB04-7853-4575-85C5-0B6E6F0C8384}"/>
-              </a:ext>
-            </a:extLst>
-          </p:cNvPr>
-          <p:cNvSpPr>
-            <a:spLocks noGrp="1"/>
-          </p:cNvSpPr>
-          <p:nvPr>
-            <p:ph type="chart" sz="quarter" idx="19"/>
-          </p:nvPr>
-        </p:nvSpPr>
-        <p:spPr>
-          <a:xfrm>
-            <a:off x="6323881" y="3761879"/>
-            <a:ext cx="2483654" cy="2627023"/>
-          </a:xfrm>
-          <a:prstGeom prst="rect">
-            <a:avLst/>
-          </a:prstGeom>
-        </p:spPr>
-        <p:txBody>
-          <a:bodyPr/>
-          <a:lstStyle/>
-          <a:p>
-            <a:endParaRPr lang="en-US" dirty="0"/>
-          </a:p>
-        </p:txBody>
-      </p:sp>
-      <p:sp>
-        <p:nvSpPr>
-          <p:cNvPr id="9" name="Chart 1">
-            <a:extLst>
-              <a:ext uri="{FF2B5EF4-FFF2-40B4-BE49-F238E27FC236}">
-                <a16:creationId xmlns:a16="http://schemas.microsoft.com/office/drawing/2014/main" id="{F4A6D268-AFCF-4422-BA46-0325498708B6}"/>
-              </a:ext>
-            </a:extLst>
-          </p:cNvPr>
-          <p:cNvSpPr>
-            <a:spLocks noGrp="1"/>
-          </p:cNvSpPr>
-          <p:nvPr>
-            <p:ph type="chart" sz="quarter" idx="17"/>
-          </p:nvPr>
-        </p:nvSpPr>
-        <p:spPr>
-          <a:xfrm>
-            <a:off x="9258300" y="3761879"/>
-            <a:ext cx="2483654" cy="2627023"/>
-          </a:xfrm>
-          <a:prstGeom prst="rect">
-            <a:avLst/>
-          </a:prstGeom>
-        </p:spPr>
-        <p:txBody>
-          <a:bodyPr/>
-          <a:lstStyle/>
-          <a:p>
-            <a:endParaRPr lang="en-US" dirty="0"/>
-          </a:p>
-        </p:txBody>
-      </p:sp>
-      <p:sp>
-        <p:nvSpPr>
-          <p:cNvPr id="18" name="BodyCopy 1">
-            <a:extLst>
-              <a:ext uri="{FF2B5EF4-FFF2-40B4-BE49-F238E27FC236}">
-                <a16:creationId xmlns:a16="http://schemas.microsoft.com/office/drawing/2014/main" id="{BDC876CF-887F-4124-863C-6624C88B7E36}"/>
-              </a:ext>
-            </a:extLst>
-          </p:cNvPr>
-          <p:cNvSpPr>
-            <a:spLocks noGrp="1"/>
-          </p:cNvSpPr>
-          <p:nvPr>
-            <p:ph type="body" sz="quarter" idx="22"/>
-          </p:nvPr>
-        </p:nvSpPr>
-        <p:spPr>
-          <a:xfrm>
-            <a:off x="457201" y="951101"/>
-            <a:ext cx="2466364" cy="4879331"/>
-          </a:xfrm>
-          <a:prstGeom prst="rect">
-            <a:avLst/>
-          </a:prstGeom>
-        </p:spPr>
-        <p:txBody>
-          <a:bodyPr anchor="ctr"/>
-          <a:lstStyle>
-            <a:lvl1pPr>
-              <a:defRPr sz="1800"/>
-            </a:lvl1pPr>
-            <a:lvl2pPr marL="0" indent="0">
-              <a:buNone/>
-              <a:defRPr sz="1100"/>
-            </a:lvl2pPr>
-            <a:lvl3pPr marL="173038" indent="-173038">
-              <a:buClr>
-                <a:schemeClr val="bg2">
-                  <a:lumMod val="50000"/>
-                </a:schemeClr>
-              </a:buClr>
-              <a:buFont typeface="Arial" panose="020B0604020202020204" pitchFamily="34" charset="0"/>
-              <a:buChar char="●"/>
-              <a:defRPr sz="1100" b="0"/>
-            </a:lvl3pPr>
-            <a:lvl4pPr marL="344488" indent="-171450">
-              <a:defRPr sz="1100"/>
-            </a:lvl4pPr>
-            <a:lvl5pPr marL="0" indent="0">
-              <a:buNone/>
-              <a:defRPr sz="1100" i="1">
-                <a:solidFill>
-                  <a:schemeClr val="accent1"/>
-                </a:solidFill>
-              </a:defRPr>
-            </a:lvl5pPr>
-          </a:lstStyle>
-          <a:p>
-            <a:pPr lvl="0"/>
-            <a:r>
-              <a:rPr lang="en-US" dirty="0"/>
-              <a:t>Click to edit Master text styles</a:t>
-            </a:r>
-          </a:p>
-          <a:p>
-            <a:pPr lvl="1"/>
-            <a:r>
-              <a:rPr lang="en-US" dirty="0"/>
-              <a:t>Second level</a:t>
-            </a:r>
-          </a:p>
-          <a:p>
-            <a:pPr lvl="2"/>
-            <a:r>
-              <a:rPr lang="en-US" dirty="0"/>
-              <a:t>Third level</a:t>
-            </a:r>
-          </a:p>
-          <a:p>
-            <a:pPr lvl="3"/>
-            <a:r>
-              <a:rPr lang="en-US" dirty="0"/>
-              <a:t>Fourth level</a:t>
-            </a:r>
-          </a:p>
-          <a:p>
-            <a:pPr lvl="4"/>
-            <a:r>
-              <a:rPr lang="en-US" dirty="0"/>
-              <a:t>Fifth level</a:t>
-            </a:r>
-          </a:p>
-        </p:txBody>
-      </p:sp>
-    </p:spTree>
-    <p:custDataLst>
-      <p:tags r:id="rId1"/>
-    </p:custDataLst>
-    <p:extLst>
-      <p:ext uri="{BB962C8B-B14F-4D97-AF65-F5344CB8AC3E}">
-        <p14:creationId xmlns:p14="http://schemas.microsoft.com/office/powerpoint/2010/main" val="1956863457"/>
       </p:ext>
     </p:extLst>
   </p:cSld>
@@ -10765,6 +11402,19 @@
                 </a:solidFill>
               </a:defRPr>
             </a:lvl5pPr>
+            <a:lvl6pPr marL="0" indent="0">
+              <a:buNone/>
+              <a:defRPr lang="en-US" sz="900" kern="1200" dirty="0">
+                <a:solidFill>
+                  <a:schemeClr val="bg2">
+                    <a:lumMod val="50000"/>
+                  </a:schemeClr>
+                </a:solidFill>
+                <a:latin typeface="+mn-lt"/>
+                <a:ea typeface="+mn-ea"/>
+                <a:cs typeface="+mn-cs"/>
+              </a:defRPr>
+            </a:lvl6pPr>
           </a:lstStyle>
           <a:p>
             <a:pPr lvl="0"/>
@@ -10799,6 +11449,22 @@
             <a:r>
               <a:rPr lang="en-US" dirty="0"/>
               <a:t>Fifth level</a:t>
+            </a:r>
+          </a:p>
+          <a:p>
+            <a:pPr marL="0" lvl="5" indent="0" algn="l" defTabSz="906199" rtl="0" eaLnBrk="1" latinLnBrk="0" hangingPunct="1">
+              <a:spcBef>
+                <a:spcPts val="0"/>
+              </a:spcBef>
+              <a:spcAft>
+                <a:spcPts val="600"/>
+              </a:spcAft>
+              <a:buFont typeface="Arial" panose="020B0604020202020204" pitchFamily="34" charset="0"/>
+              <a:buNone/>
+            </a:pPr>
+            <a:r>
+              <a:rPr lang="en-US" dirty="0"/>
+              <a:t>Sixth Level</a:t>
             </a:r>
           </a:p>
         </p:txBody>
@@ -10877,6 +11543,18 @@
                 </a:solidFill>
               </a:defRPr>
             </a:lvl5pPr>
+            <a:lvl6pPr marL="0" indent="0">
+              <a:defRPr lang="en-US" sz="900" kern="1200" dirty="0">
+                <a:solidFill>
+                  <a:schemeClr val="bg2">
+                    <a:lumMod val="50000"/>
+                  </a:schemeClr>
+                </a:solidFill>
+                <a:latin typeface="+mn-lt"/>
+                <a:ea typeface="+mn-ea"/>
+                <a:cs typeface="+mn-cs"/>
+              </a:defRPr>
+            </a:lvl6pPr>
           </a:lstStyle>
           <a:p>
             <a:pPr lvl="0"/>
@@ -10911,6 +11589,22 @@
             <a:r>
               <a:rPr lang="en-US" dirty="0"/>
               <a:t>Fifth level</a:t>
+            </a:r>
+          </a:p>
+          <a:p>
+            <a:pPr marL="0" lvl="5" indent="0" algn="l" defTabSz="906199" rtl="0" eaLnBrk="1" latinLnBrk="0" hangingPunct="1">
+              <a:spcBef>
+                <a:spcPts val="0"/>
+              </a:spcBef>
+              <a:spcAft>
+                <a:spcPts val="600"/>
+              </a:spcAft>
+              <a:buFont typeface="Arial" panose="020B0604020202020204" pitchFamily="34" charset="0"/>
+              <a:buNone/>
+            </a:pPr>
+            <a:r>
+              <a:rPr lang="en-US" dirty="0"/>
+              <a:t>Sixth Level</a:t>
             </a:r>
           </a:p>
         </p:txBody>
@@ -10989,6 +11683,18 @@
                 </a:solidFill>
               </a:defRPr>
             </a:lvl5pPr>
+            <a:lvl6pPr marL="0" indent="0">
+              <a:defRPr lang="en-US" sz="900" kern="1200" dirty="0">
+                <a:solidFill>
+                  <a:schemeClr val="bg2">
+                    <a:lumMod val="50000"/>
+                  </a:schemeClr>
+                </a:solidFill>
+                <a:latin typeface="+mn-lt"/>
+                <a:ea typeface="+mn-ea"/>
+                <a:cs typeface="+mn-cs"/>
+              </a:defRPr>
+            </a:lvl6pPr>
           </a:lstStyle>
           <a:p>
             <a:pPr lvl="0"/>
@@ -11023,6 +11729,22 @@
             <a:r>
               <a:rPr lang="en-US" dirty="0"/>
               <a:t>Fifth level</a:t>
+            </a:r>
+          </a:p>
+          <a:p>
+            <a:pPr marL="0" lvl="5" indent="0" algn="l" defTabSz="906199" rtl="0" eaLnBrk="1" latinLnBrk="0" hangingPunct="1">
+              <a:spcBef>
+                <a:spcPts val="0"/>
+              </a:spcBef>
+              <a:spcAft>
+                <a:spcPts val="600"/>
+              </a:spcAft>
+              <a:buFont typeface="Arial" panose="020B0604020202020204" pitchFamily="34" charset="0"/>
+              <a:buNone/>
+            </a:pPr>
+            <a:r>
+              <a:rPr lang="en-US" dirty="0"/>
+              <a:t>Sixth Level</a:t>
             </a:r>
           </a:p>
         </p:txBody>
@@ -11094,6 +11816,992 @@
 </file>
 
 <file path=ppt/slideLayouts/slideLayout30.xml><?xml version="1.0" encoding="utf-8"?>
+<p:sldLayout xmlns:a="http://schemas.openxmlformats.org/drawingml/2006/main" xmlns:r="http://schemas.openxmlformats.org/officeDocument/2006/relationships" xmlns:p="http://schemas.openxmlformats.org/presentationml/2006/main" preserve="1" userDrawn="1">
+  <p:cSld name="TT_4_Chart_&amp;_Text">
+    <p:spTree>
+      <p:nvGrpSpPr>
+        <p:cNvPr id="1" name=""/>
+        <p:cNvGrpSpPr/>
+        <p:nvPr/>
+      </p:nvGrpSpPr>
+      <p:grpSpPr>
+        <a:xfrm>
+          <a:off x="0" y="0"/>
+          <a:ext cx="0" cy="0"/>
+          <a:chOff x="0" y="0"/>
+          <a:chExt cx="0" cy="0"/>
+        </a:xfrm>
+      </p:grpSpPr>
+      <p:sp>
+        <p:nvSpPr>
+          <p:cNvPr id="11" name="Footer Placeholder 3">
+            <a:extLst>
+              <a:ext uri="{FF2B5EF4-FFF2-40B4-BE49-F238E27FC236}">
+                <a16:creationId xmlns:a16="http://schemas.microsoft.com/office/drawing/2014/main" id="{DAE038C8-495A-46D3-AE0C-462D123EB0CC}"/>
+              </a:ext>
+            </a:extLst>
+          </p:cNvPr>
+          <p:cNvSpPr>
+            <a:spLocks noGrp="1"/>
+          </p:cNvSpPr>
+          <p:nvPr>
+            <p:ph type="ftr" sz="quarter" idx="3"/>
+          </p:nvPr>
+        </p:nvSpPr>
+        <p:spPr>
+          <a:xfrm>
+            <a:off x="457200" y="6023777"/>
+            <a:ext cx="2476500" cy="365125"/>
+          </a:xfrm>
+          <a:prstGeom prst="rect">
+            <a:avLst/>
+          </a:prstGeom>
+        </p:spPr>
+        <p:txBody>
+          <a:bodyPr vert="horz" lIns="0" tIns="0" rIns="0" bIns="0" rtlCol="0" anchor="b"/>
+          <a:lstStyle>
+            <a:lvl1pPr algn="l">
+              <a:spcBef>
+                <a:spcPts val="0"/>
+              </a:spcBef>
+              <a:defRPr sz="800">
+                <a:solidFill>
+                  <a:schemeClr val="tx1"/>
+                </a:solidFill>
+              </a:defRPr>
+            </a:lvl1pPr>
+          </a:lstStyle>
+          <a:p>
+            <a:r>
+              <a:rPr lang="en-US"/>
+              <a:t>Base:</a:t>
+            </a:r>
+            <a:br>
+              <a:rPr lang="en-US"/>
+            </a:br>
+            <a:r>
+              <a:rPr lang="en-US"/>
+              <a:t>Q:</a:t>
+            </a:r>
+            <a:br>
+              <a:rPr lang="en-US"/>
+            </a:br>
+            <a:r>
+              <a:rPr lang="en-US"/>
+              <a:t>Note:</a:t>
+            </a:r>
+            <a:endParaRPr lang="en-US" dirty="0"/>
+          </a:p>
+        </p:txBody>
+      </p:sp>
+      <p:sp>
+        <p:nvSpPr>
+          <p:cNvPr id="6" name="PPH-SlideNo"/>
+          <p:cNvSpPr>
+            <a:spLocks noGrp="1"/>
+          </p:cNvSpPr>
+          <p:nvPr>
+            <p:ph type="sldNum" sz="quarter" idx="4"/>
+          </p:nvPr>
+        </p:nvSpPr>
+        <p:spPr>
+          <a:xfrm>
+            <a:off x="10608148" y="6550981"/>
+            <a:ext cx="1117599" cy="230823"/>
+          </a:xfrm>
+          <a:prstGeom prst="rect">
+            <a:avLst/>
+          </a:prstGeom>
+        </p:spPr>
+        <p:txBody>
+          <a:bodyPr vert="horz" wrap="none" lIns="0" tIns="0" rIns="0" bIns="0" rtlCol="0" anchor="b"/>
+          <a:lstStyle>
+            <a:lvl1pPr algn="r">
+              <a:spcBef>
+                <a:spcPts val="0"/>
+              </a:spcBef>
+              <a:defRPr sz="800" b="1">
+                <a:solidFill>
+                  <a:schemeClr val="bg2">
+                    <a:lumMod val="50000"/>
+                  </a:schemeClr>
+                </a:solidFill>
+                <a:latin typeface="+mn-lt"/>
+              </a:defRPr>
+            </a:lvl1pPr>
+          </a:lstStyle>
+          <a:p>
+            <a:pPr defTabSz="856716"/>
+            <a:fld id="{7B6B1C32-E567-445C-9FD5-2A0B0A08DD29}" type="slidenum">
+              <a:rPr lang="en-US" smtClean="0"/>
+              <a:pPr defTabSz="856716"/>
+              <a:t>‹#›</a:t>
+            </a:fld>
+            <a:endParaRPr lang="en-US" dirty="0"/>
+          </a:p>
+        </p:txBody>
+      </p:sp>
+      <p:sp>
+        <p:nvSpPr>
+          <p:cNvPr id="10" name="Section Tag">
+            <a:extLst>
+              <a:ext uri="{FF2B5EF4-FFF2-40B4-BE49-F238E27FC236}">
+                <a16:creationId xmlns:a16="http://schemas.microsoft.com/office/drawing/2014/main" id="{862632C5-CE1F-4714-B8E6-9C62993BDD97}"/>
+              </a:ext>
+            </a:extLst>
+          </p:cNvPr>
+          <p:cNvSpPr>
+            <a:spLocks noGrp="1"/>
+          </p:cNvSpPr>
+          <p:nvPr>
+            <p:ph type="body" sz="quarter" idx="16" hasCustomPrompt="1"/>
+          </p:nvPr>
+        </p:nvSpPr>
+        <p:spPr>
+          <a:xfrm>
+            <a:off x="457200" y="425325"/>
+            <a:ext cx="8343146" cy="298952"/>
+          </a:xfrm>
+          <a:prstGeom prst="rect">
+            <a:avLst/>
+          </a:prstGeom>
+        </p:spPr>
+        <p:txBody>
+          <a:bodyPr/>
+          <a:lstStyle>
+            <a:lvl1pPr>
+              <a:defRPr lang="en-US" sz="1400" b="1" kern="1200" cap="all" spc="150" baseline="0" dirty="0">
+                <a:solidFill>
+                  <a:schemeClr val="bg2">
+                    <a:lumMod val="50000"/>
+                  </a:schemeClr>
+                </a:solidFill>
+                <a:latin typeface="+mn-lt"/>
+                <a:ea typeface="Georgia" charset="0"/>
+                <a:cs typeface="Georgia" charset="0"/>
+              </a:defRPr>
+            </a:lvl1pPr>
+            <a:lvl2pPr marL="0" indent="0">
+              <a:buNone/>
+              <a:defRPr/>
+            </a:lvl2pPr>
+          </a:lstStyle>
+          <a:p>
+            <a:pPr marL="0" lvl="0" indent="0" algn="l" defTabSz="906199" rtl="0" eaLnBrk="1" latinLnBrk="0" hangingPunct="1">
+              <a:spcBef>
+                <a:spcPts val="0"/>
+              </a:spcBef>
+              <a:spcAft>
+                <a:spcPts val="800"/>
+              </a:spcAft>
+              <a:buClrTx/>
+              <a:buFont typeface="Calibri" panose="020F0502020204030204" pitchFamily="34" charset="0"/>
+              <a:buNone/>
+            </a:pPr>
+            <a:r>
+              <a:rPr lang="en-US" dirty="0"/>
+              <a:t>SECTION TAG</a:t>
+            </a:r>
+          </a:p>
+        </p:txBody>
+      </p:sp>
+      <p:sp>
+        <p:nvSpPr>
+          <p:cNvPr id="16" name="Chart 5">
+            <a:extLst>
+              <a:ext uri="{FF2B5EF4-FFF2-40B4-BE49-F238E27FC236}">
+                <a16:creationId xmlns:a16="http://schemas.microsoft.com/office/drawing/2014/main" id="{8DA1412E-5833-4015-AAA2-0C72380BBCFE}"/>
+              </a:ext>
+            </a:extLst>
+          </p:cNvPr>
+          <p:cNvSpPr>
+            <a:spLocks noGrp="1"/>
+          </p:cNvSpPr>
+          <p:nvPr>
+            <p:ph type="chart" sz="quarter" idx="24"/>
+          </p:nvPr>
+        </p:nvSpPr>
+        <p:spPr>
+          <a:xfrm>
+            <a:off x="3390899" y="951101"/>
+            <a:ext cx="3950615" cy="2503087"/>
+          </a:xfrm>
+          <a:prstGeom prst="rect">
+            <a:avLst/>
+          </a:prstGeom>
+        </p:spPr>
+        <p:txBody>
+          <a:bodyPr/>
+          <a:lstStyle/>
+          <a:p>
+            <a:endParaRPr lang="en-US" dirty="0"/>
+          </a:p>
+        </p:txBody>
+      </p:sp>
+      <p:sp>
+        <p:nvSpPr>
+          <p:cNvPr id="15" name="Chart 4">
+            <a:extLst>
+              <a:ext uri="{FF2B5EF4-FFF2-40B4-BE49-F238E27FC236}">
+                <a16:creationId xmlns:a16="http://schemas.microsoft.com/office/drawing/2014/main" id="{4564C230-395F-4C21-8193-F363F3D023EF}"/>
+              </a:ext>
+            </a:extLst>
+          </p:cNvPr>
+          <p:cNvSpPr>
+            <a:spLocks noGrp="1"/>
+          </p:cNvSpPr>
+          <p:nvPr>
+            <p:ph type="chart" sz="quarter" idx="23"/>
+          </p:nvPr>
+        </p:nvSpPr>
+        <p:spPr>
+          <a:xfrm>
+            <a:off x="7775539" y="951101"/>
+            <a:ext cx="3950208" cy="2503087"/>
+          </a:xfrm>
+          <a:prstGeom prst="rect">
+            <a:avLst/>
+          </a:prstGeom>
+        </p:spPr>
+        <p:txBody>
+          <a:bodyPr/>
+          <a:lstStyle/>
+          <a:p>
+            <a:endParaRPr lang="en-US" dirty="0"/>
+          </a:p>
+        </p:txBody>
+      </p:sp>
+      <p:sp>
+        <p:nvSpPr>
+          <p:cNvPr id="12" name="Chart 2">
+            <a:extLst>
+              <a:ext uri="{FF2B5EF4-FFF2-40B4-BE49-F238E27FC236}">
+                <a16:creationId xmlns:a16="http://schemas.microsoft.com/office/drawing/2014/main" id="{360FEB04-7853-4575-85C5-0B6E6F0C8384}"/>
+              </a:ext>
+            </a:extLst>
+          </p:cNvPr>
+          <p:cNvSpPr>
+            <a:spLocks noGrp="1"/>
+          </p:cNvSpPr>
+          <p:nvPr>
+            <p:ph type="chart" sz="quarter" idx="19"/>
+          </p:nvPr>
+        </p:nvSpPr>
+        <p:spPr>
+          <a:xfrm>
+            <a:off x="3390899" y="3911388"/>
+            <a:ext cx="3950208" cy="2477514"/>
+          </a:xfrm>
+          <a:prstGeom prst="rect">
+            <a:avLst/>
+          </a:prstGeom>
+        </p:spPr>
+        <p:txBody>
+          <a:bodyPr/>
+          <a:lstStyle/>
+          <a:p>
+            <a:endParaRPr lang="en-US" dirty="0"/>
+          </a:p>
+        </p:txBody>
+      </p:sp>
+      <p:sp>
+        <p:nvSpPr>
+          <p:cNvPr id="9" name="Chart 1">
+            <a:extLst>
+              <a:ext uri="{FF2B5EF4-FFF2-40B4-BE49-F238E27FC236}">
+                <a16:creationId xmlns:a16="http://schemas.microsoft.com/office/drawing/2014/main" id="{F4A6D268-AFCF-4422-BA46-0325498708B6}"/>
+              </a:ext>
+            </a:extLst>
+          </p:cNvPr>
+          <p:cNvSpPr>
+            <a:spLocks noGrp="1"/>
+          </p:cNvSpPr>
+          <p:nvPr>
+            <p:ph type="chart" sz="quarter" idx="17"/>
+          </p:nvPr>
+        </p:nvSpPr>
+        <p:spPr>
+          <a:xfrm>
+            <a:off x="7775539" y="3911388"/>
+            <a:ext cx="3950208" cy="2477514"/>
+          </a:xfrm>
+          <a:prstGeom prst="rect">
+            <a:avLst/>
+          </a:prstGeom>
+        </p:spPr>
+        <p:txBody>
+          <a:bodyPr/>
+          <a:lstStyle/>
+          <a:p>
+            <a:endParaRPr lang="en-US" dirty="0"/>
+          </a:p>
+        </p:txBody>
+      </p:sp>
+      <p:sp>
+        <p:nvSpPr>
+          <p:cNvPr id="18" name="BodyCopy 1">
+            <a:extLst>
+              <a:ext uri="{FF2B5EF4-FFF2-40B4-BE49-F238E27FC236}">
+                <a16:creationId xmlns:a16="http://schemas.microsoft.com/office/drawing/2014/main" id="{BDC876CF-887F-4124-863C-6624C88B7E36}"/>
+              </a:ext>
+            </a:extLst>
+          </p:cNvPr>
+          <p:cNvSpPr>
+            <a:spLocks noGrp="1"/>
+          </p:cNvSpPr>
+          <p:nvPr>
+            <p:ph type="body" sz="quarter" idx="22"/>
+          </p:nvPr>
+        </p:nvSpPr>
+        <p:spPr>
+          <a:xfrm>
+            <a:off x="457201" y="951101"/>
+            <a:ext cx="2466364" cy="4879331"/>
+          </a:xfrm>
+          <a:prstGeom prst="rect">
+            <a:avLst/>
+          </a:prstGeom>
+        </p:spPr>
+        <p:txBody>
+          <a:bodyPr anchor="ctr"/>
+          <a:lstStyle>
+            <a:lvl1pPr>
+              <a:defRPr sz="1800"/>
+            </a:lvl1pPr>
+            <a:lvl2pPr marL="0" indent="0">
+              <a:buNone/>
+              <a:defRPr sz="1100"/>
+            </a:lvl2pPr>
+            <a:lvl3pPr marL="173038" indent="-173038">
+              <a:buClr>
+                <a:schemeClr val="bg2">
+                  <a:lumMod val="50000"/>
+                </a:schemeClr>
+              </a:buClr>
+              <a:buFont typeface="Arial" panose="020B0604020202020204" pitchFamily="34" charset="0"/>
+              <a:buChar char="●"/>
+              <a:defRPr sz="1100" b="0"/>
+            </a:lvl3pPr>
+            <a:lvl4pPr marL="344488" indent="-171450">
+              <a:defRPr sz="1100"/>
+            </a:lvl4pPr>
+            <a:lvl5pPr marL="0" indent="0">
+              <a:buNone/>
+              <a:defRPr sz="1100" i="1">
+                <a:solidFill>
+                  <a:schemeClr val="accent1"/>
+                </a:solidFill>
+              </a:defRPr>
+            </a:lvl5pPr>
+            <a:lvl6pPr marL="0" indent="0">
+              <a:defRPr lang="en-US" sz="900" kern="1200" dirty="0">
+                <a:solidFill>
+                  <a:schemeClr val="bg2">
+                    <a:lumMod val="50000"/>
+                  </a:schemeClr>
+                </a:solidFill>
+                <a:latin typeface="+mn-lt"/>
+                <a:ea typeface="+mn-ea"/>
+                <a:cs typeface="+mn-cs"/>
+              </a:defRPr>
+            </a:lvl6pPr>
+          </a:lstStyle>
+          <a:p>
+            <a:pPr lvl="0"/>
+            <a:r>
+              <a:rPr lang="en-US" dirty="0"/>
+              <a:t>Click to edit Master text styles</a:t>
+            </a:r>
+          </a:p>
+          <a:p>
+            <a:pPr lvl="1"/>
+            <a:r>
+              <a:rPr lang="en-US" dirty="0"/>
+              <a:t>Second level</a:t>
+            </a:r>
+          </a:p>
+          <a:p>
+            <a:pPr lvl="2"/>
+            <a:r>
+              <a:rPr lang="en-US" dirty="0"/>
+              <a:t>Third level</a:t>
+            </a:r>
+          </a:p>
+          <a:p>
+            <a:pPr lvl="3"/>
+            <a:r>
+              <a:rPr lang="en-US" dirty="0"/>
+              <a:t>Fourth level</a:t>
+            </a:r>
+          </a:p>
+          <a:p>
+            <a:pPr lvl="4"/>
+            <a:r>
+              <a:rPr lang="en-US" dirty="0"/>
+              <a:t>Fifth level</a:t>
+            </a:r>
+          </a:p>
+          <a:p>
+            <a:pPr marL="0" lvl="5" indent="0" algn="l" defTabSz="906199" rtl="0" eaLnBrk="1" latinLnBrk="0" hangingPunct="1">
+              <a:spcBef>
+                <a:spcPts val="0"/>
+              </a:spcBef>
+              <a:spcAft>
+                <a:spcPts val="600"/>
+              </a:spcAft>
+              <a:buFont typeface="Arial" panose="020B0604020202020204" pitchFamily="34" charset="0"/>
+              <a:buNone/>
+            </a:pPr>
+            <a:r>
+              <a:rPr lang="en-US" dirty="0"/>
+              <a:t>Sixth level</a:t>
+            </a:r>
+          </a:p>
+        </p:txBody>
+      </p:sp>
+    </p:spTree>
+    <p:custDataLst>
+      <p:tags r:id="rId1"/>
+    </p:custDataLst>
+    <p:extLst>
+      <p:ext uri="{BB962C8B-B14F-4D97-AF65-F5344CB8AC3E}">
+        <p14:creationId xmlns:p14="http://schemas.microsoft.com/office/powerpoint/2010/main" val="2464145022"/>
+      </p:ext>
+    </p:extLst>
+  </p:cSld>
+  <p:clrMapOvr>
+    <a:masterClrMapping/>
+  </p:clrMapOvr>
+</p:sldLayout>
+</file>
+
+<file path=ppt/slideLayouts/slideLayout31.xml><?xml version="1.0" encoding="utf-8"?>
+<p:sldLayout xmlns:a="http://schemas.openxmlformats.org/drawingml/2006/main" xmlns:r="http://schemas.openxmlformats.org/officeDocument/2006/relationships" xmlns:p="http://schemas.openxmlformats.org/presentationml/2006/main" preserve="1" userDrawn="1">
+  <p:cSld name="TT_6_Chart_&amp;_Text">
+    <p:spTree>
+      <p:nvGrpSpPr>
+        <p:cNvPr id="1" name=""/>
+        <p:cNvGrpSpPr/>
+        <p:nvPr/>
+      </p:nvGrpSpPr>
+      <p:grpSpPr>
+        <a:xfrm>
+          <a:off x="0" y="0"/>
+          <a:ext cx="0" cy="0"/>
+          <a:chOff x="0" y="0"/>
+          <a:chExt cx="0" cy="0"/>
+        </a:xfrm>
+      </p:grpSpPr>
+      <p:sp>
+        <p:nvSpPr>
+          <p:cNvPr id="11" name="Footer Placeholder 3">
+            <a:extLst>
+              <a:ext uri="{FF2B5EF4-FFF2-40B4-BE49-F238E27FC236}">
+                <a16:creationId xmlns:a16="http://schemas.microsoft.com/office/drawing/2014/main" id="{DAE038C8-495A-46D3-AE0C-462D123EB0CC}"/>
+              </a:ext>
+            </a:extLst>
+          </p:cNvPr>
+          <p:cNvSpPr>
+            <a:spLocks noGrp="1"/>
+          </p:cNvSpPr>
+          <p:nvPr>
+            <p:ph type="ftr" sz="quarter" idx="3"/>
+          </p:nvPr>
+        </p:nvSpPr>
+        <p:spPr>
+          <a:xfrm>
+            <a:off x="457200" y="6023777"/>
+            <a:ext cx="2476500" cy="365125"/>
+          </a:xfrm>
+          <a:prstGeom prst="rect">
+            <a:avLst/>
+          </a:prstGeom>
+        </p:spPr>
+        <p:txBody>
+          <a:bodyPr vert="horz" lIns="0" tIns="0" rIns="0" bIns="0" rtlCol="0" anchor="b"/>
+          <a:lstStyle>
+            <a:lvl1pPr algn="l">
+              <a:spcBef>
+                <a:spcPts val="0"/>
+              </a:spcBef>
+              <a:defRPr sz="800">
+                <a:solidFill>
+                  <a:schemeClr val="tx1"/>
+                </a:solidFill>
+              </a:defRPr>
+            </a:lvl1pPr>
+          </a:lstStyle>
+          <a:p>
+            <a:r>
+              <a:rPr lang="en-US"/>
+              <a:t>Base:</a:t>
+            </a:r>
+            <a:br>
+              <a:rPr lang="en-US"/>
+            </a:br>
+            <a:r>
+              <a:rPr lang="en-US"/>
+              <a:t>Q:</a:t>
+            </a:r>
+            <a:br>
+              <a:rPr lang="en-US"/>
+            </a:br>
+            <a:r>
+              <a:rPr lang="en-US"/>
+              <a:t>Note:</a:t>
+            </a:r>
+            <a:endParaRPr lang="en-US" dirty="0"/>
+          </a:p>
+        </p:txBody>
+      </p:sp>
+      <p:sp>
+        <p:nvSpPr>
+          <p:cNvPr id="6" name="PPH-SlideNo"/>
+          <p:cNvSpPr>
+            <a:spLocks noGrp="1"/>
+          </p:cNvSpPr>
+          <p:nvPr>
+            <p:ph type="sldNum" sz="quarter" idx="4"/>
+          </p:nvPr>
+        </p:nvSpPr>
+        <p:spPr>
+          <a:xfrm>
+            <a:off x="10608148" y="6550981"/>
+            <a:ext cx="1117599" cy="230823"/>
+          </a:xfrm>
+          <a:prstGeom prst="rect">
+            <a:avLst/>
+          </a:prstGeom>
+        </p:spPr>
+        <p:txBody>
+          <a:bodyPr vert="horz" wrap="none" lIns="0" tIns="0" rIns="0" bIns="0" rtlCol="0" anchor="b"/>
+          <a:lstStyle>
+            <a:lvl1pPr algn="r">
+              <a:spcBef>
+                <a:spcPts val="0"/>
+              </a:spcBef>
+              <a:defRPr sz="800" b="1">
+                <a:solidFill>
+                  <a:schemeClr val="bg2">
+                    <a:lumMod val="50000"/>
+                  </a:schemeClr>
+                </a:solidFill>
+                <a:latin typeface="+mn-lt"/>
+              </a:defRPr>
+            </a:lvl1pPr>
+          </a:lstStyle>
+          <a:p>
+            <a:pPr defTabSz="856716"/>
+            <a:fld id="{7B6B1C32-E567-445C-9FD5-2A0B0A08DD29}" type="slidenum">
+              <a:rPr lang="en-US" smtClean="0"/>
+              <a:pPr defTabSz="856716"/>
+              <a:t>‹#›</a:t>
+            </a:fld>
+            <a:endParaRPr lang="en-US" dirty="0"/>
+          </a:p>
+        </p:txBody>
+      </p:sp>
+      <p:sp>
+        <p:nvSpPr>
+          <p:cNvPr id="10" name="Section Tag">
+            <a:extLst>
+              <a:ext uri="{FF2B5EF4-FFF2-40B4-BE49-F238E27FC236}">
+                <a16:creationId xmlns:a16="http://schemas.microsoft.com/office/drawing/2014/main" id="{862632C5-CE1F-4714-B8E6-9C62993BDD97}"/>
+              </a:ext>
+            </a:extLst>
+          </p:cNvPr>
+          <p:cNvSpPr>
+            <a:spLocks noGrp="1"/>
+          </p:cNvSpPr>
+          <p:nvPr>
+            <p:ph type="body" sz="quarter" idx="16" hasCustomPrompt="1"/>
+          </p:nvPr>
+        </p:nvSpPr>
+        <p:spPr>
+          <a:xfrm>
+            <a:off x="457200" y="425325"/>
+            <a:ext cx="8343146" cy="298952"/>
+          </a:xfrm>
+          <a:prstGeom prst="rect">
+            <a:avLst/>
+          </a:prstGeom>
+        </p:spPr>
+        <p:txBody>
+          <a:bodyPr/>
+          <a:lstStyle>
+            <a:lvl1pPr>
+              <a:defRPr lang="en-US" sz="1400" b="1" kern="1200" cap="all" spc="150" baseline="0" dirty="0">
+                <a:solidFill>
+                  <a:schemeClr val="bg2">
+                    <a:lumMod val="50000"/>
+                  </a:schemeClr>
+                </a:solidFill>
+                <a:latin typeface="+mn-lt"/>
+                <a:ea typeface="Georgia" charset="0"/>
+                <a:cs typeface="Georgia" charset="0"/>
+              </a:defRPr>
+            </a:lvl1pPr>
+            <a:lvl2pPr marL="0" indent="0">
+              <a:buNone/>
+              <a:defRPr/>
+            </a:lvl2pPr>
+          </a:lstStyle>
+          <a:p>
+            <a:pPr marL="0" lvl="0" indent="0" algn="l" defTabSz="906199" rtl="0" eaLnBrk="1" latinLnBrk="0" hangingPunct="1">
+              <a:spcBef>
+                <a:spcPts val="0"/>
+              </a:spcBef>
+              <a:spcAft>
+                <a:spcPts val="800"/>
+              </a:spcAft>
+              <a:buClrTx/>
+              <a:buFont typeface="Calibri" panose="020F0502020204030204" pitchFamily="34" charset="0"/>
+              <a:buNone/>
+            </a:pPr>
+            <a:r>
+              <a:rPr lang="en-US" dirty="0"/>
+              <a:t>SECTION TAG</a:t>
+            </a:r>
+          </a:p>
+        </p:txBody>
+      </p:sp>
+      <p:sp>
+        <p:nvSpPr>
+          <p:cNvPr id="17" name="Chart 6">
+            <a:extLst>
+              <a:ext uri="{FF2B5EF4-FFF2-40B4-BE49-F238E27FC236}">
+                <a16:creationId xmlns:a16="http://schemas.microsoft.com/office/drawing/2014/main" id="{5C90DE2B-2F52-47A7-B950-947885ED2074}"/>
+              </a:ext>
+            </a:extLst>
+          </p:cNvPr>
+          <p:cNvSpPr>
+            <a:spLocks noGrp="1"/>
+          </p:cNvSpPr>
+          <p:nvPr>
+            <p:ph type="chart" sz="quarter" idx="25"/>
+          </p:nvPr>
+        </p:nvSpPr>
+        <p:spPr>
+          <a:xfrm>
+            <a:off x="3390900" y="951101"/>
+            <a:ext cx="2483654" cy="2549022"/>
+          </a:xfrm>
+          <a:prstGeom prst="rect">
+            <a:avLst/>
+          </a:prstGeom>
+        </p:spPr>
+        <p:txBody>
+          <a:bodyPr/>
+          <a:lstStyle/>
+          <a:p>
+            <a:endParaRPr lang="en-US" dirty="0"/>
+          </a:p>
+        </p:txBody>
+      </p:sp>
+      <p:sp>
+        <p:nvSpPr>
+          <p:cNvPr id="16" name="Chart 5">
+            <a:extLst>
+              <a:ext uri="{FF2B5EF4-FFF2-40B4-BE49-F238E27FC236}">
+                <a16:creationId xmlns:a16="http://schemas.microsoft.com/office/drawing/2014/main" id="{8DA1412E-5833-4015-AAA2-0C72380BBCFE}"/>
+              </a:ext>
+            </a:extLst>
+          </p:cNvPr>
+          <p:cNvSpPr>
+            <a:spLocks noGrp="1"/>
+          </p:cNvSpPr>
+          <p:nvPr>
+            <p:ph type="chart" sz="quarter" idx="24"/>
+          </p:nvPr>
+        </p:nvSpPr>
+        <p:spPr>
+          <a:xfrm>
+            <a:off x="6323881" y="951101"/>
+            <a:ext cx="2483654" cy="2549022"/>
+          </a:xfrm>
+          <a:prstGeom prst="rect">
+            <a:avLst/>
+          </a:prstGeom>
+        </p:spPr>
+        <p:txBody>
+          <a:bodyPr/>
+          <a:lstStyle/>
+          <a:p>
+            <a:endParaRPr lang="en-US" dirty="0"/>
+          </a:p>
+        </p:txBody>
+      </p:sp>
+      <p:sp>
+        <p:nvSpPr>
+          <p:cNvPr id="15" name="Chart 4">
+            <a:extLst>
+              <a:ext uri="{FF2B5EF4-FFF2-40B4-BE49-F238E27FC236}">
+                <a16:creationId xmlns:a16="http://schemas.microsoft.com/office/drawing/2014/main" id="{4564C230-395F-4C21-8193-F363F3D023EF}"/>
+              </a:ext>
+            </a:extLst>
+          </p:cNvPr>
+          <p:cNvSpPr>
+            <a:spLocks noGrp="1"/>
+          </p:cNvSpPr>
+          <p:nvPr>
+            <p:ph type="chart" sz="quarter" idx="23"/>
+          </p:nvPr>
+        </p:nvSpPr>
+        <p:spPr>
+          <a:xfrm>
+            <a:off x="9258300" y="951101"/>
+            <a:ext cx="2483654" cy="2549022"/>
+          </a:xfrm>
+          <a:prstGeom prst="rect">
+            <a:avLst/>
+          </a:prstGeom>
+        </p:spPr>
+        <p:txBody>
+          <a:bodyPr/>
+          <a:lstStyle/>
+          <a:p>
+            <a:endParaRPr lang="en-US" dirty="0"/>
+          </a:p>
+        </p:txBody>
+      </p:sp>
+      <p:sp>
+        <p:nvSpPr>
+          <p:cNvPr id="14" name="Chart 3">
+            <a:extLst>
+              <a:ext uri="{FF2B5EF4-FFF2-40B4-BE49-F238E27FC236}">
+                <a16:creationId xmlns:a16="http://schemas.microsoft.com/office/drawing/2014/main" id="{735A41CB-1466-4F07-B8D6-D05A440C05D6}"/>
+              </a:ext>
+            </a:extLst>
+          </p:cNvPr>
+          <p:cNvSpPr>
+            <a:spLocks noGrp="1"/>
+          </p:cNvSpPr>
+          <p:nvPr>
+            <p:ph type="chart" sz="quarter" idx="21"/>
+          </p:nvPr>
+        </p:nvSpPr>
+        <p:spPr>
+          <a:xfrm>
+            <a:off x="3390900" y="3761879"/>
+            <a:ext cx="2483654" cy="2627023"/>
+          </a:xfrm>
+          <a:prstGeom prst="rect">
+            <a:avLst/>
+          </a:prstGeom>
+        </p:spPr>
+        <p:txBody>
+          <a:bodyPr/>
+          <a:lstStyle/>
+          <a:p>
+            <a:endParaRPr lang="en-US" dirty="0"/>
+          </a:p>
+        </p:txBody>
+      </p:sp>
+      <p:sp>
+        <p:nvSpPr>
+          <p:cNvPr id="12" name="Chart 2">
+            <a:extLst>
+              <a:ext uri="{FF2B5EF4-FFF2-40B4-BE49-F238E27FC236}">
+                <a16:creationId xmlns:a16="http://schemas.microsoft.com/office/drawing/2014/main" id="{360FEB04-7853-4575-85C5-0B6E6F0C8384}"/>
+              </a:ext>
+            </a:extLst>
+          </p:cNvPr>
+          <p:cNvSpPr>
+            <a:spLocks noGrp="1"/>
+          </p:cNvSpPr>
+          <p:nvPr>
+            <p:ph type="chart" sz="quarter" idx="19"/>
+          </p:nvPr>
+        </p:nvSpPr>
+        <p:spPr>
+          <a:xfrm>
+            <a:off x="6323881" y="3761879"/>
+            <a:ext cx="2483654" cy="2627023"/>
+          </a:xfrm>
+          <a:prstGeom prst="rect">
+            <a:avLst/>
+          </a:prstGeom>
+        </p:spPr>
+        <p:txBody>
+          <a:bodyPr/>
+          <a:lstStyle/>
+          <a:p>
+            <a:endParaRPr lang="en-US" dirty="0"/>
+          </a:p>
+        </p:txBody>
+      </p:sp>
+      <p:sp>
+        <p:nvSpPr>
+          <p:cNvPr id="9" name="Chart 1">
+            <a:extLst>
+              <a:ext uri="{FF2B5EF4-FFF2-40B4-BE49-F238E27FC236}">
+                <a16:creationId xmlns:a16="http://schemas.microsoft.com/office/drawing/2014/main" id="{F4A6D268-AFCF-4422-BA46-0325498708B6}"/>
+              </a:ext>
+            </a:extLst>
+          </p:cNvPr>
+          <p:cNvSpPr>
+            <a:spLocks noGrp="1"/>
+          </p:cNvSpPr>
+          <p:nvPr>
+            <p:ph type="chart" sz="quarter" idx="17"/>
+          </p:nvPr>
+        </p:nvSpPr>
+        <p:spPr>
+          <a:xfrm>
+            <a:off x="9258300" y="3761879"/>
+            <a:ext cx="2483654" cy="2627023"/>
+          </a:xfrm>
+          <a:prstGeom prst="rect">
+            <a:avLst/>
+          </a:prstGeom>
+        </p:spPr>
+        <p:txBody>
+          <a:bodyPr/>
+          <a:lstStyle/>
+          <a:p>
+            <a:endParaRPr lang="en-US" dirty="0"/>
+          </a:p>
+        </p:txBody>
+      </p:sp>
+      <p:sp>
+        <p:nvSpPr>
+          <p:cNvPr id="18" name="BodyCopy 1">
+            <a:extLst>
+              <a:ext uri="{FF2B5EF4-FFF2-40B4-BE49-F238E27FC236}">
+                <a16:creationId xmlns:a16="http://schemas.microsoft.com/office/drawing/2014/main" id="{BDC876CF-887F-4124-863C-6624C88B7E36}"/>
+              </a:ext>
+            </a:extLst>
+          </p:cNvPr>
+          <p:cNvSpPr>
+            <a:spLocks noGrp="1"/>
+          </p:cNvSpPr>
+          <p:nvPr>
+            <p:ph type="body" sz="quarter" idx="22"/>
+          </p:nvPr>
+        </p:nvSpPr>
+        <p:spPr>
+          <a:xfrm>
+            <a:off x="457201" y="951101"/>
+            <a:ext cx="2466364" cy="4879331"/>
+          </a:xfrm>
+          <a:prstGeom prst="rect">
+            <a:avLst/>
+          </a:prstGeom>
+        </p:spPr>
+        <p:txBody>
+          <a:bodyPr anchor="ctr"/>
+          <a:lstStyle>
+            <a:lvl1pPr>
+              <a:defRPr sz="1800"/>
+            </a:lvl1pPr>
+            <a:lvl2pPr marL="0" indent="0">
+              <a:buNone/>
+              <a:defRPr sz="1100"/>
+            </a:lvl2pPr>
+            <a:lvl3pPr marL="173038" indent="-173038">
+              <a:buClr>
+                <a:schemeClr val="bg2">
+                  <a:lumMod val="50000"/>
+                </a:schemeClr>
+              </a:buClr>
+              <a:buFont typeface="Arial" panose="020B0604020202020204" pitchFamily="34" charset="0"/>
+              <a:buChar char="●"/>
+              <a:defRPr sz="1100" b="0"/>
+            </a:lvl3pPr>
+            <a:lvl4pPr marL="344488" indent="-171450">
+              <a:defRPr sz="1100"/>
+            </a:lvl4pPr>
+            <a:lvl5pPr marL="0" indent="0">
+              <a:buNone/>
+              <a:defRPr sz="1100" i="1">
+                <a:solidFill>
+                  <a:schemeClr val="accent1"/>
+                </a:solidFill>
+              </a:defRPr>
+            </a:lvl5pPr>
+            <a:lvl6pPr marL="0" indent="0">
+              <a:defRPr lang="en-US" sz="900" kern="1200" dirty="0">
+                <a:solidFill>
+                  <a:schemeClr val="bg2">
+                    <a:lumMod val="50000"/>
+                  </a:schemeClr>
+                </a:solidFill>
+                <a:latin typeface="+mn-lt"/>
+                <a:ea typeface="+mn-ea"/>
+                <a:cs typeface="+mn-cs"/>
+              </a:defRPr>
+            </a:lvl6pPr>
+          </a:lstStyle>
+          <a:p>
+            <a:pPr lvl="0"/>
+            <a:r>
+              <a:rPr lang="en-US" dirty="0"/>
+              <a:t>Click to edit Master text styles</a:t>
+            </a:r>
+          </a:p>
+          <a:p>
+            <a:pPr lvl="1"/>
+            <a:r>
+              <a:rPr lang="en-US" dirty="0"/>
+              <a:t>Second level</a:t>
+            </a:r>
+          </a:p>
+          <a:p>
+            <a:pPr lvl="2"/>
+            <a:r>
+              <a:rPr lang="en-US" dirty="0"/>
+              <a:t>Third level</a:t>
+            </a:r>
+          </a:p>
+          <a:p>
+            <a:pPr lvl="3"/>
+            <a:r>
+              <a:rPr lang="en-US" dirty="0"/>
+              <a:t>Fourth level</a:t>
+            </a:r>
+          </a:p>
+          <a:p>
+            <a:pPr lvl="4"/>
+            <a:r>
+              <a:rPr lang="en-US" dirty="0"/>
+              <a:t>Fifth level</a:t>
+            </a:r>
+          </a:p>
+          <a:p>
+            <a:pPr marL="0" lvl="5" indent="0" algn="l" defTabSz="906199" rtl="0" eaLnBrk="1" latinLnBrk="0" hangingPunct="1">
+              <a:spcBef>
+                <a:spcPts val="0"/>
+              </a:spcBef>
+              <a:spcAft>
+                <a:spcPts val="600"/>
+              </a:spcAft>
+              <a:buFont typeface="Arial" panose="020B0604020202020204" pitchFamily="34" charset="0"/>
+              <a:buNone/>
+            </a:pPr>
+            <a:r>
+              <a:rPr lang="en-US" dirty="0"/>
+              <a:t>Sixth level</a:t>
+            </a:r>
+          </a:p>
+        </p:txBody>
+      </p:sp>
+    </p:spTree>
+    <p:custDataLst>
+      <p:tags r:id="rId1"/>
+    </p:custDataLst>
+    <p:extLst>
+      <p:ext uri="{BB962C8B-B14F-4D97-AF65-F5344CB8AC3E}">
+        <p14:creationId xmlns:p14="http://schemas.microsoft.com/office/powerpoint/2010/main" val="1956863457"/>
+      </p:ext>
+    </p:extLst>
+  </p:cSld>
+  <p:clrMapOvr>
+    <a:masterClrMapping/>
+  </p:clrMapOvr>
+</p:sldLayout>
+</file>
+
+<file path=ppt/slideLayouts/slideLayout32.xml><?xml version="1.0" encoding="utf-8"?>
 <p:sldLayout xmlns:a="http://schemas.openxmlformats.org/drawingml/2006/main" xmlns:r="http://schemas.openxmlformats.org/officeDocument/2006/relationships" xmlns:p="http://schemas.openxmlformats.org/presentationml/2006/main" preserve="1" userDrawn="1">
   <p:cSld name="TT_8_Chart">
     <p:spTree>
@@ -11573,7 +13281,7 @@
 </p:sldLayout>
 </file>
 
-<file path=ppt/slideLayouts/slideLayout31.xml><?xml version="1.0" encoding="utf-8"?>
+<file path=ppt/slideLayouts/slideLayout33.xml><?xml version="1.0" encoding="utf-8"?>
 <p:sldLayout xmlns:a="http://schemas.openxmlformats.org/drawingml/2006/main" xmlns:r="http://schemas.openxmlformats.org/officeDocument/2006/relationships" xmlns:p="http://schemas.openxmlformats.org/presentationml/2006/main" preserve="1" userDrawn="1">
   <p:cSld name="TT_3_chart_2_table">
     <p:spTree>
@@ -11948,7 +13656,7 @@
 </p:sldLayout>
 </file>
 
-<file path=ppt/slideLayouts/slideLayout32.xml><?xml version="1.0" encoding="utf-8"?>
+<file path=ppt/slideLayouts/slideLayout34.xml><?xml version="1.0" encoding="utf-8"?>
 <p:sldLayout xmlns:a="http://schemas.openxmlformats.org/drawingml/2006/main" xmlns:r="http://schemas.openxmlformats.org/officeDocument/2006/relationships" xmlns:p="http://schemas.openxmlformats.org/presentationml/2006/main" preserve="1" userDrawn="1">
   <p:cSld name="TT_Special Illustration Callout">
     <p:spTree>
@@ -12324,6 +14032,36 @@
               </a:spcAft>
               <a:defRPr sz="1100"/>
             </a:lvl5pPr>
+            <a:lvl6pPr marL="0" indent="0">
+              <a:spcBef>
+                <a:spcPts val="0"/>
+              </a:spcBef>
+              <a:spcAft>
+                <a:spcPts val="600"/>
+              </a:spcAft>
+              <a:buNone/>
+              <a:defRPr sz="1100" i="1">
+                <a:solidFill>
+                  <a:schemeClr val="accent1"/>
+                </a:solidFill>
+              </a:defRPr>
+            </a:lvl6pPr>
+            <a:lvl7pPr marL="0" indent="0">
+              <a:spcBef>
+                <a:spcPts val="0"/>
+              </a:spcBef>
+              <a:spcAft>
+                <a:spcPts val="600"/>
+              </a:spcAft>
+              <a:buNone/>
+              <a:defRPr sz="900">
+                <a:solidFill>
+                  <a:schemeClr val="bg2">
+                    <a:lumMod val="50000"/>
+                  </a:schemeClr>
+                </a:solidFill>
+              </a:defRPr>
+            </a:lvl7pPr>
           </a:lstStyle>
           <a:p>
             <a:pPr lvl="0"/>
@@ -12358,6 +14096,20 @@
             <a:r>
               <a:rPr lang="en-US" dirty="0"/>
               <a:t>Fifth level</a:t>
+            </a:r>
+          </a:p>
+          <a:p>
+            <a:pPr lvl="5"/>
+            <a:r>
+              <a:rPr lang="en-US" dirty="0"/>
+              <a:t>Sixth level</a:t>
+            </a:r>
+          </a:p>
+          <a:p>
+            <a:pPr lvl="6"/>
+            <a:r>
+              <a:rPr lang="en-US" dirty="0"/>
+              <a:t>Seventh level</a:t>
             </a:r>
           </a:p>
         </p:txBody>
@@ -12436,6 +14188,18 @@
                 </a:solidFill>
               </a:defRPr>
             </a:lvl5pPr>
+            <a:lvl6pPr marL="0" indent="0">
+              <a:defRPr lang="en-US" sz="900" kern="1200" dirty="0">
+                <a:solidFill>
+                  <a:schemeClr val="bg2">
+                    <a:lumMod val="50000"/>
+                  </a:schemeClr>
+                </a:solidFill>
+                <a:latin typeface="+mn-lt"/>
+                <a:ea typeface="+mn-ea"/>
+                <a:cs typeface="+mn-cs"/>
+              </a:defRPr>
+            </a:lvl6pPr>
           </a:lstStyle>
           <a:p>
             <a:pPr lvl="0"/>
@@ -12470,6 +14234,22 @@
             <a:r>
               <a:rPr lang="en-US" dirty="0"/>
               <a:t>Fifth level</a:t>
+            </a:r>
+          </a:p>
+          <a:p>
+            <a:pPr marL="0" lvl="5" indent="0" algn="l" defTabSz="906199" rtl="0" eaLnBrk="1" latinLnBrk="0" hangingPunct="1">
+              <a:spcBef>
+                <a:spcPts val="0"/>
+              </a:spcBef>
+              <a:spcAft>
+                <a:spcPts val="600"/>
+              </a:spcAft>
+              <a:buFont typeface="Arial" panose="020B0604020202020204" pitchFamily="34" charset="0"/>
+              <a:buNone/>
+            </a:pPr>
+            <a:r>
+              <a:rPr lang="en-US" dirty="0"/>
+              <a:t>Sixth level</a:t>
             </a:r>
           </a:p>
         </p:txBody>
@@ -12490,7 +14270,7 @@
 </p:sldLayout>
 </file>
 
-<file path=ppt/slideLayouts/slideLayout33.xml><?xml version="1.0" encoding="utf-8"?>
+<file path=ppt/slideLayouts/slideLayout35.xml><?xml version="1.0" encoding="utf-8"?>
 <p:sldLayout xmlns:a="http://schemas.openxmlformats.org/drawingml/2006/main" xmlns:r="http://schemas.openxmlformats.org/officeDocument/2006/relationships" xmlns:p="http://schemas.openxmlformats.org/presentationml/2006/main" preserve="1" userDrawn="1">
   <p:cSld name="TT_Example_w_Photo">
     <p:spTree>
@@ -12798,6 +14578,18 @@
                 </a:solidFill>
               </a:defRPr>
             </a:lvl5pPr>
+            <a:lvl6pPr marL="0" indent="0">
+              <a:defRPr lang="en-US" sz="900" kern="1200" dirty="0">
+                <a:solidFill>
+                  <a:schemeClr val="bg2">
+                    <a:lumMod val="50000"/>
+                  </a:schemeClr>
+                </a:solidFill>
+                <a:latin typeface="+mn-lt"/>
+                <a:ea typeface="+mn-ea"/>
+                <a:cs typeface="+mn-cs"/>
+              </a:defRPr>
+            </a:lvl6pPr>
           </a:lstStyle>
           <a:p>
             <a:pPr lvl="0"/>
@@ -12832,6 +14624,22 @@
             <a:r>
               <a:rPr lang="en-US" dirty="0"/>
               <a:t>Fifth level</a:t>
+            </a:r>
+          </a:p>
+          <a:p>
+            <a:pPr marL="0" lvl="5" indent="0" algn="l" defTabSz="906199" rtl="0" eaLnBrk="1" latinLnBrk="0" hangingPunct="1">
+              <a:spcBef>
+                <a:spcPts val="0"/>
+              </a:spcBef>
+              <a:spcAft>
+                <a:spcPts val="600"/>
+              </a:spcAft>
+              <a:buFont typeface="Arial" panose="020B0604020202020204" pitchFamily="34" charset="0"/>
+              <a:buNone/>
+            </a:pPr>
+            <a:r>
+              <a:rPr lang="en-US" dirty="0"/>
+              <a:t>Sixth level</a:t>
             </a:r>
           </a:p>
         </p:txBody>
@@ -13003,7 +14811,7 @@
 </p:sldLayout>
 </file>
 
-<file path=ppt/slideLayouts/slideLayout34.xml><?xml version="1.0" encoding="utf-8"?>
+<file path=ppt/slideLayouts/slideLayout36.xml><?xml version="1.0" encoding="utf-8"?>
 <p:sldLayout xmlns:a="http://schemas.openxmlformats.org/drawingml/2006/main" xmlns:r="http://schemas.openxmlformats.org/officeDocument/2006/relationships" xmlns:p="http://schemas.openxmlformats.org/presentationml/2006/main" preserve="1" userDrawn="1">
   <p:cSld name="TT_Example_w_Multi_Photos">
     <p:spTree>
@@ -13537,6 +15345,18 @@
                 </a:solidFill>
               </a:defRPr>
             </a:lvl5pPr>
+            <a:lvl6pPr marL="0" indent="0">
+              <a:defRPr lang="en-US" sz="900" kern="1200" dirty="0">
+                <a:solidFill>
+                  <a:schemeClr val="bg2">
+                    <a:lumMod val="50000"/>
+                  </a:schemeClr>
+                </a:solidFill>
+                <a:latin typeface="+mn-lt"/>
+                <a:ea typeface="+mn-ea"/>
+                <a:cs typeface="+mn-cs"/>
+              </a:defRPr>
+            </a:lvl6pPr>
           </a:lstStyle>
           <a:p>
             <a:pPr lvl="0"/>
@@ -13571,6 +15391,22 @@
             <a:r>
               <a:rPr lang="en-US" dirty="0"/>
               <a:t>Fifth level</a:t>
+            </a:r>
+          </a:p>
+          <a:p>
+            <a:pPr marL="0" lvl="5" indent="0" algn="l" defTabSz="906199" rtl="0" eaLnBrk="1" latinLnBrk="0" hangingPunct="1">
+              <a:spcBef>
+                <a:spcPts val="0"/>
+              </a:spcBef>
+              <a:spcAft>
+                <a:spcPts val="600"/>
+              </a:spcAft>
+              <a:buFont typeface="Arial" panose="020B0604020202020204" pitchFamily="34" charset="0"/>
+              <a:buNone/>
+            </a:pPr>
+            <a:r>
+              <a:rPr lang="en-US" dirty="0"/>
+              <a:t>Sixth level</a:t>
             </a:r>
           </a:p>
         </p:txBody>
@@ -13591,7 +15427,7 @@
 </p:sldLayout>
 </file>
 
-<file path=ppt/slideLayouts/slideLayout35.xml><?xml version="1.0" encoding="utf-8"?>
+<file path=ppt/slideLayouts/slideLayout37.xml><?xml version="1.0" encoding="utf-8"?>
 <p:sldLayout xmlns:a="http://schemas.openxmlformats.org/drawingml/2006/main" xmlns:r="http://schemas.openxmlformats.org/officeDocument/2006/relationships" xmlns:p="http://schemas.openxmlformats.org/presentationml/2006/main" preserve="1" userDrawn="1">
   <p:cSld name="TT_4_Photo_Text">
     <p:spTree>
@@ -14369,6 +16205,18 @@
                 </a:solidFill>
               </a:defRPr>
             </a:lvl5pPr>
+            <a:lvl6pPr marL="0" indent="0">
+              <a:defRPr lang="en-US" sz="900" kern="1200" dirty="0">
+                <a:solidFill>
+                  <a:schemeClr val="bg2">
+                    <a:lumMod val="50000"/>
+                  </a:schemeClr>
+                </a:solidFill>
+                <a:latin typeface="+mn-lt"/>
+                <a:ea typeface="+mn-ea"/>
+                <a:cs typeface="+mn-cs"/>
+              </a:defRPr>
+            </a:lvl6pPr>
           </a:lstStyle>
           <a:p>
             <a:pPr lvl="0"/>
@@ -14403,6 +16251,22 @@
             <a:r>
               <a:rPr lang="en-US" dirty="0"/>
               <a:t>Fifth level</a:t>
+            </a:r>
+          </a:p>
+          <a:p>
+            <a:pPr marL="0" lvl="5" indent="0" algn="l" defTabSz="906199" rtl="0" eaLnBrk="1" latinLnBrk="0" hangingPunct="1">
+              <a:spcBef>
+                <a:spcPts val="0"/>
+              </a:spcBef>
+              <a:spcAft>
+                <a:spcPts val="600"/>
+              </a:spcAft>
+              <a:buFont typeface="Arial" panose="020B0604020202020204" pitchFamily="34" charset="0"/>
+              <a:buNone/>
+            </a:pPr>
+            <a:r>
+              <a:rPr lang="en-US" dirty="0"/>
+              <a:t>Sixth level</a:t>
             </a:r>
           </a:p>
         </p:txBody>
@@ -14491,7 +16355,7 @@
 </p:sldLayout>
 </file>
 
-<file path=ppt/slideLayouts/slideLayout36.xml><?xml version="1.0" encoding="utf-8"?>
+<file path=ppt/slideLayouts/slideLayout38.xml><?xml version="1.0" encoding="utf-8"?>
 <p:sldLayout xmlns:a="http://schemas.openxmlformats.org/drawingml/2006/main" xmlns:r="http://schemas.openxmlformats.org/officeDocument/2006/relationships" xmlns:p="http://schemas.openxmlformats.org/presentationml/2006/main" preserve="1" userDrawn="1">
   <p:cSld name="TT_Special_Visualization">
     <p:spTree>
@@ -14703,7 +16567,7 @@
 </p:sldLayout>
 </file>
 
-<file path=ppt/slideLayouts/slideLayout37.xml><?xml version="1.0" encoding="utf-8"?>
+<file path=ppt/slideLayouts/slideLayout39.xml><?xml version="1.0" encoding="utf-8"?>
 <p:sldLayout xmlns:a="http://schemas.openxmlformats.org/drawingml/2006/main" xmlns:r="http://schemas.openxmlformats.org/officeDocument/2006/relationships" xmlns:p="http://schemas.openxmlformats.org/presentationml/2006/main" preserve="1" userDrawn="1">
   <p:cSld name="TT_SD_TotalBlank">
     <p:bg>
@@ -14856,7 +16720,592 @@
 </p:sldLayout>
 </file>
 
-<file path=ppt/slideLayouts/slideLayout38.xml><?xml version="1.0" encoding="utf-8"?>
+<file path=ppt/slideLayouts/slideLayout4.xml><?xml version="1.0" encoding="utf-8"?>
+<p:sldLayout xmlns:a="http://schemas.openxmlformats.org/drawingml/2006/main" xmlns:r="http://schemas.openxmlformats.org/officeDocument/2006/relationships" xmlns:p="http://schemas.openxmlformats.org/presentationml/2006/main" preserve="1" userDrawn="1">
+  <p:cSld name="TT—Subsection Intro, Paragraph Form">
+    <p:spTree>
+      <p:nvGrpSpPr>
+        <p:cNvPr id="1" name=""/>
+        <p:cNvGrpSpPr/>
+        <p:nvPr/>
+      </p:nvGrpSpPr>
+      <p:grpSpPr>
+        <a:xfrm>
+          <a:off x="0" y="0"/>
+          <a:ext cx="0" cy="0"/>
+          <a:chOff x="0" y="0"/>
+          <a:chExt cx="0" cy="0"/>
+        </a:xfrm>
+      </p:grpSpPr>
+      <p:sp>
+        <p:nvSpPr>
+          <p:cNvPr id="11" name="Rectangle 10">
+            <a:extLst>
+              <a:ext uri="{FF2B5EF4-FFF2-40B4-BE49-F238E27FC236}">
+                <a16:creationId xmlns:a16="http://schemas.microsoft.com/office/drawing/2014/main" id="{CBD07C37-16C9-4DA8-A740-C76FD109EBD5}"/>
+              </a:ext>
+            </a:extLst>
+          </p:cNvPr>
+          <p:cNvSpPr/>
+          <p:nvPr userDrawn="1"/>
+        </p:nvSpPr>
+        <p:spPr>
+          <a:xfrm>
+            <a:off x="9266223" y="0"/>
+            <a:ext cx="2925777" cy="6858000"/>
+          </a:xfrm>
+          <a:prstGeom prst="rect">
+            <a:avLst/>
+          </a:prstGeom>
+          <a:solidFill>
+            <a:srgbClr val="FFFFFF"/>
+          </a:solidFill>
+          <a:ln>
+            <a:noFill/>
+          </a:ln>
+        </p:spPr>
+        <p:style>
+          <a:lnRef idx="2">
+            <a:schemeClr val="accent1">
+              <a:shade val="50000"/>
+            </a:schemeClr>
+          </a:lnRef>
+          <a:fillRef idx="1">
+            <a:schemeClr val="accent1"/>
+          </a:fillRef>
+          <a:effectRef idx="0">
+            <a:schemeClr val="accent1"/>
+          </a:effectRef>
+          <a:fontRef idx="minor">
+            <a:schemeClr val="lt1"/>
+          </a:fontRef>
+        </p:style>
+        <p:txBody>
+          <a:bodyPr rtlCol="0" anchor="ctr"/>
+          <a:lstStyle/>
+          <a:p>
+            <a:pPr algn="ctr"/>
+            <a:endParaRPr lang="en-US" dirty="0"/>
+          </a:p>
+        </p:txBody>
+      </p:sp>
+      <p:sp>
+        <p:nvSpPr>
+          <p:cNvPr id="4" name="Big Idea">
+            <a:extLst>
+              <a:ext uri="{FF2B5EF4-FFF2-40B4-BE49-F238E27FC236}">
+                <a16:creationId xmlns:a16="http://schemas.microsoft.com/office/drawing/2014/main" id="{23308B8E-E88D-4F46-BB59-A5209A6972B4}"/>
+              </a:ext>
+            </a:extLst>
+          </p:cNvPr>
+          <p:cNvSpPr>
+            <a:spLocks noGrp="1"/>
+          </p:cNvSpPr>
+          <p:nvPr>
+            <p:ph type="body" sz="quarter" idx="17"/>
+          </p:nvPr>
+        </p:nvSpPr>
+        <p:spPr>
+          <a:xfrm>
+            <a:off x="457200" y="1229395"/>
+            <a:ext cx="8343900" cy="2314666"/>
+          </a:xfrm>
+          <a:prstGeom prst="rect">
+            <a:avLst/>
+          </a:prstGeom>
+        </p:spPr>
+        <p:txBody>
+          <a:bodyPr anchor="ctr"/>
+          <a:lstStyle>
+            <a:lvl1pPr>
+              <a:spcAft>
+                <a:spcPts val="2000"/>
+              </a:spcAft>
+              <a:defRPr lang="en-US" sz="4400" b="1" kern="1200" spc="-150" dirty="0" smtClean="0">
+                <a:solidFill>
+                  <a:schemeClr val="tx1"/>
+                </a:solidFill>
+                <a:latin typeface="+mn-lt"/>
+                <a:ea typeface="+mj-ea"/>
+                <a:cs typeface="+mj-cs"/>
+              </a:defRPr>
+            </a:lvl1pPr>
+            <a:lvl2pPr marL="0" indent="0">
+              <a:buNone/>
+              <a:defRPr sz="2000">
+                <a:solidFill>
+                  <a:schemeClr val="bg2">
+                    <a:lumMod val="50000"/>
+                  </a:schemeClr>
+                </a:solidFill>
+              </a:defRPr>
+            </a:lvl2pPr>
+          </a:lstStyle>
+          <a:p>
+            <a:pPr lvl="0"/>
+            <a:r>
+              <a:rPr lang="en-US" dirty="0"/>
+              <a:t>Click to edit Master text styles</a:t>
+            </a:r>
+          </a:p>
+          <a:p>
+            <a:pPr lvl="1"/>
+            <a:r>
+              <a:rPr lang="en-US" dirty="0"/>
+              <a:t>Second level</a:t>
+            </a:r>
+          </a:p>
+        </p:txBody>
+      </p:sp>
+      <p:sp>
+        <p:nvSpPr>
+          <p:cNvPr id="10" name="Section Tag">
+            <a:extLst>
+              <a:ext uri="{FF2B5EF4-FFF2-40B4-BE49-F238E27FC236}">
+                <a16:creationId xmlns:a16="http://schemas.microsoft.com/office/drawing/2014/main" id="{92449049-2C6C-46A6-8F6C-E1CC2A901803}"/>
+              </a:ext>
+            </a:extLst>
+          </p:cNvPr>
+          <p:cNvSpPr>
+            <a:spLocks noGrp="1"/>
+          </p:cNvSpPr>
+          <p:nvPr>
+            <p:ph type="body" sz="quarter" idx="16" hasCustomPrompt="1"/>
+          </p:nvPr>
+        </p:nvSpPr>
+        <p:spPr>
+          <a:xfrm>
+            <a:off x="457200" y="425325"/>
+            <a:ext cx="8343146" cy="298952"/>
+          </a:xfrm>
+          <a:prstGeom prst="rect">
+            <a:avLst/>
+          </a:prstGeom>
+        </p:spPr>
+        <p:txBody>
+          <a:bodyPr/>
+          <a:lstStyle>
+            <a:lvl1pPr>
+              <a:defRPr sz="1400" b="1" cap="all" spc="150" baseline="0">
+                <a:solidFill>
+                  <a:schemeClr val="bg2">
+                    <a:lumMod val="50000"/>
+                  </a:schemeClr>
+                </a:solidFill>
+              </a:defRPr>
+            </a:lvl1pPr>
+            <a:lvl2pPr marL="0" indent="0">
+              <a:buNone/>
+              <a:defRPr/>
+            </a:lvl2pPr>
+          </a:lstStyle>
+          <a:p>
+            <a:pPr lvl="0"/>
+            <a:r>
+              <a:rPr lang="en-US" dirty="0"/>
+              <a:t>SECTION TAG</a:t>
+            </a:r>
+          </a:p>
+        </p:txBody>
+      </p:sp>
+      <p:sp>
+        <p:nvSpPr>
+          <p:cNvPr id="9" name="Footer Placeholder 3">
+            <a:extLst>
+              <a:ext uri="{FF2B5EF4-FFF2-40B4-BE49-F238E27FC236}">
+                <a16:creationId xmlns:a16="http://schemas.microsoft.com/office/drawing/2014/main" id="{0D6EC0F8-1B95-4D14-A63C-4417B8D04DEF}"/>
+              </a:ext>
+            </a:extLst>
+          </p:cNvPr>
+          <p:cNvSpPr>
+            <a:spLocks noGrp="1"/>
+          </p:cNvSpPr>
+          <p:nvPr>
+            <p:ph type="ftr" sz="quarter" idx="3"/>
+          </p:nvPr>
+        </p:nvSpPr>
+        <p:spPr>
+          <a:xfrm>
+            <a:off x="457200" y="6023777"/>
+            <a:ext cx="8343146" cy="365125"/>
+          </a:xfrm>
+          <a:prstGeom prst="rect">
+            <a:avLst/>
+          </a:prstGeom>
+        </p:spPr>
+        <p:txBody>
+          <a:bodyPr vert="horz" lIns="0" tIns="0" rIns="0" bIns="0" rtlCol="0" anchor="b"/>
+          <a:lstStyle>
+            <a:lvl1pPr algn="l">
+              <a:spcBef>
+                <a:spcPts val="0"/>
+              </a:spcBef>
+              <a:defRPr sz="800">
+                <a:solidFill>
+                  <a:schemeClr val="tx1"/>
+                </a:solidFill>
+              </a:defRPr>
+            </a:lvl1pPr>
+          </a:lstStyle>
+          <a:p>
+            <a:r>
+              <a:rPr lang="en-US" dirty="0"/>
+              <a:t>Base:</a:t>
+            </a:r>
+            <a:br>
+              <a:rPr lang="en-US" dirty="0"/>
+            </a:br>
+            <a:r>
+              <a:rPr lang="en-US" dirty="0"/>
+              <a:t>Q:</a:t>
+            </a:r>
+            <a:br>
+              <a:rPr lang="en-US" dirty="0"/>
+            </a:br>
+            <a:r>
+              <a:rPr lang="en-US" dirty="0"/>
+              <a:t>Note:</a:t>
+            </a:r>
+          </a:p>
+        </p:txBody>
+      </p:sp>
+      <p:sp>
+        <p:nvSpPr>
+          <p:cNvPr id="3" name="Contents">
+            <a:extLst>
+              <a:ext uri="{FF2B5EF4-FFF2-40B4-BE49-F238E27FC236}">
+                <a16:creationId xmlns:a16="http://schemas.microsoft.com/office/drawing/2014/main" id="{68FEFE21-C87F-438E-9813-00B6F2CB110A}"/>
+              </a:ext>
+            </a:extLst>
+          </p:cNvPr>
+          <p:cNvSpPr>
+            <a:spLocks noGrp="1"/>
+          </p:cNvSpPr>
+          <p:nvPr>
+            <p:ph type="body" sz="quarter" idx="19" hasCustomPrompt="1"/>
+          </p:nvPr>
+        </p:nvSpPr>
+        <p:spPr>
+          <a:xfrm>
+            <a:off x="9490075" y="425324"/>
+            <a:ext cx="2476500" cy="5975475"/>
+          </a:xfrm>
+          <a:prstGeom prst="rect">
+            <a:avLst/>
+          </a:prstGeom>
+        </p:spPr>
+        <p:txBody>
+          <a:bodyPr/>
+          <a:lstStyle>
+            <a:lvl1pPr>
+              <a:defRPr lang="en-US" sz="1000" kern="1200" cap="all" spc="150" baseline="0" dirty="0" smtClean="0">
+                <a:solidFill>
+                  <a:schemeClr val="bg2">
+                    <a:lumMod val="50000"/>
+                  </a:schemeClr>
+                </a:solidFill>
+                <a:latin typeface="+mn-lt"/>
+                <a:ea typeface="Georgia" charset="0"/>
+                <a:cs typeface="Georgia" charset="0"/>
+              </a:defRPr>
+            </a:lvl1pPr>
+            <a:lvl2pPr marL="0" indent="0">
+              <a:spcBef>
+                <a:spcPts val="1200"/>
+              </a:spcBef>
+              <a:spcAft>
+                <a:spcPts val="600"/>
+              </a:spcAft>
+              <a:buNone/>
+              <a:defRPr sz="1100" b="1"/>
+            </a:lvl2pPr>
+            <a:lvl3pPr marL="0" indent="0">
+              <a:spcAft>
+                <a:spcPts val="600"/>
+              </a:spcAft>
+              <a:buNone/>
+              <a:defRPr sz="1100"/>
+            </a:lvl3pPr>
+            <a:lvl4pPr marL="0" indent="0">
+              <a:spcAft>
+                <a:spcPts val="600"/>
+              </a:spcAft>
+              <a:buNone/>
+              <a:defRPr sz="800">
+                <a:solidFill>
+                  <a:schemeClr val="bg2">
+                    <a:lumMod val="50000"/>
+                  </a:schemeClr>
+                </a:solidFill>
+              </a:defRPr>
+            </a:lvl4pPr>
+            <a:lvl5pPr marL="0" indent="0">
+              <a:spcAft>
+                <a:spcPts val="600"/>
+              </a:spcAft>
+              <a:buNone/>
+              <a:defRPr sz="1100" i="1">
+                <a:solidFill>
+                  <a:schemeClr val="accent1"/>
+                </a:solidFill>
+              </a:defRPr>
+            </a:lvl5pPr>
+          </a:lstStyle>
+          <a:p>
+            <a:pPr marL="0" lvl="0" indent="0" algn="l" defTabSz="906199" rtl="0" eaLnBrk="1" latinLnBrk="0" hangingPunct="1">
+              <a:spcBef>
+                <a:spcPts val="1200"/>
+              </a:spcBef>
+              <a:spcAft>
+                <a:spcPts val="600"/>
+              </a:spcAft>
+              <a:buClrTx/>
+              <a:buFont typeface="Calibri" panose="020F0502020204030204" pitchFamily="34" charset="0"/>
+              <a:buNone/>
+            </a:pPr>
+            <a:r>
+              <a:rPr lang="en-US" dirty="0"/>
+              <a:t>CLICK TO EDIT MASTER TEXT STYLES</a:t>
+            </a:r>
+          </a:p>
+          <a:p>
+            <a:pPr lvl="1"/>
+            <a:r>
+              <a:rPr lang="en-US" dirty="0"/>
+              <a:t>Second level</a:t>
+            </a:r>
+          </a:p>
+          <a:p>
+            <a:pPr lvl="2"/>
+            <a:r>
+              <a:rPr lang="en-US" dirty="0"/>
+              <a:t>Third level</a:t>
+            </a:r>
+          </a:p>
+          <a:p>
+            <a:pPr lvl="3"/>
+            <a:r>
+              <a:rPr lang="en-US" dirty="0"/>
+              <a:t>Fourth level</a:t>
+            </a:r>
+          </a:p>
+          <a:p>
+            <a:pPr lvl="4"/>
+            <a:r>
+              <a:rPr lang="en-US" dirty="0"/>
+              <a:t>Fifth level</a:t>
+            </a:r>
+          </a:p>
+        </p:txBody>
+      </p:sp>
+      <p:sp>
+        <p:nvSpPr>
+          <p:cNvPr id="13" name="BodyCopy 1">
+            <a:extLst>
+              <a:ext uri="{FF2B5EF4-FFF2-40B4-BE49-F238E27FC236}">
+                <a16:creationId xmlns:a16="http://schemas.microsoft.com/office/drawing/2014/main" id="{1A9A13B3-B5A5-4146-940A-130AD42D042E}"/>
+              </a:ext>
+            </a:extLst>
+          </p:cNvPr>
+          <p:cNvSpPr>
+            <a:spLocks noGrp="1"/>
+          </p:cNvSpPr>
+          <p:nvPr>
+            <p:ph type="body" sz="quarter" idx="20"/>
+          </p:nvPr>
+        </p:nvSpPr>
+        <p:spPr>
+          <a:xfrm>
+            <a:off x="457200" y="4297680"/>
+            <a:ext cx="8343900" cy="1738314"/>
+          </a:xfrm>
+          <a:prstGeom prst="rect">
+            <a:avLst/>
+          </a:prstGeom>
+        </p:spPr>
+        <p:txBody>
+          <a:bodyPr numCol="3" spcCol="457200"/>
+          <a:lstStyle>
+            <a:lvl1pPr algn="l">
+              <a:spcBef>
+                <a:spcPts val="1200"/>
+              </a:spcBef>
+              <a:spcAft>
+                <a:spcPts val="600"/>
+              </a:spcAft>
+              <a:defRPr b="1"/>
+            </a:lvl1pPr>
+            <a:lvl2pPr marL="0" indent="0" algn="l">
+              <a:spcAft>
+                <a:spcPts val="600"/>
+              </a:spcAft>
+              <a:buNone/>
+              <a:defRPr sz="1100" b="0"/>
+            </a:lvl2pPr>
+            <a:lvl3pPr marL="173038" indent="-173038" algn="l">
+              <a:spcAft>
+                <a:spcPts val="600"/>
+              </a:spcAft>
+              <a:buClr>
+                <a:schemeClr val="bg2">
+                  <a:lumMod val="50000"/>
+                </a:schemeClr>
+              </a:buClr>
+              <a:buFont typeface="Arial" panose="020B0604020202020204" pitchFamily="34" charset="0"/>
+              <a:buChar char="●"/>
+              <a:defRPr sz="1100" b="0"/>
+            </a:lvl3pPr>
+            <a:lvl4pPr marL="396875" indent="-223838" algn="l">
+              <a:spcAft>
+                <a:spcPts val="600"/>
+              </a:spcAft>
+              <a:defRPr sz="1100" b="0"/>
+            </a:lvl4pPr>
+            <a:lvl5pPr marL="0" indent="0" algn="l">
+              <a:spcAft>
+                <a:spcPts val="600"/>
+              </a:spcAft>
+              <a:buNone/>
+              <a:defRPr sz="1100" i="1">
+                <a:solidFill>
+                  <a:schemeClr val="accent1"/>
+                </a:solidFill>
+              </a:defRPr>
+            </a:lvl5pPr>
+            <a:lvl6pPr marL="0" indent="0">
+              <a:defRPr lang="en-US" sz="900" kern="1200" dirty="0">
+                <a:solidFill>
+                  <a:schemeClr val="bg2">
+                    <a:lumMod val="50000"/>
+                  </a:schemeClr>
+                </a:solidFill>
+                <a:latin typeface="+mn-lt"/>
+                <a:ea typeface="+mn-ea"/>
+                <a:cs typeface="+mn-cs"/>
+              </a:defRPr>
+            </a:lvl6pPr>
+          </a:lstStyle>
+          <a:p>
+            <a:pPr lvl="0"/>
+            <a:r>
+              <a:rPr lang="en-US" dirty="0"/>
+              <a:t>Click to edit Master text styles</a:t>
+            </a:r>
+          </a:p>
+          <a:p>
+            <a:pPr lvl="1"/>
+            <a:r>
+              <a:rPr lang="en-US" dirty="0"/>
+              <a:t>Second level</a:t>
+            </a:r>
+          </a:p>
+          <a:p>
+            <a:pPr lvl="2"/>
+            <a:r>
+              <a:rPr lang="en-US" dirty="0"/>
+              <a:t>Third level</a:t>
+            </a:r>
+          </a:p>
+          <a:p>
+            <a:pPr lvl="3"/>
+            <a:r>
+              <a:rPr lang="en-US" dirty="0"/>
+              <a:t>Fourth level</a:t>
+            </a:r>
+          </a:p>
+          <a:p>
+            <a:pPr lvl="4"/>
+            <a:r>
+              <a:rPr lang="en-US" dirty="0"/>
+              <a:t>Fifth level</a:t>
+            </a:r>
+          </a:p>
+          <a:p>
+            <a:pPr marL="0" lvl="5" indent="0" algn="l" defTabSz="906199" rtl="0" eaLnBrk="1" latinLnBrk="0" hangingPunct="1">
+              <a:spcBef>
+                <a:spcPts val="0"/>
+              </a:spcBef>
+              <a:spcAft>
+                <a:spcPts val="600"/>
+              </a:spcAft>
+              <a:buFont typeface="Arial" panose="020B0604020202020204" pitchFamily="34" charset="0"/>
+              <a:buNone/>
+            </a:pPr>
+            <a:r>
+              <a:rPr lang="en-US" dirty="0"/>
+              <a:t>Sixth level</a:t>
+            </a:r>
+          </a:p>
+        </p:txBody>
+      </p:sp>
+      <p:sp>
+        <p:nvSpPr>
+          <p:cNvPr id="12" name="PPH-SlideNo">
+            <a:extLst>
+              <a:ext uri="{FF2B5EF4-FFF2-40B4-BE49-F238E27FC236}">
+                <a16:creationId xmlns:a16="http://schemas.microsoft.com/office/drawing/2014/main" id="{284BB751-6940-400C-90ED-29200DEF6986}"/>
+              </a:ext>
+            </a:extLst>
+          </p:cNvPr>
+          <p:cNvSpPr>
+            <a:spLocks noGrp="1"/>
+          </p:cNvSpPr>
+          <p:nvPr>
+            <p:ph type="sldNum" sz="quarter" idx="4"/>
+          </p:nvPr>
+        </p:nvSpPr>
+        <p:spPr>
+          <a:xfrm>
+            <a:off x="10611670" y="6550981"/>
+            <a:ext cx="1117599" cy="230823"/>
+          </a:xfrm>
+          <a:prstGeom prst="rect">
+            <a:avLst/>
+          </a:prstGeom>
+        </p:spPr>
+        <p:txBody>
+          <a:bodyPr vert="horz" wrap="none" lIns="0" tIns="0" rIns="0" bIns="0" rtlCol="0" anchor="b"/>
+          <a:lstStyle>
+            <a:lvl1pPr algn="r">
+              <a:spcBef>
+                <a:spcPts val="0"/>
+              </a:spcBef>
+              <a:defRPr sz="800" b="1">
+                <a:solidFill>
+                  <a:schemeClr val="bg2">
+                    <a:lumMod val="50000"/>
+                  </a:schemeClr>
+                </a:solidFill>
+                <a:latin typeface="+mn-lt"/>
+              </a:defRPr>
+            </a:lvl1pPr>
+          </a:lstStyle>
+          <a:p>
+            <a:pPr defTabSz="856716"/>
+            <a:fld id="{7B6B1C32-E567-445C-9FD5-2A0B0A08DD29}" type="slidenum">
+              <a:rPr lang="en-US" smtClean="0"/>
+              <a:pPr defTabSz="856716"/>
+              <a:t>‹#›</a:t>
+            </a:fld>
+            <a:endParaRPr lang="en-US" dirty="0"/>
+          </a:p>
+        </p:txBody>
+      </p:sp>
+    </p:spTree>
+    <p:extLst>
+      <p:ext uri="{BB962C8B-B14F-4D97-AF65-F5344CB8AC3E}">
+        <p14:creationId xmlns:p14="http://schemas.microsoft.com/office/powerpoint/2010/main" val="1702855351"/>
+      </p:ext>
+    </p:extLst>
+  </p:cSld>
+  <p:clrMapOvr>
+    <a:masterClrMapping/>
+  </p:clrMapOvr>
+  <p:hf hdr="0" dt="0"/>
+</p:sldLayout>
+</file>
+
+<file path=ppt/slideLayouts/slideLayout40.xml><?xml version="1.0" encoding="utf-8"?>
 <p:sldLayout xmlns:a="http://schemas.openxmlformats.org/drawingml/2006/main" xmlns:r="http://schemas.openxmlformats.org/officeDocument/2006/relationships" xmlns:p="http://schemas.openxmlformats.org/presentationml/2006/main" preserve="1" userDrawn="1">
   <p:cSld name="TT_End Wrapper_w_Photos">
     <p:spTree>
@@ -15939,916 +18388,7 @@
 </p:sldLayout>
 </file>
 
-<file path=ppt/slideLayouts/slideLayout39.xml><?xml version="1.0" encoding="utf-8"?>
-<p:sldLayout xmlns:a="http://schemas.openxmlformats.org/drawingml/2006/main" xmlns:r="http://schemas.openxmlformats.org/officeDocument/2006/relationships" xmlns:p="http://schemas.openxmlformats.org/presentationml/2006/main" preserve="1" userDrawn="1">
-  <p:cSld name="TT_Acceptance_Form">
-    <p:spTree>
-      <p:nvGrpSpPr>
-        <p:cNvPr id="1" name=""/>
-        <p:cNvGrpSpPr/>
-        <p:nvPr/>
-      </p:nvGrpSpPr>
-      <p:grpSpPr>
-        <a:xfrm>
-          <a:off x="0" y="0"/>
-          <a:ext cx="0" cy="0"/>
-          <a:chOff x="0" y="0"/>
-          <a:chExt cx="0" cy="0"/>
-        </a:xfrm>
-      </p:grpSpPr>
-      <p:sp>
-        <p:nvSpPr>
-          <p:cNvPr id="3" name="Slide Number Placeholder 2"/>
-          <p:cNvSpPr>
-            <a:spLocks noGrp="1"/>
-          </p:cNvSpPr>
-          <p:nvPr>
-            <p:ph type="sldNum" sz="quarter" idx="10"/>
-          </p:nvPr>
-        </p:nvSpPr>
-        <p:spPr/>
-        <p:txBody>
-          <a:bodyPr/>
-          <a:lstStyle/>
-          <a:p>
-            <a:pPr defTabSz="856716"/>
-            <a:fld id="{7B6B1C32-E567-445C-9FD5-2A0B0A08DD29}" type="slidenum">
-              <a:rPr lang="en-US" smtClean="0"/>
-              <a:pPr defTabSz="856716"/>
-              <a:t>‹#›</a:t>
-            </a:fld>
-            <a:endParaRPr lang="en-US" dirty="0"/>
-          </a:p>
-        </p:txBody>
-      </p:sp>
-      <p:sp>
-        <p:nvSpPr>
-          <p:cNvPr id="14" name="Text Placeholder 4"/>
-          <p:cNvSpPr>
-            <a:spLocks noGrp="1"/>
-          </p:cNvSpPr>
-          <p:nvPr>
-            <p:ph type="body" sz="quarter" idx="15"/>
-          </p:nvPr>
-        </p:nvSpPr>
-        <p:spPr>
-          <a:xfrm>
-            <a:off x="3390901" y="1321724"/>
-            <a:ext cx="8343898" cy="1421476"/>
-          </a:xfrm>
-          <a:prstGeom prst="rect">
-            <a:avLst/>
-          </a:prstGeom>
-        </p:spPr>
-        <p:txBody>
-          <a:bodyPr wrap="square" numCol="1" spcCol="365760">
-            <a:noAutofit/>
-          </a:bodyPr>
-          <a:lstStyle>
-            <a:lvl1pPr>
-              <a:spcAft>
-                <a:spcPts val="600"/>
-              </a:spcAft>
-              <a:defRPr sz="1100">
-                <a:latin typeface="Arial" panose="020B0604020202020204" pitchFamily="34" charset="0"/>
-                <a:cs typeface="Arial" panose="020B0604020202020204" pitchFamily="34" charset="0"/>
-              </a:defRPr>
-            </a:lvl1pPr>
-            <a:lvl2pPr marL="406400" indent="-234950">
-              <a:spcAft>
-                <a:spcPts val="600"/>
-              </a:spcAft>
-              <a:buClr>
-                <a:schemeClr val="bg1">
-                  <a:lumMod val="85000"/>
-                </a:schemeClr>
-              </a:buClr>
-              <a:buSzPct val="175000"/>
-              <a:buFont typeface="System Font Regular"/>
-              <a:buChar char="■"/>
-              <a:tabLst>
-                <a:tab pos="2908300" algn="l"/>
-              </a:tabLst>
-              <a:defRPr sz="1100">
-                <a:latin typeface="Arial" panose="020B0604020202020204" pitchFamily="34" charset="0"/>
-                <a:ea typeface="Georgia" panose="02040502050405020303" pitchFamily="18" charset="0"/>
-                <a:cs typeface="Arial" panose="020B0604020202020204" pitchFamily="34" charset="0"/>
-              </a:defRPr>
-            </a:lvl2pPr>
-          </a:lstStyle>
-          <a:p>
-            <a:pPr lvl="0"/>
-            <a:r>
-              <a:rPr lang="en-US" dirty="0"/>
-              <a:t>Click to edit Master text styles</a:t>
-            </a:r>
-          </a:p>
-          <a:p>
-            <a:pPr lvl="1"/>
-            <a:r>
-              <a:rPr lang="en-US" dirty="0"/>
-              <a:t>Second level</a:t>
-            </a:r>
-          </a:p>
-        </p:txBody>
-      </p:sp>
-      <p:sp>
-        <p:nvSpPr>
-          <p:cNvPr id="5" name="Section Tag">
-            <a:extLst>
-              <a:ext uri="{FF2B5EF4-FFF2-40B4-BE49-F238E27FC236}">
-                <a16:creationId xmlns:a16="http://schemas.microsoft.com/office/drawing/2014/main" id="{B6EF9F24-01BE-4CE7-86B9-157DA79A221B}"/>
-              </a:ext>
-            </a:extLst>
-          </p:cNvPr>
-          <p:cNvSpPr>
-            <a:spLocks noGrp="1"/>
-          </p:cNvSpPr>
-          <p:nvPr>
-            <p:ph type="body" sz="quarter" idx="17" hasCustomPrompt="1"/>
-          </p:nvPr>
-        </p:nvSpPr>
-        <p:spPr>
-          <a:xfrm>
-            <a:off x="457200" y="425325"/>
-            <a:ext cx="8343146" cy="298952"/>
-          </a:xfrm>
-          <a:prstGeom prst="rect">
-            <a:avLst/>
-          </a:prstGeom>
-        </p:spPr>
-        <p:txBody>
-          <a:bodyPr/>
-          <a:lstStyle>
-            <a:lvl1pPr>
-              <a:defRPr lang="en-US" sz="1400" b="1" kern="1200" cap="all" spc="150" baseline="0" dirty="0">
-                <a:solidFill>
-                  <a:schemeClr val="bg2">
-                    <a:lumMod val="50000"/>
-                  </a:schemeClr>
-                </a:solidFill>
-                <a:latin typeface="+mn-lt"/>
-                <a:ea typeface="Georgia" charset="0"/>
-                <a:cs typeface="Georgia" charset="0"/>
-              </a:defRPr>
-            </a:lvl1pPr>
-            <a:lvl2pPr marL="0" indent="0">
-              <a:buNone/>
-              <a:defRPr/>
-            </a:lvl2pPr>
-          </a:lstStyle>
-          <a:p>
-            <a:pPr marL="0" lvl="0" indent="0" algn="l" defTabSz="906199" rtl="0" eaLnBrk="1" latinLnBrk="0" hangingPunct="1">
-              <a:spcBef>
-                <a:spcPts val="0"/>
-              </a:spcBef>
-              <a:spcAft>
-                <a:spcPts val="800"/>
-              </a:spcAft>
-              <a:buClrTx/>
-              <a:buFont typeface="Calibri" panose="020F0502020204030204" pitchFamily="34" charset="0"/>
-              <a:buNone/>
-            </a:pPr>
-            <a:r>
-              <a:rPr lang="en-US" dirty="0"/>
-              <a:t>SECTION TAG</a:t>
-            </a:r>
-          </a:p>
-        </p:txBody>
-      </p:sp>
-      <p:sp>
-        <p:nvSpPr>
-          <p:cNvPr id="7" name="Text Placeholder 4">
-            <a:extLst>
-              <a:ext uri="{FF2B5EF4-FFF2-40B4-BE49-F238E27FC236}">
-                <a16:creationId xmlns:a16="http://schemas.microsoft.com/office/drawing/2014/main" id="{4E8BAC2C-BA39-40C8-A040-4BB7DDFA2AE6}"/>
-              </a:ext>
-            </a:extLst>
-          </p:cNvPr>
-          <p:cNvSpPr>
-            <a:spLocks noGrp="1"/>
-          </p:cNvSpPr>
-          <p:nvPr>
-            <p:ph type="body" sz="quarter" idx="22"/>
-          </p:nvPr>
-        </p:nvSpPr>
-        <p:spPr>
-          <a:xfrm>
-            <a:off x="457201" y="951101"/>
-            <a:ext cx="2466364" cy="4879331"/>
-          </a:xfrm>
-          <a:prstGeom prst="rect">
-            <a:avLst/>
-          </a:prstGeom>
-        </p:spPr>
-        <p:txBody>
-          <a:bodyPr anchor="ctr"/>
-          <a:lstStyle>
-            <a:lvl1pPr>
-              <a:defRPr sz="1800"/>
-            </a:lvl1pPr>
-            <a:lvl2pPr marL="0" indent="0">
-              <a:spcAft>
-                <a:spcPts val="600"/>
-              </a:spcAft>
-              <a:buNone/>
-              <a:defRPr sz="1100"/>
-            </a:lvl2pPr>
-            <a:lvl3pPr marL="173038" indent="-173038">
-              <a:buClr>
-                <a:schemeClr val="bg2">
-                  <a:lumMod val="50000"/>
-                </a:schemeClr>
-              </a:buClr>
-              <a:buFont typeface="Arial" panose="020B0604020202020204" pitchFamily="34" charset="0"/>
-              <a:buChar char="●"/>
-              <a:defRPr sz="1100" b="0"/>
-            </a:lvl3pPr>
-            <a:lvl4pPr marL="344488" indent="-171450">
-              <a:defRPr sz="1100"/>
-            </a:lvl4pPr>
-            <a:lvl5pPr marL="0" indent="0">
-              <a:spcAft>
-                <a:spcPts val="600"/>
-              </a:spcAft>
-              <a:buNone/>
-              <a:defRPr sz="1100" i="1">
-                <a:solidFill>
-                  <a:schemeClr val="accent1"/>
-                </a:solidFill>
-              </a:defRPr>
-            </a:lvl5pPr>
-          </a:lstStyle>
-          <a:p>
-            <a:pPr lvl="0"/>
-            <a:r>
-              <a:rPr lang="en-US" dirty="0"/>
-              <a:t>Click to edit Master text styles</a:t>
-            </a:r>
-          </a:p>
-          <a:p>
-            <a:pPr lvl="1"/>
-            <a:r>
-              <a:rPr lang="en-US" dirty="0"/>
-              <a:t>Second level</a:t>
-            </a:r>
-          </a:p>
-          <a:p>
-            <a:pPr lvl="2"/>
-            <a:r>
-              <a:rPr lang="en-US" dirty="0"/>
-              <a:t>Third level</a:t>
-            </a:r>
-          </a:p>
-          <a:p>
-            <a:pPr lvl="3"/>
-            <a:r>
-              <a:rPr lang="en-US" dirty="0"/>
-              <a:t>Fourth level</a:t>
-            </a:r>
-          </a:p>
-          <a:p>
-            <a:pPr lvl="4"/>
-            <a:r>
-              <a:rPr lang="en-US" dirty="0"/>
-              <a:t>Fifth level</a:t>
-            </a:r>
-          </a:p>
-        </p:txBody>
-      </p:sp>
-      <p:sp>
-        <p:nvSpPr>
-          <p:cNvPr id="8" name="Footer Placeholder 3">
-            <a:extLst>
-              <a:ext uri="{FF2B5EF4-FFF2-40B4-BE49-F238E27FC236}">
-                <a16:creationId xmlns:a16="http://schemas.microsoft.com/office/drawing/2014/main" id="{04FC87E4-1AD0-43FD-BC32-5EA1BE40E578}"/>
-              </a:ext>
-            </a:extLst>
-          </p:cNvPr>
-          <p:cNvSpPr>
-            <a:spLocks noGrp="1"/>
-          </p:cNvSpPr>
-          <p:nvPr>
-            <p:ph type="ftr" sz="quarter" idx="3"/>
-          </p:nvPr>
-        </p:nvSpPr>
-        <p:spPr>
-          <a:xfrm>
-            <a:off x="457200" y="6023777"/>
-            <a:ext cx="2476500" cy="365125"/>
-          </a:xfrm>
-          <a:prstGeom prst="rect">
-            <a:avLst/>
-          </a:prstGeom>
-        </p:spPr>
-        <p:txBody>
-          <a:bodyPr vert="horz" lIns="0" tIns="0" rIns="0" bIns="0" rtlCol="0" anchor="b"/>
-          <a:lstStyle>
-            <a:lvl1pPr algn="l">
-              <a:spcBef>
-                <a:spcPts val="0"/>
-              </a:spcBef>
-              <a:defRPr sz="800">
-                <a:solidFill>
-                  <a:schemeClr val="tx1"/>
-                </a:solidFill>
-              </a:defRPr>
-            </a:lvl1pPr>
-          </a:lstStyle>
-          <a:p>
-            <a:r>
-              <a:rPr lang="en-US"/>
-              <a:t>Base:</a:t>
-            </a:r>
-            <a:br>
-              <a:rPr lang="en-US"/>
-            </a:br>
-            <a:r>
-              <a:rPr lang="en-US"/>
-              <a:t>Q:</a:t>
-            </a:r>
-            <a:br>
-              <a:rPr lang="en-US"/>
-            </a:br>
-            <a:r>
-              <a:rPr lang="en-US"/>
-              <a:t>Note:</a:t>
-            </a:r>
-            <a:endParaRPr lang="en-US" dirty="0"/>
-          </a:p>
-        </p:txBody>
-      </p:sp>
-    </p:spTree>
-    <p:extLst>
-      <p:ext uri="{BB962C8B-B14F-4D97-AF65-F5344CB8AC3E}">
-        <p14:creationId xmlns:p14="http://schemas.microsoft.com/office/powerpoint/2010/main" val="3838449283"/>
-      </p:ext>
-    </p:extLst>
-  </p:cSld>
-  <p:clrMapOvr>
-    <a:masterClrMapping/>
-  </p:clrMapOvr>
-</p:sldLayout>
-</file>
-
-<file path=ppt/slideLayouts/slideLayout4.xml><?xml version="1.0" encoding="utf-8"?>
-<p:sldLayout xmlns:a="http://schemas.openxmlformats.org/drawingml/2006/main" xmlns:r="http://schemas.openxmlformats.org/officeDocument/2006/relationships" xmlns:p="http://schemas.openxmlformats.org/presentationml/2006/main" preserve="1" userDrawn="1">
-  <p:cSld name="TT—Subsection Intro, Paragraph Form">
-    <p:spTree>
-      <p:nvGrpSpPr>
-        <p:cNvPr id="1" name=""/>
-        <p:cNvGrpSpPr/>
-        <p:nvPr/>
-      </p:nvGrpSpPr>
-      <p:grpSpPr>
-        <a:xfrm>
-          <a:off x="0" y="0"/>
-          <a:ext cx="0" cy="0"/>
-          <a:chOff x="0" y="0"/>
-          <a:chExt cx="0" cy="0"/>
-        </a:xfrm>
-      </p:grpSpPr>
-      <p:sp>
-        <p:nvSpPr>
-          <p:cNvPr id="11" name="Rectangle 10">
-            <a:extLst>
-              <a:ext uri="{FF2B5EF4-FFF2-40B4-BE49-F238E27FC236}">
-                <a16:creationId xmlns:a16="http://schemas.microsoft.com/office/drawing/2014/main" id="{CBD07C37-16C9-4DA8-A740-C76FD109EBD5}"/>
-              </a:ext>
-            </a:extLst>
-          </p:cNvPr>
-          <p:cNvSpPr/>
-          <p:nvPr userDrawn="1"/>
-        </p:nvSpPr>
-        <p:spPr>
-          <a:xfrm>
-            <a:off x="9266223" y="0"/>
-            <a:ext cx="2925777" cy="6858000"/>
-          </a:xfrm>
-          <a:prstGeom prst="rect">
-            <a:avLst/>
-          </a:prstGeom>
-          <a:solidFill>
-            <a:srgbClr val="FFFFFF"/>
-          </a:solidFill>
-          <a:ln>
-            <a:noFill/>
-          </a:ln>
-        </p:spPr>
-        <p:style>
-          <a:lnRef idx="2">
-            <a:schemeClr val="accent1">
-              <a:shade val="50000"/>
-            </a:schemeClr>
-          </a:lnRef>
-          <a:fillRef idx="1">
-            <a:schemeClr val="accent1"/>
-          </a:fillRef>
-          <a:effectRef idx="0">
-            <a:schemeClr val="accent1"/>
-          </a:effectRef>
-          <a:fontRef idx="minor">
-            <a:schemeClr val="lt1"/>
-          </a:fontRef>
-        </p:style>
-        <p:txBody>
-          <a:bodyPr rtlCol="0" anchor="ctr"/>
-          <a:lstStyle/>
-          <a:p>
-            <a:pPr algn="ctr"/>
-            <a:endParaRPr lang="en-US" dirty="0"/>
-          </a:p>
-        </p:txBody>
-      </p:sp>
-      <p:sp>
-        <p:nvSpPr>
-          <p:cNvPr id="4" name="Big Idea">
-            <a:extLst>
-              <a:ext uri="{FF2B5EF4-FFF2-40B4-BE49-F238E27FC236}">
-                <a16:creationId xmlns:a16="http://schemas.microsoft.com/office/drawing/2014/main" id="{23308B8E-E88D-4F46-BB59-A5209A6972B4}"/>
-              </a:ext>
-            </a:extLst>
-          </p:cNvPr>
-          <p:cNvSpPr>
-            <a:spLocks noGrp="1"/>
-          </p:cNvSpPr>
-          <p:nvPr>
-            <p:ph type="body" sz="quarter" idx="17"/>
-          </p:nvPr>
-        </p:nvSpPr>
-        <p:spPr>
-          <a:xfrm>
-            <a:off x="457200" y="1229395"/>
-            <a:ext cx="8343900" cy="2314666"/>
-          </a:xfrm>
-          <a:prstGeom prst="rect">
-            <a:avLst/>
-          </a:prstGeom>
-        </p:spPr>
-        <p:txBody>
-          <a:bodyPr anchor="ctr"/>
-          <a:lstStyle>
-            <a:lvl1pPr>
-              <a:spcAft>
-                <a:spcPts val="2000"/>
-              </a:spcAft>
-              <a:defRPr lang="en-US" sz="4400" b="1" kern="1200" spc="-150" dirty="0" smtClean="0">
-                <a:solidFill>
-                  <a:schemeClr val="tx1"/>
-                </a:solidFill>
-                <a:latin typeface="+mn-lt"/>
-                <a:ea typeface="+mj-ea"/>
-                <a:cs typeface="+mj-cs"/>
-              </a:defRPr>
-            </a:lvl1pPr>
-            <a:lvl2pPr marL="0" indent="0">
-              <a:buNone/>
-              <a:defRPr sz="2000">
-                <a:solidFill>
-                  <a:schemeClr val="bg2">
-                    <a:lumMod val="50000"/>
-                  </a:schemeClr>
-                </a:solidFill>
-              </a:defRPr>
-            </a:lvl2pPr>
-          </a:lstStyle>
-          <a:p>
-            <a:pPr lvl="0"/>
-            <a:r>
-              <a:rPr lang="en-US" dirty="0"/>
-              <a:t>Click to edit Master text styles</a:t>
-            </a:r>
-          </a:p>
-          <a:p>
-            <a:pPr lvl="1"/>
-            <a:r>
-              <a:rPr lang="en-US" dirty="0"/>
-              <a:t>Second level</a:t>
-            </a:r>
-          </a:p>
-        </p:txBody>
-      </p:sp>
-      <p:sp>
-        <p:nvSpPr>
-          <p:cNvPr id="10" name="Section Tag">
-            <a:extLst>
-              <a:ext uri="{FF2B5EF4-FFF2-40B4-BE49-F238E27FC236}">
-                <a16:creationId xmlns:a16="http://schemas.microsoft.com/office/drawing/2014/main" id="{92449049-2C6C-46A6-8F6C-E1CC2A901803}"/>
-              </a:ext>
-            </a:extLst>
-          </p:cNvPr>
-          <p:cNvSpPr>
-            <a:spLocks noGrp="1"/>
-          </p:cNvSpPr>
-          <p:nvPr>
-            <p:ph type="body" sz="quarter" idx="16" hasCustomPrompt="1"/>
-          </p:nvPr>
-        </p:nvSpPr>
-        <p:spPr>
-          <a:xfrm>
-            <a:off x="457200" y="425325"/>
-            <a:ext cx="8343146" cy="298952"/>
-          </a:xfrm>
-          <a:prstGeom prst="rect">
-            <a:avLst/>
-          </a:prstGeom>
-        </p:spPr>
-        <p:txBody>
-          <a:bodyPr/>
-          <a:lstStyle>
-            <a:lvl1pPr>
-              <a:defRPr sz="1400" b="1" cap="all" spc="150" baseline="0">
-                <a:solidFill>
-                  <a:schemeClr val="bg2">
-                    <a:lumMod val="50000"/>
-                  </a:schemeClr>
-                </a:solidFill>
-              </a:defRPr>
-            </a:lvl1pPr>
-            <a:lvl2pPr marL="0" indent="0">
-              <a:buNone/>
-              <a:defRPr/>
-            </a:lvl2pPr>
-          </a:lstStyle>
-          <a:p>
-            <a:pPr lvl="0"/>
-            <a:r>
-              <a:rPr lang="en-US" dirty="0"/>
-              <a:t>SECTION TAG</a:t>
-            </a:r>
-          </a:p>
-        </p:txBody>
-      </p:sp>
-      <p:sp>
-        <p:nvSpPr>
-          <p:cNvPr id="9" name="Footer Placeholder 3">
-            <a:extLst>
-              <a:ext uri="{FF2B5EF4-FFF2-40B4-BE49-F238E27FC236}">
-                <a16:creationId xmlns:a16="http://schemas.microsoft.com/office/drawing/2014/main" id="{0D6EC0F8-1B95-4D14-A63C-4417B8D04DEF}"/>
-              </a:ext>
-            </a:extLst>
-          </p:cNvPr>
-          <p:cNvSpPr>
-            <a:spLocks noGrp="1"/>
-          </p:cNvSpPr>
-          <p:nvPr>
-            <p:ph type="ftr" sz="quarter" idx="3"/>
-          </p:nvPr>
-        </p:nvSpPr>
-        <p:spPr>
-          <a:xfrm>
-            <a:off x="457200" y="6023777"/>
-            <a:ext cx="8343146" cy="365125"/>
-          </a:xfrm>
-          <a:prstGeom prst="rect">
-            <a:avLst/>
-          </a:prstGeom>
-        </p:spPr>
-        <p:txBody>
-          <a:bodyPr vert="horz" lIns="0" tIns="0" rIns="0" bIns="0" rtlCol="0" anchor="b"/>
-          <a:lstStyle>
-            <a:lvl1pPr algn="l">
-              <a:spcBef>
-                <a:spcPts val="0"/>
-              </a:spcBef>
-              <a:defRPr sz="800">
-                <a:solidFill>
-                  <a:schemeClr val="tx1"/>
-                </a:solidFill>
-              </a:defRPr>
-            </a:lvl1pPr>
-          </a:lstStyle>
-          <a:p>
-            <a:r>
-              <a:rPr lang="en-US" dirty="0"/>
-              <a:t>Base:</a:t>
-            </a:r>
-            <a:br>
-              <a:rPr lang="en-US" dirty="0"/>
-            </a:br>
-            <a:r>
-              <a:rPr lang="en-US" dirty="0"/>
-              <a:t>Q:</a:t>
-            </a:r>
-            <a:br>
-              <a:rPr lang="en-US" dirty="0"/>
-            </a:br>
-            <a:r>
-              <a:rPr lang="en-US" dirty="0"/>
-              <a:t>Note:</a:t>
-            </a:r>
-          </a:p>
-        </p:txBody>
-      </p:sp>
-      <p:sp>
-        <p:nvSpPr>
-          <p:cNvPr id="3" name="Contents">
-            <a:extLst>
-              <a:ext uri="{FF2B5EF4-FFF2-40B4-BE49-F238E27FC236}">
-                <a16:creationId xmlns:a16="http://schemas.microsoft.com/office/drawing/2014/main" id="{68FEFE21-C87F-438E-9813-00B6F2CB110A}"/>
-              </a:ext>
-            </a:extLst>
-          </p:cNvPr>
-          <p:cNvSpPr>
-            <a:spLocks noGrp="1"/>
-          </p:cNvSpPr>
-          <p:nvPr>
-            <p:ph type="body" sz="quarter" idx="19" hasCustomPrompt="1"/>
-          </p:nvPr>
-        </p:nvSpPr>
-        <p:spPr>
-          <a:xfrm>
-            <a:off x="9490075" y="425324"/>
-            <a:ext cx="2476500" cy="5975475"/>
-          </a:xfrm>
-          <a:prstGeom prst="rect">
-            <a:avLst/>
-          </a:prstGeom>
-        </p:spPr>
-        <p:txBody>
-          <a:bodyPr/>
-          <a:lstStyle>
-            <a:lvl1pPr>
-              <a:defRPr lang="en-US" sz="1000" kern="1200" cap="all" spc="150" baseline="0" dirty="0" smtClean="0">
-                <a:solidFill>
-                  <a:schemeClr val="bg2">
-                    <a:lumMod val="50000"/>
-                  </a:schemeClr>
-                </a:solidFill>
-                <a:latin typeface="+mn-lt"/>
-                <a:ea typeface="Georgia" charset="0"/>
-                <a:cs typeface="Georgia" charset="0"/>
-              </a:defRPr>
-            </a:lvl1pPr>
-            <a:lvl2pPr marL="0" indent="0">
-              <a:spcBef>
-                <a:spcPts val="1200"/>
-              </a:spcBef>
-              <a:spcAft>
-                <a:spcPts val="600"/>
-              </a:spcAft>
-              <a:buNone/>
-              <a:defRPr sz="1100" b="1"/>
-            </a:lvl2pPr>
-            <a:lvl3pPr marL="0" indent="0">
-              <a:spcAft>
-                <a:spcPts val="600"/>
-              </a:spcAft>
-              <a:buNone/>
-              <a:defRPr sz="1100"/>
-            </a:lvl3pPr>
-            <a:lvl4pPr marL="0" indent="0">
-              <a:spcAft>
-                <a:spcPts val="600"/>
-              </a:spcAft>
-              <a:buNone/>
-              <a:defRPr sz="800">
-                <a:solidFill>
-                  <a:schemeClr val="bg2">
-                    <a:lumMod val="50000"/>
-                  </a:schemeClr>
-                </a:solidFill>
-              </a:defRPr>
-            </a:lvl4pPr>
-            <a:lvl5pPr marL="0" indent="0">
-              <a:spcAft>
-                <a:spcPts val="600"/>
-              </a:spcAft>
-              <a:buNone/>
-              <a:defRPr sz="1100" i="1">
-                <a:solidFill>
-                  <a:schemeClr val="accent1"/>
-                </a:solidFill>
-              </a:defRPr>
-            </a:lvl5pPr>
-          </a:lstStyle>
-          <a:p>
-            <a:pPr marL="0" lvl="0" indent="0" algn="l" defTabSz="906199" rtl="0" eaLnBrk="1" latinLnBrk="0" hangingPunct="1">
-              <a:spcBef>
-                <a:spcPts val="1200"/>
-              </a:spcBef>
-              <a:spcAft>
-                <a:spcPts val="600"/>
-              </a:spcAft>
-              <a:buClrTx/>
-              <a:buFont typeface="Calibri" panose="020F0502020204030204" pitchFamily="34" charset="0"/>
-              <a:buNone/>
-            </a:pPr>
-            <a:r>
-              <a:rPr lang="en-US" dirty="0"/>
-              <a:t>CLICK TO EDIT MASTER TEXT STYLES</a:t>
-            </a:r>
-          </a:p>
-          <a:p>
-            <a:pPr lvl="1"/>
-            <a:r>
-              <a:rPr lang="en-US" dirty="0"/>
-              <a:t>Second level</a:t>
-            </a:r>
-          </a:p>
-          <a:p>
-            <a:pPr lvl="2"/>
-            <a:r>
-              <a:rPr lang="en-US" dirty="0"/>
-              <a:t>Third level</a:t>
-            </a:r>
-          </a:p>
-          <a:p>
-            <a:pPr lvl="3"/>
-            <a:r>
-              <a:rPr lang="en-US" dirty="0"/>
-              <a:t>Fourth level</a:t>
-            </a:r>
-          </a:p>
-          <a:p>
-            <a:pPr lvl="4"/>
-            <a:r>
-              <a:rPr lang="en-US" dirty="0"/>
-              <a:t>Fifth level</a:t>
-            </a:r>
-          </a:p>
-        </p:txBody>
-      </p:sp>
-      <p:sp>
-        <p:nvSpPr>
-          <p:cNvPr id="13" name="BodyCopy 1">
-            <a:extLst>
-              <a:ext uri="{FF2B5EF4-FFF2-40B4-BE49-F238E27FC236}">
-                <a16:creationId xmlns:a16="http://schemas.microsoft.com/office/drawing/2014/main" id="{1A9A13B3-B5A5-4146-940A-130AD42D042E}"/>
-              </a:ext>
-            </a:extLst>
-          </p:cNvPr>
-          <p:cNvSpPr>
-            <a:spLocks noGrp="1"/>
-          </p:cNvSpPr>
-          <p:nvPr>
-            <p:ph type="body" sz="quarter" idx="20"/>
-          </p:nvPr>
-        </p:nvSpPr>
-        <p:spPr>
-          <a:xfrm>
-            <a:off x="457200" y="4297680"/>
-            <a:ext cx="8343900" cy="1738314"/>
-          </a:xfrm>
-          <a:prstGeom prst="rect">
-            <a:avLst/>
-          </a:prstGeom>
-        </p:spPr>
-        <p:txBody>
-          <a:bodyPr numCol="3" spcCol="457200"/>
-          <a:lstStyle>
-            <a:lvl1pPr algn="l">
-              <a:spcBef>
-                <a:spcPts val="1200"/>
-              </a:spcBef>
-              <a:spcAft>
-                <a:spcPts val="600"/>
-              </a:spcAft>
-              <a:defRPr b="1"/>
-            </a:lvl1pPr>
-            <a:lvl2pPr marL="0" indent="0" algn="l">
-              <a:spcAft>
-                <a:spcPts val="600"/>
-              </a:spcAft>
-              <a:buNone/>
-              <a:defRPr sz="1100" b="0"/>
-            </a:lvl2pPr>
-            <a:lvl3pPr marL="173038" indent="-173038" algn="l">
-              <a:spcAft>
-                <a:spcPts val="600"/>
-              </a:spcAft>
-              <a:buClr>
-                <a:schemeClr val="bg2">
-                  <a:lumMod val="50000"/>
-                </a:schemeClr>
-              </a:buClr>
-              <a:buFont typeface="Arial" panose="020B0604020202020204" pitchFamily="34" charset="0"/>
-              <a:buChar char="●"/>
-              <a:defRPr sz="1100" b="0"/>
-            </a:lvl3pPr>
-            <a:lvl4pPr marL="396875" indent="-223838" algn="l">
-              <a:spcAft>
-                <a:spcPts val="600"/>
-              </a:spcAft>
-              <a:defRPr sz="1100" b="0"/>
-            </a:lvl4pPr>
-            <a:lvl5pPr marL="0" indent="0" algn="l">
-              <a:spcAft>
-                <a:spcPts val="600"/>
-              </a:spcAft>
-              <a:buNone/>
-              <a:defRPr sz="1100" i="1">
-                <a:solidFill>
-                  <a:schemeClr val="accent1"/>
-                </a:solidFill>
-              </a:defRPr>
-            </a:lvl5pPr>
-          </a:lstStyle>
-          <a:p>
-            <a:pPr lvl="0"/>
-            <a:r>
-              <a:rPr lang="en-US" dirty="0"/>
-              <a:t>Click to edit Master text styles</a:t>
-            </a:r>
-          </a:p>
-          <a:p>
-            <a:pPr lvl="1"/>
-            <a:r>
-              <a:rPr lang="en-US" dirty="0"/>
-              <a:t>Second level</a:t>
-            </a:r>
-          </a:p>
-          <a:p>
-            <a:pPr lvl="2"/>
-            <a:r>
-              <a:rPr lang="en-US" dirty="0"/>
-              <a:t>Third level</a:t>
-            </a:r>
-          </a:p>
-          <a:p>
-            <a:pPr lvl="3"/>
-            <a:r>
-              <a:rPr lang="en-US" dirty="0"/>
-              <a:t>Fourth level</a:t>
-            </a:r>
-          </a:p>
-          <a:p>
-            <a:pPr lvl="4"/>
-            <a:r>
-              <a:rPr lang="en-US" dirty="0"/>
-              <a:t>Fifth level</a:t>
-            </a:r>
-          </a:p>
-        </p:txBody>
-      </p:sp>
-      <p:sp>
-        <p:nvSpPr>
-          <p:cNvPr id="12" name="PPH-SlideNo">
-            <a:extLst>
-              <a:ext uri="{FF2B5EF4-FFF2-40B4-BE49-F238E27FC236}">
-                <a16:creationId xmlns:a16="http://schemas.microsoft.com/office/drawing/2014/main" id="{284BB751-6940-400C-90ED-29200DEF6986}"/>
-              </a:ext>
-            </a:extLst>
-          </p:cNvPr>
-          <p:cNvSpPr>
-            <a:spLocks noGrp="1"/>
-          </p:cNvSpPr>
-          <p:nvPr>
-            <p:ph type="sldNum" sz="quarter" idx="4"/>
-          </p:nvPr>
-        </p:nvSpPr>
-        <p:spPr>
-          <a:xfrm>
-            <a:off x="10611670" y="6550981"/>
-            <a:ext cx="1117599" cy="230823"/>
-          </a:xfrm>
-          <a:prstGeom prst="rect">
-            <a:avLst/>
-          </a:prstGeom>
-        </p:spPr>
-        <p:txBody>
-          <a:bodyPr vert="horz" wrap="none" lIns="0" tIns="0" rIns="0" bIns="0" rtlCol="0" anchor="b"/>
-          <a:lstStyle>
-            <a:lvl1pPr algn="r">
-              <a:spcBef>
-                <a:spcPts val="0"/>
-              </a:spcBef>
-              <a:defRPr sz="800" b="1">
-                <a:solidFill>
-                  <a:schemeClr val="bg2">
-                    <a:lumMod val="50000"/>
-                  </a:schemeClr>
-                </a:solidFill>
-                <a:latin typeface="+mn-lt"/>
-              </a:defRPr>
-            </a:lvl1pPr>
-          </a:lstStyle>
-          <a:p>
-            <a:pPr defTabSz="856716"/>
-            <a:fld id="{7B6B1C32-E567-445C-9FD5-2A0B0A08DD29}" type="slidenum">
-              <a:rPr lang="en-US" smtClean="0"/>
-              <a:pPr defTabSz="856716"/>
-              <a:t>‹#›</a:t>
-            </a:fld>
-            <a:endParaRPr lang="en-US" dirty="0"/>
-          </a:p>
-        </p:txBody>
-      </p:sp>
-    </p:spTree>
-    <p:extLst>
-      <p:ext uri="{BB962C8B-B14F-4D97-AF65-F5344CB8AC3E}">
-        <p14:creationId xmlns:p14="http://schemas.microsoft.com/office/powerpoint/2010/main" val="1702855351"/>
-      </p:ext>
-    </p:extLst>
-  </p:cSld>
-  <p:clrMapOvr>
-    <a:masterClrMapping/>
-  </p:clrMapOvr>
-  <p:hf hdr="0" dt="0"/>
-</p:sldLayout>
-</file>
-
-<file path=ppt/slideLayouts/slideLayout40.xml><?xml version="1.0" encoding="utf-8"?>
+<file path=ppt/slideLayouts/slideLayout41.xml><?xml version="1.0" encoding="utf-8"?>
 <p:sldLayout xmlns:a="http://schemas.openxmlformats.org/drawingml/2006/main" xmlns:r="http://schemas.openxmlformats.org/officeDocument/2006/relationships" xmlns:p="http://schemas.openxmlformats.org/presentationml/2006/main" preserve="1" userDrawn="1">
   <p:cSld name="TT—Pricing">
     <p:spTree>
@@ -17310,7 +18850,7 @@
 </p:sldLayout>
 </file>
 
-<file path=ppt/slideLayouts/slideLayout41.xml><?xml version="1.0" encoding="utf-8"?>
+<file path=ppt/slideLayouts/slideLayout42.xml><?xml version="1.0" encoding="utf-8"?>
 <p:sldLayout xmlns:a="http://schemas.openxmlformats.org/drawingml/2006/main" xmlns:r="http://schemas.openxmlformats.org/officeDocument/2006/relationships" xmlns:p="http://schemas.openxmlformats.org/presentationml/2006/main" showMasterSp="0" preserve="1" userDrawn="1">
   <p:cSld name="IGNITE_TitlePage">
     <p:bg>
@@ -18939,6 +20479,25 @@
                 </a:solidFill>
               </a:defRPr>
             </a:lvl5pPr>
+            <a:lvl6pPr marL="0" indent="0">
+              <a:spcBef>
+                <a:spcPts val="0"/>
+              </a:spcBef>
+              <a:spcAft>
+                <a:spcPts val="600"/>
+              </a:spcAft>
+              <a:buNone/>
+              <a:defRPr lang="en-US" sz="900" kern="1200" dirty="0">
+                <a:solidFill>
+                  <a:schemeClr val="bg2">
+                    <a:lumMod val="50000"/>
+                  </a:schemeClr>
+                </a:solidFill>
+                <a:latin typeface="+mn-lt"/>
+                <a:ea typeface="+mn-ea"/>
+                <a:cs typeface="+mn-cs"/>
+              </a:defRPr>
+            </a:lvl6pPr>
           </a:lstStyle>
           <a:p>
             <a:pPr lvl="0"/>
@@ -18973,6 +20532,13 @@
             <a:r>
               <a:rPr lang="en-US" dirty="0"/>
               <a:t>Fifth level</a:t>
+            </a:r>
+          </a:p>
+          <a:p>
+            <a:pPr lvl="5"/>
+            <a:r>
+              <a:rPr lang="en-US" dirty="0"/>
+              <a:t>Sixth Level</a:t>
             </a:r>
           </a:p>
         </p:txBody>
@@ -19237,6 +20803,22 @@
                 </a:solidFill>
               </a:defRPr>
             </a:lvl5pPr>
+            <a:lvl6pPr marL="0" indent="0">
+              <a:spcBef>
+                <a:spcPts val="0"/>
+              </a:spcBef>
+              <a:spcAft>
+                <a:spcPts val="600"/>
+              </a:spcAft>
+              <a:buNone/>
+              <a:defRPr sz="900">
+                <a:solidFill>
+                  <a:schemeClr val="bg2">
+                    <a:lumMod val="50000"/>
+                  </a:schemeClr>
+                </a:solidFill>
+              </a:defRPr>
+            </a:lvl6pPr>
           </a:lstStyle>
           <a:p>
             <a:pPr lvl="0"/>
@@ -19271,6 +20853,13 @@
             <a:r>
               <a:rPr lang="en-US" dirty="0"/>
               <a:t>Fifth level</a:t>
+            </a:r>
+          </a:p>
+          <a:p>
+            <a:pPr lvl="5"/>
+            <a:r>
+              <a:rPr lang="en-US" dirty="0"/>
+              <a:t>Sixth level</a:t>
             </a:r>
           </a:p>
         </p:txBody>
@@ -19449,18 +21038,32 @@
               <a:buNone/>
               <a:defRPr sz="1100" b="0"/>
             </a:lvl3pPr>
-            <a:lvl4pPr marL="173037" indent="0">
+            <a:lvl4pPr marL="171450" indent="-171450">
               <a:spcAft>
                 <a:spcPts val="600"/>
               </a:spcAft>
-              <a:buNone/>
+              <a:buClr>
+                <a:schemeClr val="bg2">
+                  <a:lumMod val="90000"/>
+                </a:schemeClr>
+              </a:buClr>
+              <a:buSzPct val="120000"/>
+              <a:buFont typeface="Arial" panose="020B0604020202020204" pitchFamily="34" charset="0"/>
+              <a:buChar char="|"/>
               <a:defRPr sz="1100" b="0"/>
             </a:lvl4pPr>
-            <a:lvl5pPr marL="284163" indent="0">
+            <a:lvl5pPr marL="344488" indent="-171450">
               <a:spcAft>
                 <a:spcPts val="600"/>
               </a:spcAft>
-              <a:buNone/>
+              <a:buClr>
+                <a:schemeClr val="bg2">
+                  <a:lumMod val="90000"/>
+                </a:schemeClr>
+              </a:buClr>
+              <a:buSzPct val="120000"/>
+              <a:buFont typeface="Arial" panose="020B0604020202020204" pitchFamily="34" charset="0"/>
+              <a:buChar char="|"/>
               <a:defRPr sz="1100" i="0">
                 <a:solidFill>
                   <a:schemeClr val="bg2">
@@ -19473,35 +21076,35 @@
           <a:p>
             <a:pPr lvl="0"/>
             <a:r>
-              <a:rPr lang="en-US"/>
+              <a:rPr lang="en-US" dirty="0"/>
               <a:t>Click to edit Master text styles</a:t>
             </a:r>
           </a:p>
           <a:p>
             <a:pPr lvl="1"/>
             <a:r>
-              <a:rPr lang="en-US"/>
+              <a:rPr lang="en-US" dirty="0"/>
               <a:t>Second level</a:t>
             </a:r>
           </a:p>
           <a:p>
             <a:pPr lvl="2"/>
             <a:r>
-              <a:rPr lang="en-US"/>
+              <a:rPr lang="en-US" dirty="0"/>
               <a:t>Third level</a:t>
             </a:r>
           </a:p>
           <a:p>
             <a:pPr lvl="3"/>
             <a:r>
-              <a:rPr lang="en-US"/>
+              <a:rPr lang="en-US" dirty="0"/>
               <a:t>Fourth level</a:t>
             </a:r>
           </a:p>
           <a:p>
             <a:pPr lvl="4"/>
             <a:r>
-              <a:rPr lang="en-US"/>
+              <a:rPr lang="en-US" dirty="0"/>
               <a:t>Fifth level</a:t>
             </a:r>
           </a:p>
@@ -19828,6 +21431,18 @@
                 </a:solidFill>
               </a:defRPr>
             </a:lvl5pPr>
+            <a:lvl6pPr marL="0" indent="0">
+              <a:defRPr lang="en-US" sz="900" kern="1200" dirty="0">
+                <a:solidFill>
+                  <a:schemeClr val="bg2">
+                    <a:lumMod val="50000"/>
+                  </a:schemeClr>
+                </a:solidFill>
+                <a:latin typeface="+mn-lt"/>
+                <a:ea typeface="+mn-ea"/>
+                <a:cs typeface="+mn-cs"/>
+              </a:defRPr>
+            </a:lvl6pPr>
           </a:lstStyle>
           <a:p>
             <a:pPr lvl="0"/>
@@ -19862,6 +21477,22 @@
             <a:r>
               <a:rPr lang="en-US" dirty="0"/>
               <a:t>Fifth level</a:t>
+            </a:r>
+          </a:p>
+          <a:p>
+            <a:pPr marL="0" lvl="5" indent="0" algn="l" defTabSz="906199" rtl="0" eaLnBrk="1" latinLnBrk="0" hangingPunct="1">
+              <a:spcBef>
+                <a:spcPts val="0"/>
+              </a:spcBef>
+              <a:spcAft>
+                <a:spcPts val="600"/>
+              </a:spcAft>
+              <a:buFont typeface="Arial" panose="020B0604020202020204" pitchFamily="34" charset="0"/>
+              <a:buNone/>
+            </a:pPr>
+            <a:r>
+              <a:rPr lang="en-US" dirty="0"/>
+              <a:t>Sixth level</a:t>
             </a:r>
           </a:p>
         </p:txBody>
@@ -19940,6 +21571,18 @@
                 </a:solidFill>
               </a:defRPr>
             </a:lvl5pPr>
+            <a:lvl6pPr marL="0" indent="0">
+              <a:defRPr lang="en-US" sz="900" kern="1200" dirty="0">
+                <a:solidFill>
+                  <a:schemeClr val="bg2">
+                    <a:lumMod val="50000"/>
+                  </a:schemeClr>
+                </a:solidFill>
+                <a:latin typeface="+mn-lt"/>
+                <a:ea typeface="+mn-ea"/>
+                <a:cs typeface="+mn-cs"/>
+              </a:defRPr>
+            </a:lvl6pPr>
           </a:lstStyle>
           <a:p>
             <a:pPr lvl="0"/>
@@ -19974,6 +21617,22 @@
             <a:r>
               <a:rPr lang="en-US" dirty="0"/>
               <a:t>Fifth level</a:t>
+            </a:r>
+          </a:p>
+          <a:p>
+            <a:pPr marL="0" lvl="5" indent="0" algn="l" defTabSz="906199" rtl="0" eaLnBrk="1" latinLnBrk="0" hangingPunct="1">
+              <a:spcBef>
+                <a:spcPts val="0"/>
+              </a:spcBef>
+              <a:spcAft>
+                <a:spcPts val="600"/>
+              </a:spcAft>
+              <a:buFont typeface="Arial" panose="020B0604020202020204" pitchFamily="34" charset="0"/>
+              <a:buNone/>
+            </a:pPr>
+            <a:r>
+              <a:rPr lang="en-US" dirty="0"/>
+              <a:t>Sixth Level</a:t>
             </a:r>
           </a:p>
         </p:txBody>
@@ -20317,6 +21976,9 @@
               <a:defRPr sz="1100"/>
             </a:lvl4pPr>
             <a:lvl5pPr marL="0" indent="0">
+              <a:spcAft>
+                <a:spcPts val="600"/>
+              </a:spcAft>
               <a:buNone/>
               <a:defRPr sz="1100" i="1">
                 <a:solidFill>
@@ -20324,6 +21986,18 @@
                 </a:solidFill>
               </a:defRPr>
             </a:lvl5pPr>
+            <a:lvl6pPr marL="0" indent="0">
+              <a:defRPr lang="en-US" sz="900" kern="1200" dirty="0">
+                <a:solidFill>
+                  <a:schemeClr val="bg2">
+                    <a:lumMod val="50000"/>
+                  </a:schemeClr>
+                </a:solidFill>
+                <a:latin typeface="+mn-lt"/>
+                <a:ea typeface="+mn-ea"/>
+                <a:cs typeface="+mn-cs"/>
+              </a:defRPr>
+            </a:lvl6pPr>
           </a:lstStyle>
           <a:p>
             <a:pPr lvl="0"/>
@@ -20358,6 +22032,22 @@
             <a:r>
               <a:rPr lang="en-US" dirty="0"/>
               <a:t>Fifth level</a:t>
+            </a:r>
+          </a:p>
+          <a:p>
+            <a:pPr marL="0" lvl="5" indent="0" algn="l" defTabSz="906199" rtl="0" eaLnBrk="1" latinLnBrk="0" hangingPunct="1">
+              <a:spcBef>
+                <a:spcPts val="0"/>
+              </a:spcBef>
+              <a:spcAft>
+                <a:spcPts val="600"/>
+              </a:spcAft>
+              <a:buFont typeface="Arial" panose="020B0604020202020204" pitchFamily="34" charset="0"/>
+              <a:buNone/>
+            </a:pPr>
+            <a:r>
+              <a:rPr lang="en-US" dirty="0"/>
+              <a:t>Sixth Level</a:t>
             </a:r>
           </a:p>
         </p:txBody>
@@ -20465,6 +22155,20 @@
               <a:t>Fifth level</a:t>
             </a:r>
           </a:p>
+          <a:p>
+            <a:pPr lvl="5"/>
+            <a:r>
+              <a:rPr lang="en-US" dirty="0"/>
+              <a:t>Sixth level</a:t>
+            </a:r>
+          </a:p>
+          <a:p>
+            <a:pPr lvl="6"/>
+            <a:r>
+              <a:rPr lang="en-US" dirty="0"/>
+              <a:t>Seventh Level</a:t>
+            </a:r>
+          </a:p>
         </p:txBody>
       </p:sp>
       <p:sp>
@@ -20677,7 +22381,7 @@
                 <a:latin typeface="+mn-lt"/>
                 <a:cs typeface="Arial" panose="020B0604020202020204" pitchFamily="34" charset="0"/>
               </a:rPr>
-              <a:t>© 2020 Technomic, Inc. </a:t>
+              <a:t>© 2021 Technomic, Inc. </a:t>
             </a:r>
           </a:p>
         </p:txBody>
@@ -20739,7 +22443,7 @@
       </p:sp>
     </p:spTree>
     <p:custDataLst>
-      <p:tags r:id="rId43"/>
+      <p:tags r:id="rId44"/>
     </p:custDataLst>
     <p:extLst>
       <p:ext uri="{BB962C8B-B14F-4D97-AF65-F5344CB8AC3E}">
@@ -20761,35 +22465,36 @@
     <p:sldLayoutId id="2147483689" r:id="rId10"/>
     <p:sldLayoutId id="2147483682" r:id="rId11"/>
     <p:sldLayoutId id="2147483691" r:id="rId12"/>
-    <p:sldLayoutId id="2147483712" r:id="rId13"/>
-    <p:sldLayoutId id="2147483709" r:id="rId14"/>
-    <p:sldLayoutId id="2147483690" r:id="rId15"/>
-    <p:sldLayoutId id="2147483683" r:id="rId16"/>
-    <p:sldLayoutId id="2147483716" r:id="rId17"/>
-    <p:sldLayoutId id="2147483684" r:id="rId18"/>
-    <p:sldLayoutId id="2147483706" r:id="rId19"/>
-    <p:sldLayoutId id="2147483685" r:id="rId20"/>
-    <p:sldLayoutId id="2147483708" r:id="rId21"/>
-    <p:sldLayoutId id="2147483720" r:id="rId22"/>
-    <p:sldLayoutId id="2147483692" r:id="rId23"/>
-    <p:sldLayoutId id="2147483687" r:id="rId24"/>
-    <p:sldLayoutId id="2147483704" r:id="rId25"/>
-    <p:sldLayoutId id="2147483686" r:id="rId26"/>
-    <p:sldLayoutId id="2147483715" r:id="rId27"/>
-    <p:sldLayoutId id="2147483713" r:id="rId28"/>
-    <p:sldLayoutId id="2147483705" r:id="rId29"/>
-    <p:sldLayoutId id="2147483702" r:id="rId30"/>
-    <p:sldLayoutId id="2147483721" r:id="rId31"/>
-    <p:sldLayoutId id="2147483700" r:id="rId32"/>
-    <p:sldLayoutId id="2147483693" r:id="rId33"/>
-    <p:sldLayoutId id="2147483694" r:id="rId34"/>
-    <p:sldLayoutId id="2147483710" r:id="rId35"/>
-    <p:sldLayoutId id="2147483695" r:id="rId36"/>
-    <p:sldLayoutId id="2147483698" r:id="rId37"/>
-    <p:sldLayoutId id="2147483719" r:id="rId38"/>
-    <p:sldLayoutId id="2147483699" r:id="rId39"/>
-    <p:sldLayoutId id="2147483717" r:id="rId40"/>
-    <p:sldLayoutId id="2147483718" r:id="rId41"/>
+    <p:sldLayoutId id="2147483723" r:id="rId13"/>
+    <p:sldLayoutId id="2147483712" r:id="rId14"/>
+    <p:sldLayoutId id="2147483709" r:id="rId15"/>
+    <p:sldLayoutId id="2147483690" r:id="rId16"/>
+    <p:sldLayoutId id="2147483683" r:id="rId17"/>
+    <p:sldLayoutId id="2147483716" r:id="rId18"/>
+    <p:sldLayoutId id="2147483684" r:id="rId19"/>
+    <p:sldLayoutId id="2147483706" r:id="rId20"/>
+    <p:sldLayoutId id="2147483685" r:id="rId21"/>
+    <p:sldLayoutId id="2147483708" r:id="rId22"/>
+    <p:sldLayoutId id="2147483720" r:id="rId23"/>
+    <p:sldLayoutId id="2147483692" r:id="rId24"/>
+    <p:sldLayoutId id="2147483687" r:id="rId25"/>
+    <p:sldLayoutId id="2147483704" r:id="rId26"/>
+    <p:sldLayoutId id="2147483686" r:id="rId27"/>
+    <p:sldLayoutId id="2147483715" r:id="rId28"/>
+    <p:sldLayoutId id="2147483713" r:id="rId29"/>
+    <p:sldLayoutId id="2147483722" r:id="rId30"/>
+    <p:sldLayoutId id="2147483705" r:id="rId31"/>
+    <p:sldLayoutId id="2147483702" r:id="rId32"/>
+    <p:sldLayoutId id="2147483721" r:id="rId33"/>
+    <p:sldLayoutId id="2147483700" r:id="rId34"/>
+    <p:sldLayoutId id="2147483693" r:id="rId35"/>
+    <p:sldLayoutId id="2147483694" r:id="rId36"/>
+    <p:sldLayoutId id="2147483710" r:id="rId37"/>
+    <p:sldLayoutId id="2147483695" r:id="rId38"/>
+    <p:sldLayoutId id="2147483698" r:id="rId39"/>
+    <p:sldLayoutId id="2147483719" r:id="rId40"/>
+    <p:sldLayoutId id="2147483717" r:id="rId41"/>
+    <p:sldLayoutId id="2147483718" r:id="rId42"/>
   </p:sldLayoutIdLst>
   <p:hf hdr="0" dt="0"/>
   <p:txStyles>
@@ -20843,7 +22548,9 @@
           <a:spcPts val="400"/>
         </a:spcAft>
         <a:buClr>
-          <a:schemeClr val="tx2"/>
+          <a:schemeClr val="bg2">
+            <a:lumMod val="50000"/>
+          </a:schemeClr>
         </a:buClr>
         <a:buFont typeface="Helvetica" charset="0"/>
         <a:buChar char="●"/>
@@ -20917,13 +22624,13 @@
           <a:cs typeface="Georgia" charset="0"/>
         </a:defRPr>
       </a:lvl5pPr>
-      <a:lvl6pPr marL="2492048" indent="-226550" algn="l" defTabSz="906199" rtl="0" eaLnBrk="1" latinLnBrk="0" hangingPunct="1">
+      <a:lvl6pPr marL="1027113" indent="-241300" algn="l" defTabSz="906199" rtl="0" eaLnBrk="1" latinLnBrk="0" hangingPunct="1">
         <a:spcBef>
           <a:spcPct val="20000"/>
         </a:spcBef>
         <a:buFont typeface="Arial" panose="020B0604020202020204" pitchFamily="34" charset="0"/>
         <a:buChar char="•"/>
-        <a:defRPr sz="1969" kern="1200">
+        <a:defRPr sz="1400" kern="1200">
           <a:solidFill>
             <a:schemeClr val="tx1"/>
           </a:solidFill>
@@ -20932,13 +22639,13 @@
           <a:cs typeface="+mn-cs"/>
         </a:defRPr>
       </a:lvl6pPr>
-      <a:lvl7pPr marL="2945147" indent="-226550" algn="l" defTabSz="906199" rtl="0" eaLnBrk="1" latinLnBrk="0" hangingPunct="1">
+      <a:lvl7pPr marL="1258888" indent="-236538" algn="l" defTabSz="906199" rtl="0" eaLnBrk="1" latinLnBrk="0" hangingPunct="1">
         <a:spcBef>
           <a:spcPct val="20000"/>
         </a:spcBef>
         <a:buFont typeface="Arial" panose="020B0604020202020204" pitchFamily="34" charset="0"/>
         <a:buChar char="•"/>
-        <a:defRPr sz="1969" kern="1200">
+        <a:defRPr sz="1400" kern="1200">
           <a:solidFill>
             <a:schemeClr val="tx1"/>
           </a:solidFill>
@@ -21292,6 +22999,18 @@
 </file>
 
 <file path=ppt/tags/tag33.xml><?xml version="1.0" encoding="utf-8"?>
+<p:tagLst xmlns:a="http://schemas.openxmlformats.org/drawingml/2006/main" xmlns:r="http://schemas.openxmlformats.org/officeDocument/2006/relationships" xmlns:p="http://schemas.openxmlformats.org/presentationml/2006/main">
+  <p:tag name="ARTICULATE_SLIDE_THUMBNAIL_REFRESH" val="1"/>
+</p:tagLst>
+</file>
+
+<file path=ppt/tags/tag34.xml><?xml version="1.0" encoding="utf-8"?>
+<p:tagLst xmlns:a="http://schemas.openxmlformats.org/drawingml/2006/main" xmlns:r="http://schemas.openxmlformats.org/officeDocument/2006/relationships" xmlns:p="http://schemas.openxmlformats.org/presentationml/2006/main">
+  <p:tag name="ARTICULATE_SLIDE_THUMBNAIL_REFRESH" val="1"/>
+</p:tagLst>
+</file>
+
+<file path=ppt/tags/tag35.xml><?xml version="1.0" encoding="utf-8"?>
 <p:tagLst xmlns:a="http://schemas.openxmlformats.org/drawingml/2006/main" xmlns:r="http://schemas.openxmlformats.org/officeDocument/2006/relationships" xmlns:p="http://schemas.openxmlformats.org/presentationml/2006/main">
   <p:tag name="ARTICULATE_SLIDE_THUMBNAIL_REFRESH" val="1"/>
 </p:tagLst>
